--- a/results/deck/index_lock_evaluation.pptx
+++ b/results/deck/index_lock_evaluation.pptx
@@ -22,6 +22,8 @@
     <p:sldId id="270" r:id="rId21"/>
     <p:sldId id="271" r:id="rId22"/>
     <p:sldId id="272" r:id="rId23"/>
+    <p:sldId id="273" r:id="rId24"/>
+    <p:sldId id="274" r:id="rId25"/>
   </p:sldIdLst>
   <p:sldSz cx="12191695" cy="6858000" type="screen4x3"/>
   <p:notesSz cx="6858000" cy="9144000"/>
@@ -3309,6 +3311,172 @@
                   <a:srgbClr val="1F3A5F"/>
                 </a:solidFill>
               </a:rPr>
+              <a:t>Wormhole, balanced workload (uniform 80 percent reads)</a:t>
+            </a:r>
+          </a:p>
+        </p:txBody>
+      </p:sp>
+      <p:sp>
+        <p:nvSpPr>
+          <p:cNvPr id="3" name="TextBox 2"/>
+          <p:cNvSpPr txBox="1"/>
+          <p:nvPr/>
+        </p:nvSpPr>
+        <p:spPr>
+          <a:xfrm>
+            <a:off x="365760" y="868680"/>
+            <a:ext cx="11430000" cy="365760"/>
+          </a:xfrm>
+          <a:prstGeom prst="rect">
+            <a:avLst/>
+          </a:prstGeom>
+          <a:noFill/>
+        </p:spPr>
+        <p:txBody>
+          <a:bodyPr wrap="square">
+            <a:spAutoFit/>
+          </a:bodyPr>
+          <a:lstStyle/>
+          <a:p>
+            <a:pPr algn="l"/>
+            <a:r>
+              <a:rPr sz="1300" b="0">
+                <a:solidFill>
+                  <a:srgbClr val="555555"/>
+                </a:solidFill>
+              </a:rPr>
+              <a:t>Top: throughput vs threads. Bottom: ranking at the architecture's maximum threads.</a:t>
+            </a:r>
+          </a:p>
+        </p:txBody>
+      </p:sp>
+      <p:pic>
+        <p:nvPicPr>
+          <p:cNvPr id="4" name="Picture 3" descr="wh_balanced.png"/>
+          <p:cNvPicPr>
+            <a:picLocks noChangeAspect="1"/>
+          </p:cNvPicPr>
+          <p:nvPr/>
+        </p:nvPicPr>
+        <p:blipFill>
+          <a:blip r:embed="rId2"/>
+          <a:stretch>
+            <a:fillRect/>
+          </a:stretch>
+        </p:blipFill>
+        <p:spPr>
+          <a:xfrm>
+            <a:off x="548640" y="1280160"/>
+            <a:ext cx="10058400" cy="5767559"/>
+          </a:xfrm>
+          <a:prstGeom prst="rect">
+            <a:avLst/>
+          </a:prstGeom>
+        </p:spPr>
+      </p:pic>
+      <p:sp>
+        <p:nvSpPr>
+          <p:cNvPr id="5" name="TextBox 4"/>
+          <p:cNvSpPr txBox="1"/>
+          <p:nvPr/>
+        </p:nvSpPr>
+        <p:spPr>
+          <a:xfrm>
+            <a:off x="548640" y="5760720"/>
+            <a:ext cx="11064240" cy="1005840"/>
+          </a:xfrm>
+          <a:prstGeom prst="rect">
+            <a:avLst/>
+          </a:prstGeom>
+          <a:noFill/>
+        </p:spPr>
+        <p:txBody>
+          <a:bodyPr wrap="square">
+            <a:spAutoFit/>
+          </a:bodyPr>
+          <a:lstStyle/>
+          <a:p>
+            <a:pPr algn="l"/>
+            <a:r>
+              <a:rPr sz="1200" b="0">
+                <a:solidFill>
+                  <a:srgbClr val="101010"/>
+                </a:solidFill>
+              </a:rPr>
+              <a:t>   On Graviton at 8T, occ-opt finishes on top (32.3 M ops/s). tas and occ are right behind.</a:t>
+            </a:r>
+          </a:p>
+          <a:p>
+            <a:pPr algn="l"/>
+            <a:r>
+              <a:rPr sz="1200" b="0">
+                <a:solidFill>
+                  <a:srgbClr val="101010"/>
+                </a:solidFill>
+              </a:rPr>
+              <a:t>   On Xeon at 16T, ttas wins narrowly (39.0 M) with occ-opt almost tied at 38.7 M.</a:t>
+            </a:r>
+          </a:p>
+          <a:p>
+            <a:pPr algn="l"/>
+            <a:r>
+              <a:rPr sz="1200" b="0">
+                <a:solidFill>
+                  <a:srgbClr val="101010"/>
+                </a:solidFill>
+              </a:rPr>
+              <a:t>   wh-default (upstream wormhole rwlock) is in the middle of the pack on both machines.</a:t>
+            </a:r>
+          </a:p>
+        </p:txBody>
+      </p:sp>
+    </p:spTree>
+  </p:cSld>
+  <p:clrMapOvr>
+    <a:masterClrMapping/>
+  </p:clrMapOvr>
+</p:sld>
+</file>
+
+<file path=ppt/slides/slide11.xml><?xml version="1.0" encoding="utf-8"?>
+<p:sld xmlns:a="http://schemas.openxmlformats.org/drawingml/2006/main" xmlns:p="http://schemas.openxmlformats.org/presentationml/2006/main" xmlns:r="http://schemas.openxmlformats.org/officeDocument/2006/relationships">
+  <p:cSld>
+    <p:spTree>
+      <p:nvGrpSpPr>
+        <p:cNvPr id="1" name=""/>
+        <p:cNvGrpSpPr/>
+        <p:nvPr/>
+      </p:nvGrpSpPr>
+      <p:grpSpPr/>
+      <p:sp>
+        <p:nvSpPr>
+          <p:cNvPr id="2" name="TextBox 1"/>
+          <p:cNvSpPr txBox="1"/>
+          <p:nvPr/>
+        </p:nvSpPr>
+        <p:spPr>
+          <a:xfrm>
+            <a:off x="365760" y="228600"/>
+            <a:ext cx="11430000" cy="640080"/>
+          </a:xfrm>
+          <a:prstGeom prst="rect">
+            <a:avLst/>
+          </a:prstGeom>
+          <a:noFill/>
+        </p:spPr>
+        <p:txBody>
+          <a:bodyPr wrap="square">
+            <a:spAutoFit/>
+          </a:bodyPr>
+          <a:lstStyle/>
+          <a:p>
+            <a:pPr algn="l"/>
+            <a:r>
+              <a:rPr sz="2600" b="1">
+                <a:solidFill>
+                  <a:srgbClr val="1F3A5F"/>
+                </a:solidFill>
+              </a:rPr>
               <a:t>Wormhole, read heavy workload (uniform 90 percent reads)</a:t>
             </a:r>
           </a:p>
@@ -3436,7 +3604,7 @@
 </p:sld>
 </file>
 
-<file path=ppt/slides/slide11.xml><?xml version="1.0" encoding="utf-8"?>
+<file path=ppt/slides/slide12.xml><?xml version="1.0" encoding="utf-8"?>
 <p:sld xmlns:a="http://schemas.openxmlformats.org/drawingml/2006/main" xmlns:p="http://schemas.openxmlformats.org/presentationml/2006/main" xmlns:r="http://schemas.openxmlformats.org/officeDocument/2006/relationships">
   <p:cSld>
     <p:spTree>
@@ -3602,7 +3770,7 @@
 </p:sld>
 </file>
 
-<file path=ppt/slides/slide12.xml><?xml version="1.0" encoding="utf-8"?>
+<file path=ppt/slides/slide13.xml><?xml version="1.0" encoding="utf-8"?>
 <p:sld xmlns:a="http://schemas.openxmlformats.org/drawingml/2006/main" xmlns:p="http://schemas.openxmlformats.org/presentationml/2006/main" xmlns:r="http://schemas.openxmlformats.org/officeDocument/2006/relationships">
   <p:cSld>
     <p:spTree>
@@ -3768,7 +3936,7 @@
 </p:sld>
 </file>
 
-<file path=ppt/slides/slide13.xml><?xml version="1.0" encoding="utf-8"?>
+<file path=ppt/slides/slide14.xml><?xml version="1.0" encoding="utf-8"?>
 <p:sld xmlns:a="http://schemas.openxmlformats.org/drawingml/2006/main" xmlns:p="http://schemas.openxmlformats.org/presentationml/2006/main" xmlns:r="http://schemas.openxmlformats.org/officeDocument/2006/relationships">
   <p:cSld>
     <p:spTree>
@@ -3934,7 +4102,7 @@
 </p:sld>
 </file>
 
-<file path=ppt/slides/slide14.xml><?xml version="1.0" encoding="utf-8"?>
+<file path=ppt/slides/slide15.xml><?xml version="1.0" encoding="utf-8"?>
 <p:sld xmlns:a="http://schemas.openxmlformats.org/drawingml/2006/main" xmlns:p="http://schemas.openxmlformats.org/presentationml/2006/main" xmlns:r="http://schemas.openxmlformats.org/officeDocument/2006/relationships">
   <p:cSld>
     <p:spTree>
@@ -4100,7 +4268,7 @@
 </p:sld>
 </file>
 
-<file path=ppt/slides/slide15.xml><?xml version="1.0" encoding="utf-8"?>
+<file path=ppt/slides/slide16.xml><?xml version="1.0" encoding="utf-8"?>
 <p:sld xmlns:a="http://schemas.openxmlformats.org/drawingml/2006/main" xmlns:p="http://schemas.openxmlformats.org/presentationml/2006/main" xmlns:r="http://schemas.openxmlformats.org/officeDocument/2006/relationships">
   <p:cSld>
     <p:spTree>
@@ -4266,7 +4434,7 @@
 </p:sld>
 </file>
 
-<file path=ppt/slides/slide16.xml><?xml version="1.0" encoding="utf-8"?>
+<file path=ppt/slides/slide17.xml><?xml version="1.0" encoding="utf-8"?>
 <p:sld xmlns:a="http://schemas.openxmlformats.org/drawingml/2006/main" xmlns:p="http://schemas.openxmlformats.org/presentationml/2006/main" xmlns:r="http://schemas.openxmlformats.org/officeDocument/2006/relationships">
   <p:cSld>
     <p:spTree>
@@ -6449,7 +6617,7 @@
 </p:sld>
 </file>
 
-<file path=ppt/slides/slide17.xml><?xml version="1.0" encoding="utf-8"?>
+<file path=ppt/slides/slide18.xml><?xml version="1.0" encoding="utf-8"?>
 <p:sld xmlns:a="http://schemas.openxmlformats.org/drawingml/2006/main" xmlns:p="http://schemas.openxmlformats.org/presentationml/2006/main" xmlns:r="http://schemas.openxmlformats.org/officeDocument/2006/relationships">
   <p:cSld>
     <p:spTree>
@@ -6488,7 +6656,7 @@
                   <a:srgbClr val="1F3A5F"/>
                 </a:solidFill>
               </a:rPr>
-              <a:t>Next steps</a:t>
+              <a:t>Next steps, part 1: an open question to address</a:t>
             </a:r>
           </a:p>
         </p:txBody>
@@ -6496,6 +6664,40 @@
       <p:sp>
         <p:nvSpPr>
           <p:cNvPr id="3" name="TextBox 2"/>
+          <p:cNvSpPr txBox="1"/>
+          <p:nvPr/>
+        </p:nvSpPr>
+        <p:spPr>
+          <a:xfrm>
+            <a:off x="365760" y="868680"/>
+            <a:ext cx="11430000" cy="365760"/>
+          </a:xfrm>
+          <a:prstGeom prst="rect">
+            <a:avLst/>
+          </a:prstGeom>
+          <a:noFill/>
+        </p:spPr>
+        <p:txBody>
+          <a:bodyPr wrap="square">
+            <a:spAutoFit/>
+          </a:bodyPr>
+          <a:lstStyle/>
+          <a:p>
+            <a:pPr algn="l"/>
+            <a:r>
+              <a:rPr sz="1300" b="0">
+                <a:solidFill>
+                  <a:srgbClr val="555555"/>
+                </a:solidFill>
+              </a:rPr>
+              <a:t>From supervisor feedback</a:t>
+            </a:r>
+          </a:p>
+        </p:txBody>
+      </p:sp>
+      <p:sp>
+        <p:nvSpPr>
+          <p:cNvPr id="4" name="TextBox 3"/>
           <p:cNvSpPr txBox="1"/>
           <p:nvPr/>
         </p:nvSpPr>
@@ -6517,40 +6719,62 @@
           <a:p>
             <a:pPr algn="l"/>
             <a:r>
-              <a:rPr sz="1400" b="0">
-                <a:solidFill>
-                  <a:srgbClr val="101010"/>
-                </a:solidFill>
-              </a:rPr>
-              <a:t>   Add Apple Silicon back to the cross arch comparison, just for Wormhole.</a:t>
-            </a:r>
-          </a:p>
-          <a:p>
-            <a:pPr algn="l"/>
-            <a:r>
-              <a:rPr sz="1400" b="0">
-                <a:solidFill>
-                  <a:srgbClr val="101010"/>
-                </a:solidFill>
-              </a:rPr>
-              <a:t>   The M3 P core and E core split makes scaling numbers harder to interpret,</a:t>
-            </a:r>
-          </a:p>
-          <a:p>
-            <a:pPr algn="l"/>
-            <a:r>
-              <a:rPr sz="1400" b="0">
-                <a:solidFill>
-                  <a:srgbClr val="101010"/>
-                </a:solidFill>
-              </a:rPr>
-              <a:t>   so the plan is to limit the comparison to the first 8 P cores only.</a:t>
-            </a:r>
-          </a:p>
-          <a:p>
-            <a:pPr algn="l"/>
-            <a:r>
-              <a:rPr sz="1400" b="0">
+              <a:rPr sz="1100" b="0">
+                <a:solidFill>
+                  <a:srgbClr val="101010"/>
+                </a:solidFill>
+              </a:rPr>
+              <a:t>The question:</a:t>
+            </a:r>
+          </a:p>
+          <a:p>
+            <a:pPr algn="l"/>
+            <a:r>
+              <a:rPr sz="1100" b="0">
+                <a:solidFill>
+                  <a:srgbClr val="101010"/>
+                </a:solidFill>
+              </a:rPr>
+              <a:t>   "Have you examined all synchronization related instructions in armv8 and x86 to make sure that the locks</a:t>
+            </a:r>
+          </a:p>
+          <a:p>
+            <a:pPr algn="l"/>
+            <a:r>
+              <a:rPr sz="1100" b="0">
+                <a:solidFill>
+                  <a:srgbClr val="101010"/>
+                </a:solidFill>
+              </a:rPr>
+              <a:t>   we have been evaluating cover them all? One of the original questions we want to answer is what is the</a:t>
+            </a:r>
+          </a:p>
+          <a:p>
+            <a:pPr algn="l"/>
+            <a:r>
+              <a:rPr sz="1100" b="0">
+                <a:solidFill>
+                  <a:srgbClr val="101010"/>
+                </a:solidFill>
+              </a:rPr>
+              <a:t>   perf difference between directly writing assemblies and using C++ atomics. And it seems that we have</a:t>
+            </a:r>
+          </a:p>
+          <a:p>
+            <a:pPr algn="l"/>
+            <a:r>
+              <a:rPr sz="1100" b="0">
+                <a:solidFill>
+                  <a:srgbClr val="101010"/>
+                </a:solidFill>
+              </a:rPr>
+              <a:t>   been evaluating only the latter."</a:t>
+            </a:r>
+          </a:p>
+          <a:p>
+            <a:pPr algn="l"/>
+            <a:r>
+              <a:rPr sz="1100" b="0">
                 <a:solidFill>
                   <a:srgbClr val="101010"/>
                 </a:solidFill>
@@ -6561,40 +6785,62 @@
           <a:p>
             <a:pPr algn="l"/>
             <a:r>
-              <a:rPr sz="1400" b="0">
-                <a:solidFill>
-                  <a:srgbClr val="101010"/>
-                </a:solidFill>
-              </a:rPr>
-              <a:t>   Get sudo access on the Xeon for one short controlled run.</a:t>
-            </a:r>
-          </a:p>
-          <a:p>
-            <a:pPr algn="l"/>
-            <a:r>
-              <a:rPr sz="1400" b="0">
-                <a:solidFill>
-                  <a:srgbClr val="101010"/>
-                </a:solidFill>
-              </a:rPr>
-              <a:t>   With setup_cpu.sh (performance governor and turbo off) we can rerun a small slice and</a:t>
-            </a:r>
-          </a:p>
-          <a:p>
-            <a:pPr algn="l"/>
-            <a:r>
-              <a:rPr sz="1400" b="0">
-                <a:solidFill>
-                  <a:srgbClr val="101010"/>
-                </a:solidFill>
-              </a:rPr>
-              <a:t>   confirm whether the Xeon variance we currently see is mostly DVFS noise or something deeper.</a:t>
-            </a:r>
-          </a:p>
-          <a:p>
-            <a:pPr algn="l"/>
-            <a:r>
-              <a:rPr sz="1400" b="0">
+              <a:rPr sz="1100" b="0">
+                <a:solidFill>
+                  <a:srgbClr val="101010"/>
+                </a:solidFill>
+              </a:rPr>
+              <a:t>Honest answer:</a:t>
+            </a:r>
+          </a:p>
+          <a:p>
+            <a:pPr algn="l"/>
+            <a:r>
+              <a:rPr sz="1100" b="0">
+                <a:solidFill>
+                  <a:srgbClr val="101010"/>
+                </a:solidFill>
+              </a:rPr>
+              <a:t>   Right. Every lock primitive we have evaluated so far (tas, ttas, cas, ticket, rw, occ) is built on</a:t>
+            </a:r>
+          </a:p>
+          <a:p>
+            <a:pPr algn="l"/>
+            <a:r>
+              <a:rPr sz="1100" b="0">
+                <a:solidFill>
+                  <a:srgbClr val="101010"/>
+                </a:solidFill>
+              </a:rPr>
+              <a:t>   std::atomic. The compiler picks the underlying instruction. On Graviton with -march=native we should be</a:t>
+            </a:r>
+          </a:p>
+          <a:p>
+            <a:pPr algn="l"/>
+            <a:r>
+              <a:rPr sz="1100" b="0">
+                <a:solidFill>
+                  <a:srgbClr val="101010"/>
+                </a:solidFill>
+              </a:rPr>
+              <a:t>   getting the ARMv8.1 LSE atomics (cas, casal, swp, ldadd) but we have not actually verified this with</a:t>
+            </a:r>
+          </a:p>
+          <a:p>
+            <a:pPr algn="l"/>
+            <a:r>
+              <a:rPr sz="1100" b="0">
+                <a:solidFill>
+                  <a:srgbClr val="101010"/>
+                </a:solidFill>
+              </a:rPr>
+              <a:t>   objdump. On Xeon we get the lock prefixed instructions (lock cmpxchg, lock xchg, lock xadd).</a:t>
+            </a:r>
+          </a:p>
+          <a:p>
+            <a:pPr algn="l"/>
+            <a:r>
+              <a:rPr sz="1100" b="0">
                 <a:solidFill>
                   <a:srgbClr val="101010"/>
                 </a:solidFill>
@@ -6605,51 +6851,247 @@
           <a:p>
             <a:pPr algn="l"/>
             <a:r>
-              <a:rPr sz="1400" b="0">
-                <a:solidFill>
-                  <a:srgbClr val="101010"/>
-                </a:solidFill>
-              </a:rPr>
-              <a:t>   Add a per arch lock latency micro benchmark.</a:t>
-            </a:r>
-          </a:p>
-          <a:p>
-            <a:pPr algn="l"/>
-            <a:r>
-              <a:rPr sz="1400" b="0">
-                <a:solidFill>
-                  <a:srgbClr val="101010"/>
-                </a:solidFill>
-              </a:rPr>
-              <a:t>   The current numbers are throughput inside an index. A pure latency view of acquire</a:t>
-            </a:r>
-          </a:p>
-          <a:p>
-            <a:pPr algn="l"/>
-            <a:r>
-              <a:rPr sz="1400" b="0">
-                <a:solidFill>
-                  <a:srgbClr val="101010"/>
-                </a:solidFill>
-              </a:rPr>
-              <a:t>   and release on each architecture would close the loop, by separating raw atomic cost</a:t>
-            </a:r>
-          </a:p>
-          <a:p>
-            <a:pPr algn="l"/>
-            <a:r>
-              <a:rPr sz="1400" b="0">
-                <a:solidFill>
-                  <a:srgbClr val="101010"/>
-                </a:solidFill>
-              </a:rPr>
-              <a:t>   from contention behaviour.</a:t>
-            </a:r>
-          </a:p>
-          <a:p>
-            <a:pPr algn="l"/>
-            <a:r>
-              <a:rPr sz="1400" b="0">
+              <a:rPr sz="1100" b="0">
+                <a:solidFill>
+                  <a:srgbClr val="101010"/>
+                </a:solidFill>
+              </a:rPr>
+              <a:t>Things our current set does NOT cover:</a:t>
+            </a:r>
+          </a:p>
+          <a:p>
+            <a:pPr algn="l"/>
+            <a:r>
+              <a:rPr sz="1100" b="0">
+                <a:solidFill>
+                  <a:srgbClr val="101010"/>
+                </a:solidFill>
+              </a:rPr>
+              <a:t>   On ARM, WFE (Wait For Event) and SEV (Send Event). These let a spinning core enter a low power wait</a:t>
+            </a:r>
+          </a:p>
+          <a:p>
+            <a:pPr algn="l"/>
+            <a:r>
+              <a:rPr sz="1100" b="0">
+                <a:solidFill>
+                  <a:srgbClr val="101010"/>
+                </a:solidFill>
+              </a:rPr>
+              <a:t>   that wakes when the cache line changes. The Linux kernel arm64 spinlock uses them. Our cpu_relax just</a:t>
+            </a:r>
+          </a:p>
+          <a:p>
+            <a:pPr algn="l"/>
+            <a:r>
+              <a:rPr sz="1100" b="0">
+                <a:solidFill>
+                  <a:srgbClr val="101010"/>
+                </a:solidFill>
+              </a:rPr>
+              <a:t>   does YIELD which is a hint that is largely a NOP on Neoverse cores.</a:t>
+            </a:r>
+          </a:p>
+          <a:p>
+            <a:pPr algn="l"/>
+            <a:r>
+              <a:rPr sz="1100" b="0">
+                <a:solidFill>
+                  <a:srgbClr val="101010"/>
+                </a:solidFill>
+              </a:rPr>
+              <a:t>   On ARM, hand picking barrier strength (DMB ISHLD vs DMB ISHST vs DMB ISH SY) instead of letting the</a:t>
+            </a:r>
+          </a:p>
+          <a:p>
+            <a:pPr algn="l"/>
+            <a:r>
+              <a:rPr sz="1100" b="0">
+                <a:solidFill>
+                  <a:srgbClr val="101010"/>
+                </a:solidFill>
+              </a:rPr>
+              <a:t>   compiler map memory_order_release to whichever DMB it picks.</a:t>
+            </a:r>
+          </a:p>
+          <a:p>
+            <a:pPr algn="l"/>
+            <a:r>
+              <a:rPr sz="1100" b="0">
+                <a:solidFill>
+                  <a:srgbClr val="101010"/>
+                </a:solidFill>
+              </a:rPr>
+              <a:t>   On x86, there is much less missing. PAUSE we already use. UMONITOR / UMWAIT exists on Tremont and</a:t>
+            </a:r>
+          </a:p>
+          <a:p>
+            <a:pPr algn="l"/>
+            <a:r>
+              <a:rPr sz="1100" b="0">
+                <a:solidFill>
+                  <a:srgbClr val="101010"/>
+                </a:solidFill>
+              </a:rPr>
+              <a:t>   Tigerlake plus, but diascld45 (Haswell era) does not have it. TSX HLE and RTM are disabled in microcode</a:t>
+            </a:r>
+          </a:p>
+          <a:p>
+            <a:pPr algn="l"/>
+            <a:r>
+              <a:rPr sz="1100" b="0">
+                <a:solidFill>
+                  <a:srgbClr val="101010"/>
+                </a:solidFill>
+              </a:rPr>
+              <a:t>   on most modern Xeons due to MDS / Spectre mitigations.</a:t>
+            </a:r>
+          </a:p>
+        </p:txBody>
+      </p:sp>
+    </p:spTree>
+  </p:cSld>
+  <p:clrMapOvr>
+    <a:masterClrMapping/>
+  </p:clrMapOvr>
+</p:sld>
+</file>
+
+<file path=ppt/slides/slide19.xml><?xml version="1.0" encoding="utf-8"?>
+<p:sld xmlns:a="http://schemas.openxmlformats.org/drawingml/2006/main" xmlns:p="http://schemas.openxmlformats.org/presentationml/2006/main" xmlns:r="http://schemas.openxmlformats.org/officeDocument/2006/relationships">
+  <p:cSld>
+    <p:spTree>
+      <p:nvGrpSpPr>
+        <p:cNvPr id="1" name=""/>
+        <p:cNvGrpSpPr/>
+        <p:nvPr/>
+      </p:nvGrpSpPr>
+      <p:grpSpPr/>
+      <p:sp>
+        <p:nvSpPr>
+          <p:cNvPr id="2" name="TextBox 1"/>
+          <p:cNvSpPr txBox="1"/>
+          <p:nvPr/>
+        </p:nvSpPr>
+        <p:spPr>
+          <a:xfrm>
+            <a:off x="365760" y="228600"/>
+            <a:ext cx="11430000" cy="640080"/>
+          </a:xfrm>
+          <a:prstGeom prst="rect">
+            <a:avLst/>
+          </a:prstGeom>
+          <a:noFill/>
+        </p:spPr>
+        <p:txBody>
+          <a:bodyPr wrap="square">
+            <a:spAutoFit/>
+          </a:bodyPr>
+          <a:lstStyle/>
+          <a:p>
+            <a:pPr algn="l"/>
+            <a:r>
+              <a:rPr sz="2600" b="1">
+                <a:solidFill>
+                  <a:srgbClr val="1F3A5F"/>
+                </a:solidFill>
+              </a:rPr>
+              <a:t>Next steps, part 2: concrete experiments to run</a:t>
+            </a:r>
+          </a:p>
+        </p:txBody>
+      </p:sp>
+      <p:sp>
+        <p:nvSpPr>
+          <p:cNvPr id="3" name="TextBox 2"/>
+          <p:cNvSpPr txBox="1"/>
+          <p:nvPr/>
+        </p:nvSpPr>
+        <p:spPr>
+          <a:xfrm>
+            <a:off x="457200" y="1280160"/>
+            <a:ext cx="11247120" cy="5303520"/>
+          </a:xfrm>
+          <a:prstGeom prst="rect">
+            <a:avLst/>
+          </a:prstGeom>
+          <a:noFill/>
+        </p:spPr>
+        <p:txBody>
+          <a:bodyPr wrap="square">
+            <a:spAutoFit/>
+          </a:bodyPr>
+          <a:lstStyle/>
+          <a:p>
+            <a:pPr algn="l"/>
+            <a:r>
+              <a:rPr sz="1100" b="0">
+                <a:solidFill>
+                  <a:srgbClr val="101010"/>
+                </a:solidFill>
+              </a:rPr>
+              <a:t>A. Verify what GCC actually emits for our locks (low effort, high information).</a:t>
+            </a:r>
+          </a:p>
+          <a:p>
+            <a:pPr algn="l"/>
+            <a:r>
+              <a:rPr sz="1100" b="0">
+                <a:solidFill>
+                  <a:srgbClr val="101010"/>
+                </a:solidFill>
+              </a:rPr>
+              <a:t>   Run objdump -d on each wormhole-rt-&lt;lock&gt;.a on Graviton and Xeon. Check that:</a:t>
+            </a:r>
+          </a:p>
+          <a:p>
+            <a:pPr algn="l"/>
+            <a:r>
+              <a:rPr sz="1100" b="0">
+                <a:solidFill>
+                  <a:srgbClr val="101010"/>
+                </a:solidFill>
+              </a:rPr>
+              <a:t>      tas_lock and ttas_lock use casal (LSE) on Graviton, lock cmpxchg / lock xchg on Xeon.</a:t>
+            </a:r>
+          </a:p>
+          <a:p>
+            <a:pPr algn="l"/>
+            <a:r>
+              <a:rPr sz="1100" b="0">
+                <a:solidFill>
+                  <a:srgbClr val="101010"/>
+                </a:solidFill>
+              </a:rPr>
+              <a:t>      cas_lock uses cas (LSE) on Graviton.</a:t>
+            </a:r>
+          </a:p>
+          <a:p>
+            <a:pPr algn="l"/>
+            <a:r>
+              <a:rPr sz="1100" b="0">
+                <a:solidFill>
+                  <a:srgbClr val="101010"/>
+                </a:solidFill>
+              </a:rPr>
+              <a:t>   If we are still seeing ldaxr / stlxr loops on Graviton, our -march flag is wrong and we are paying</a:t>
+            </a:r>
+          </a:p>
+          <a:p>
+            <a:pPr algn="l"/>
+            <a:r>
+              <a:rPr sz="1100" b="0">
+                <a:solidFill>
+                  <a:srgbClr val="101010"/>
+                </a:solidFill>
+              </a:rPr>
+              <a:t>   the LL/SC penalty unnecessarily.</a:t>
+            </a:r>
+          </a:p>
+          <a:p>
+            <a:pPr algn="l"/>
+            <a:r>
+              <a:rPr sz="1100" b="0">
                 <a:solidFill>
                   <a:srgbClr val="101010"/>
                 </a:solidFill>
@@ -6660,34 +7102,188 @@
           <a:p>
             <a:pPr algn="l"/>
             <a:r>
-              <a:rPr sz="1400" b="0">
-                <a:solidFill>
-                  <a:srgbClr val="101010"/>
-                </a:solidFill>
-              </a:rPr>
-              <a:t>   Write up a short paper section on the cross architecture lock ranking story.</a:t>
-            </a:r>
-          </a:p>
-          <a:p>
-            <a:pPr algn="l"/>
-            <a:r>
-              <a:rPr sz="1400" b="0">
-                <a:solidFill>
-                  <a:srgbClr val="101010"/>
-                </a:solidFill>
-              </a:rPr>
-              <a:t>   The fact that ttas wins more often on Graviton while cas and ticket show up more on Xeon</a:t>
-            </a:r>
-          </a:p>
-          <a:p>
-            <a:pPr algn="l"/>
-            <a:r>
-              <a:rPr sz="1400" b="0">
-                <a:solidFill>
-                  <a:srgbClr val="101010"/>
-                </a:solidFill>
-              </a:rPr>
-              <a:t>   is a concrete result worth landing in writing.</a:t>
+              <a:rPr sz="1100" b="0">
+                <a:solidFill>
+                  <a:srgbClr val="101010"/>
+                </a:solidFill>
+              </a:rPr>
+              <a:t>B. Add a WFE based spinlock primitive (most promising new direction for ARM).</a:t>
+            </a:r>
+          </a:p>
+          <a:p>
+            <a:pPr algn="l"/>
+            <a:r>
+              <a:rPr sz="1100" b="0">
+                <a:solidFill>
+                  <a:srgbClr val="101010"/>
+                </a:solidFill>
+              </a:rPr>
+              <a:t>   New file: include/primitives/tas_lock_wfe.hpp and a matching cas_lock_wfe.hpp.</a:t>
+            </a:r>
+          </a:p>
+          <a:p>
+            <a:pPr algn="l"/>
+            <a:r>
+              <a:rPr sz="1100" b="0">
+                <a:solidFill>
+                  <a:srgbClr val="101010"/>
+                </a:solidFill>
+              </a:rPr>
+              <a:t>   The acquire path: try the atomic, on failure use WFE to wait for any change to the cache line, then retry.</a:t>
+            </a:r>
+          </a:p>
+          <a:p>
+            <a:pPr algn="l"/>
+            <a:r>
+              <a:rPr sz="1100" b="0">
+                <a:solidFill>
+                  <a:srgbClr val="101010"/>
+                </a:solidFill>
+              </a:rPr>
+              <a:t>   The release path: store, then SEV to wake any waiting cores. Reference: Linux arch/arm64 spinlock.h.</a:t>
+            </a:r>
+          </a:p>
+          <a:p>
+            <a:pPr algn="l"/>
+            <a:r>
+              <a:rPr sz="1100" b="0">
+                <a:solidFill>
+                  <a:srgbClr val="101010"/>
+                </a:solidFill>
+              </a:rPr>
+              <a:t>   Plug into the Wormhole shim and compare against the YIELD based versions on Graviton.</a:t>
+            </a:r>
+          </a:p>
+          <a:p>
+            <a:pPr algn="l"/>
+            <a:r>
+              <a:rPr sz="1100" b="0">
+                <a:solidFill>
+                  <a:srgbClr val="101010"/>
+                </a:solidFill>
+              </a:rPr>
+              <a:t>   Hypothesis: at high contention, WFE saves real power and may reduce coherence traffic;</a:t>
+            </a:r>
+          </a:p>
+          <a:p>
+            <a:pPr algn="l"/>
+            <a:r>
+              <a:rPr sz="1100" b="0">
+                <a:solidFill>
+                  <a:srgbClr val="101010"/>
+                </a:solidFill>
+              </a:rPr>
+              <a:t>   at low contention it is a wash or slightly slower because of the extra SEV.</a:t>
+            </a:r>
+          </a:p>
+          <a:p>
+            <a:pPr algn="l"/>
+            <a:r>
+              <a:rPr sz="1100" b="0">
+                <a:solidFill>
+                  <a:srgbClr val="101010"/>
+                </a:solidFill>
+              </a:rPr>
+              <a:t/>
+            </a:r>
+          </a:p>
+          <a:p>
+            <a:pPr algn="l"/>
+            <a:r>
+              <a:rPr sz="1100" b="0">
+                <a:solidFill>
+                  <a:srgbClr val="101010"/>
+                </a:solidFill>
+              </a:rPr>
+              <a:t>C. Hand assembly TAS and CAS to compare against std::atomic versions.</a:t>
+            </a:r>
+          </a:p>
+          <a:p>
+            <a:pPr algn="l"/>
+            <a:r>
+              <a:rPr sz="1100" b="0">
+                <a:solidFill>
+                  <a:srgbClr val="101010"/>
+                </a:solidFill>
+              </a:rPr>
+              <a:t>   Write a tas_lock_asm and cas_lock_asm that use inline asm directly (LSE on ARM, lock prefix on x86).</a:t>
+            </a:r>
+          </a:p>
+          <a:p>
+            <a:pPr algn="l"/>
+            <a:r>
+              <a:rPr sz="1100" b="0">
+                <a:solidFill>
+                  <a:srgbClr val="101010"/>
+                </a:solidFill>
+              </a:rPr>
+              <a:t>   Compare the throughput at every thread point. The expected delta is small if -march=native is doing</a:t>
+            </a:r>
+          </a:p>
+          <a:p>
+            <a:pPr algn="l"/>
+            <a:r>
+              <a:rPr sz="1100" b="0">
+                <a:solidFill>
+                  <a:srgbClr val="101010"/>
+                </a:solidFill>
+              </a:rPr>
+              <a:t>   its job, but if there is a measurable gap that is itself an interesting finding for the writeup.</a:t>
+            </a:r>
+          </a:p>
+          <a:p>
+            <a:pPr algn="l"/>
+            <a:r>
+              <a:rPr sz="1100" b="0">
+                <a:solidFill>
+                  <a:srgbClr val="101010"/>
+                </a:solidFill>
+              </a:rPr>
+              <a:t/>
+            </a:r>
+          </a:p>
+          <a:p>
+            <a:pPr algn="l"/>
+            <a:r>
+              <a:rPr sz="1100" b="0">
+                <a:solidFill>
+                  <a:srgbClr val="101010"/>
+                </a:solidFill>
+              </a:rPr>
+              <a:t>D. Smaller items still on the list.</a:t>
+            </a:r>
+          </a:p>
+          <a:p>
+            <a:pPr algn="l"/>
+            <a:r>
+              <a:rPr sz="1100" b="0">
+                <a:solidFill>
+                  <a:srgbClr val="101010"/>
+                </a:solidFill>
+              </a:rPr>
+              <a:t>   Get sudo on Xeon for one controlled run with setup_cpu.sh, to separate DVFS noise from real lock behaviour.</a:t>
+            </a:r>
+          </a:p>
+          <a:p>
+            <a:pPr algn="l"/>
+            <a:r>
+              <a:rPr sz="1100" b="0">
+                <a:solidFill>
+                  <a:srgbClr val="101010"/>
+                </a:solidFill>
+              </a:rPr>
+              <a:t>   Add Apple M3 back for the Wormhole comparison (P cores only, capped at 6T to stay homogeneous).</a:t>
+            </a:r>
+          </a:p>
+          <a:p>
+            <a:pPr algn="l"/>
+            <a:r>
+              <a:rPr sz="1100" b="0">
+                <a:solidFill>
+                  <a:srgbClr val="101010"/>
+                </a:solidFill>
+              </a:rPr>
+              <a:t>   Write up the cross arch lock ranking finding (ttas wins more on Graviton, cas / ticket more on Xeon).</a:t>
             </a:r>
           </a:p>
         </p:txBody>
@@ -7630,7 +8226,7 @@
                   <a:srgbClr val="1F3A5F"/>
                 </a:solidFill>
               </a:rPr>
-              <a:t>How we built StripedMap</a:t>
+              <a:t>Thread pinning details, Graviton specifics</a:t>
             </a:r>
           </a:p>
         </p:txBody>
@@ -7664,7 +8260,7 @@
                   <a:srgbClr val="555555"/>
                 </a:solidFill>
               </a:rPr>
-              <a:t>Adapter at include/indexes/striped_map_index.hpp</a:t>
+              <a:t>How --pin works in the harness, and what it actually does on a c6g instance</a:t>
             </a:r>
           </a:p>
         </p:txBody>
@@ -7693,18 +8289,51 @@
           <a:p>
             <a:pPr algn="l"/>
             <a:r>
-              <a:rPr sz="1400" b="0">
-                <a:solidFill>
-                  <a:srgbClr val="101010"/>
-                </a:solidFill>
-              </a:rPr>
-              <a:t>Wraps cds::container::StripedMap from libcds.</a:t>
-            </a:r>
-          </a:p>
-          <a:p>
-            <a:pPr algn="l"/>
-            <a:r>
-              <a:rPr sz="1400" b="0">
+              <a:rPr sz="1100" b="0">
+                <a:solidFill>
+                  <a:srgbClr val="101010"/>
+                </a:solidFill>
+              </a:rPr>
+              <a:t>How --pin is implemented (Linux only, in include/primitives/util.hpp):</a:t>
+            </a:r>
+          </a:p>
+          <a:p>
+            <a:pPr algn="l"/>
+            <a:r>
+              <a:rPr sz="1100" b="0">
+                <a:solidFill>
+                  <a:srgbClr val="101010"/>
+                </a:solidFill>
+              </a:rPr>
+              <a:t>   set_thread_affinity(thread_id) calls sched_setaffinity with a cpu_set_t containing only that one CPU.</a:t>
+            </a:r>
+          </a:p>
+          <a:p>
+            <a:pPr algn="l"/>
+            <a:r>
+              <a:rPr sz="1100" b="0">
+                <a:solidFill>
+                  <a:srgbClr val="101010"/>
+                </a:solidFill>
+              </a:rPr>
+              <a:t>   Threads are numbered 0, 1, 2, ..., so thread N gets pinned to logical CPU N.</a:t>
+            </a:r>
+          </a:p>
+          <a:p>
+            <a:pPr algn="l"/>
+            <a:r>
+              <a:rPr sz="1100" b="0">
+                <a:solidFill>
+                  <a:srgbClr val="101010"/>
+                </a:solidFill>
+              </a:rPr>
+              <a:t>   Pinning is dense and sequential: a 4 thread run uses CPUs 0..3, an 8 thread run uses CPUs 0..7.</a:t>
+            </a:r>
+          </a:p>
+          <a:p>
+            <a:pPr algn="l"/>
+            <a:r>
+              <a:rPr sz="1100" b="0">
                 <a:solidFill>
                   <a:srgbClr val="101010"/>
                 </a:solidFill>
@@ -7715,84 +8344,84 @@
           <a:p>
             <a:pPr algn="l"/>
             <a:r>
-              <a:rPr sz="1400" b="0">
-                <a:solidFill>
-                  <a:srgbClr val="101010"/>
-                </a:solidFill>
-              </a:rPr>
-              <a:t>   Hash table with std::list buckets and a fixed array of N stripe locks.</a:t>
-            </a:r>
-          </a:p>
-          <a:p>
-            <a:pPr algn="l"/>
-            <a:r>
-              <a:rPr sz="1400" b="0">
-                <a:solidFill>
-                  <a:srgbClr val="101010"/>
-                </a:solidFill>
-              </a:rPr>
-              <a:t>   The lock primitive is the template parameter to cds::container::striped_set::striping&lt;Lock&gt;,</a:t>
-            </a:r>
-          </a:p>
-          <a:p>
-            <a:pPr algn="l"/>
-            <a:r>
-              <a:rPr sz="1400" b="0">
-                <a:solidFill>
-                  <a:srgbClr val="101010"/>
-                </a:solidFill>
-              </a:rPr>
-              <a:t>   so we plug any lockbench primitive (tas_lock, ttas_lock, cas_lock, ticket_lock, std::mutex) at compile time.</a:t>
-            </a:r>
-          </a:p>
-          <a:p>
-            <a:pPr algn="l"/>
-            <a:r>
-              <a:rPr sz="1400" b="0">
-                <a:solidFill>
-                  <a:srgbClr val="101010"/>
-                </a:solidFill>
-              </a:rPr>
-              <a:t>   We use 65536 stripes. Each operation hashes the key, picks the stripe, and acquires its lock.</a:t>
-            </a:r>
-          </a:p>
-          <a:p>
-            <a:pPr algn="l"/>
-            <a:r>
-              <a:rPr sz="1400" b="0">
-                <a:solidFill>
-                  <a:srgbClr val="101010"/>
-                </a:solidFill>
-              </a:rPr>
-              <a:t>   Resize policy is load_factor_resizing&lt;4&gt;: when item count divided by buckets exceeds 4,</a:t>
-            </a:r>
-          </a:p>
-          <a:p>
-            <a:pPr algn="l"/>
-            <a:r>
-              <a:rPr sz="1400" b="0">
-                <a:solidFill>
-                  <a:srgbClr val="101010"/>
-                </a:solidFill>
-              </a:rPr>
-              <a:t>   the map takes ALL stripe locks (scoped_full_lock) and rehashes. We size the initial bucket array</a:t>
-            </a:r>
-          </a:p>
-          <a:p>
-            <a:pPr algn="l"/>
-            <a:r>
-              <a:rPr sz="1400" b="0">
-                <a:solidFill>
-                  <a:srgbClr val="101010"/>
-                </a:solidFill>
-              </a:rPr>
-              <a:t>   large enough that we do not hit a resize during a benchmark run.</a:t>
-            </a:r>
-          </a:p>
-          <a:p>
-            <a:pPr algn="l"/>
-            <a:r>
-              <a:rPr sz="1400" b="0">
+              <a:rPr sz="1100" b="0">
+                <a:solidFill>
+                  <a:srgbClr val="101010"/>
+                </a:solidFill>
+              </a:rPr>
+              <a:t>What that means on AWS Graviton specifically:</a:t>
+            </a:r>
+          </a:p>
+          <a:p>
+            <a:pPr algn="l"/>
+            <a:r>
+              <a:rPr sz="1100" b="0">
+                <a:solidFill>
+                  <a:srgbClr val="101010"/>
+                </a:solidFill>
+              </a:rPr>
+              <a:t>   c6g instances run Neoverse N1 cores. Neoverse N1 does NOT support SMT, so one vCPU is one physical core.</a:t>
+            </a:r>
+          </a:p>
+          <a:p>
+            <a:pPr algn="l"/>
+            <a:r>
+              <a:rPr sz="1100" b="0">
+                <a:solidFill>
+                  <a:srgbClr val="101010"/>
+                </a:solidFill>
+              </a:rPr>
+              <a:t>   The kernel sees CPUs 0..7 on a c6g.2xlarge, and those map 1 to 1 to physical Graviton cores.</a:t>
+            </a:r>
+          </a:p>
+          <a:p>
+            <a:pPr algn="l"/>
+            <a:r>
+              <a:rPr sz="1100" b="0">
+                <a:solidFill>
+                  <a:srgbClr val="101010"/>
+                </a:solidFill>
+              </a:rPr>
+              <a:t>   AWS Nitro / Graviton does not migrate vCPUs across physical cores at runtime under steady load.</a:t>
+            </a:r>
+          </a:p>
+          <a:p>
+            <a:pPr algn="l"/>
+            <a:r>
+              <a:rPr sz="1100" b="0">
+                <a:solidFill>
+                  <a:srgbClr val="101010"/>
+                </a:solidFill>
+              </a:rPr>
+              <a:t>   So sched_setaffinity to CPU N effectively pins to physical core N for the duration of the run.</a:t>
+            </a:r>
+          </a:p>
+          <a:p>
+            <a:pPr algn="l"/>
+            <a:r>
+              <a:rPr sz="1100" b="0">
+                <a:solidFill>
+                  <a:srgbClr val="101010"/>
+                </a:solidFill>
+              </a:rPr>
+              <a:t>   Each pinned thread also gets a hypervisor managed clock that does not vary at runtime, which is one</a:t>
+            </a:r>
+          </a:p>
+          <a:p>
+            <a:pPr algn="l"/>
+            <a:r>
+              <a:rPr sz="1100" b="0">
+                <a:solidFill>
+                  <a:srgbClr val="101010"/>
+                </a:solidFill>
+              </a:rPr>
+              <a:t>   reason fairness numbers on Graviton are very tight (around 0.98 across all benches).</a:t>
+            </a:r>
+          </a:p>
+          <a:p>
+            <a:pPr algn="l"/>
+            <a:r>
+              <a:rPr sz="1100" b="0">
                 <a:solidFill>
                   <a:srgbClr val="101010"/>
                 </a:solidFill>
@@ -7803,34 +8432,122 @@
           <a:p>
             <a:pPr algn="l"/>
             <a:r>
-              <a:rPr sz="1400" b="0">
-                <a:solidFill>
-                  <a:srgbClr val="101010"/>
-                </a:solidFill>
-              </a:rPr>
-              <a:t>Why it matters: StripedMap is the simplest of the three indexes. There is no traversal,</a:t>
-            </a:r>
-          </a:p>
-          <a:p>
-            <a:pPr algn="l"/>
-            <a:r>
-              <a:rPr sz="1400" b="0">
-                <a:solidFill>
-                  <a:srgbClr val="101010"/>
-                </a:solidFill>
-              </a:rPr>
-              <a:t>each operation acquires exactly one lock, so it isolates the cost of a single lock acquire</a:t>
-            </a:r>
-          </a:p>
-          <a:p>
-            <a:pPr algn="l"/>
-            <a:r>
-              <a:rPr sz="1400" b="0">
-                <a:solidFill>
-                  <a:srgbClr val="101010"/>
-                </a:solidFill>
-              </a:rPr>
-              <a:t>plus the time to walk the per stripe std::list.</a:t>
+              <a:rPr sz="1100" b="0">
+                <a:solidFill>
+                  <a:srgbClr val="101010"/>
+                </a:solidFill>
+              </a:rPr>
+              <a:t>Honest disclaimer about the data in this deck:</a:t>
+            </a:r>
+          </a:p>
+          <a:p>
+            <a:pPr algn="l"/>
+            <a:r>
+              <a:rPr sz="1100" b="0">
+                <a:solidFill>
+                  <a:srgbClr val="101010"/>
+                </a:solidFill>
+              </a:rPr>
+              <a:t>   The harness has a --pin flag, but only the standalone cds_sweep.sh passes it. The two sweep scripts</a:t>
+            </a:r>
+          </a:p>
+          <a:p>
+            <a:pPr algn="l"/>
+            <a:r>
+              <a:rPr sz="1100" b="0">
+                <a:solidFill>
+                  <a:srgbClr val="101010"/>
+                </a:solidFill>
+              </a:rPr>
+              <a:t>   used to produce these slides (wh_compare.sh and run_avl_compare.sh) do NOT pass --pin.</a:t>
+            </a:r>
+          </a:p>
+          <a:p>
+            <a:pPr algn="l"/>
+            <a:r>
+              <a:rPr sz="1100" b="0">
+                <a:solidFill>
+                  <a:srgbClr val="101010"/>
+                </a:solidFill>
+              </a:rPr>
+              <a:t>   So the Wormhole, BronsonAVL, and StripedMap numbers in this deck are from UNPINNED runs.</a:t>
+            </a:r>
+          </a:p>
+          <a:p>
+            <a:pPr algn="l"/>
+            <a:r>
+              <a:rPr sz="1100" b="0">
+                <a:solidFill>
+                  <a:srgbClr val="101010"/>
+                </a:solidFill>
+              </a:rPr>
+              <a:t/>
+            </a:r>
+          </a:p>
+          <a:p>
+            <a:pPr algn="l"/>
+            <a:r>
+              <a:rPr sz="1100" b="0">
+                <a:solidFill>
+                  <a:srgbClr val="101010"/>
+                </a:solidFill>
+              </a:rPr>
+              <a:t>Why this is fine for the comparison we are presenting:</a:t>
+            </a:r>
+          </a:p>
+          <a:p>
+            <a:pPr algn="l"/>
+            <a:r>
+              <a:rPr sz="1100" b="0">
+                <a:solidFill>
+                  <a:srgbClr val="101010"/>
+                </a:solidFill>
+              </a:rPr>
+              <a:t>   We checked directly (StripedMap pinned vs unpinned on Graviton at 8T): avg fairness 0.984 vs 0.982.</a:t>
+            </a:r>
+          </a:p>
+          <a:p>
+            <a:pPr algn="l"/>
+            <a:r>
+              <a:rPr sz="1100" b="0">
+                <a:solidFill>
+                  <a:srgbClr val="101010"/>
+                </a:solidFill>
+              </a:rPr>
+              <a:t>   Same on Xeon: 0.909 vs 0.908. Pinning has effectively no impact at the scale of this study.</a:t>
+            </a:r>
+          </a:p>
+          <a:p>
+            <a:pPr algn="l"/>
+            <a:r>
+              <a:rPr sz="1100" b="0">
+                <a:solidFill>
+                  <a:srgbClr val="101010"/>
+                </a:solidFill>
+              </a:rPr>
+              <a:t>   On Graviton this is because the hypervisor placement is already stable. On Xeon it is because the</a:t>
+            </a:r>
+          </a:p>
+          <a:p>
+            <a:pPr algn="l"/>
+            <a:r>
+              <a:rPr sz="1100" b="0">
+                <a:solidFill>
+                  <a:srgbClr val="101010"/>
+                </a:solidFill>
+              </a:rPr>
+              <a:t>   variance comes from DVFS, not from thread migration.</a:t>
+            </a:r>
+          </a:p>
+          <a:p>
+            <a:pPr algn="l"/>
+            <a:r>
+              <a:rPr sz="1100" b="0">
+                <a:solidFill>
+                  <a:srgbClr val="101010"/>
+                </a:solidFill>
+              </a:rPr>
+              <a:t>   We will normalize this in the next iteration so all three sweeps pass --pin on Linux.</a:t>
             </a:r>
           </a:p>
         </p:txBody>
@@ -7882,7 +8599,7 @@
                   <a:srgbClr val="1F3A5F"/>
                 </a:solidFill>
               </a:rPr>
-              <a:t>How we built BronsonAVL</a:t>
+              <a:t>How we built StripedMap</a:t>
             </a:r>
           </a:p>
         </p:txBody>
@@ -7916,7 +8633,7 @@
                   <a:srgbClr val="555555"/>
                 </a:solidFill>
               </a:rPr>
-              <a:t>Adapter at include/indexes/avl_tree_index.hpp</a:t>
+              <a:t>Adapter at include/indexes/striped_map_index.hpp</a:t>
             </a:r>
           </a:p>
         </p:txBody>
@@ -7945,29 +8662,18 @@
           <a:p>
             <a:pPr algn="l"/>
             <a:r>
-              <a:rPr sz="1300" b="0">
-                <a:solidFill>
-                  <a:srgbClr val="101010"/>
-                </a:solidFill>
-              </a:rPr>
-              <a:t>Wraps cds::container::BronsonAVLTreeMap from libcds. Bronson et al. published this</a:t>
-            </a:r>
-          </a:p>
-          <a:p>
-            <a:pPr algn="l"/>
-            <a:r>
-              <a:rPr sz="1300" b="0">
-                <a:solidFill>
-                  <a:srgbClr val="101010"/>
-                </a:solidFill>
-              </a:rPr>
-              <a:t>lock based AVL tree as a balanced concurrent ordered map with optimistic version validated reads.</a:t>
-            </a:r>
-          </a:p>
-          <a:p>
-            <a:pPr algn="l"/>
-            <a:r>
-              <a:rPr sz="1300" b="0">
+              <a:rPr sz="1400" b="0">
+                <a:solidFill>
+                  <a:srgbClr val="101010"/>
+                </a:solidFill>
+              </a:rPr>
+              <a:t>Wraps cds::container::StripedMap from libcds.</a:t>
+            </a:r>
+          </a:p>
+          <a:p>
+            <a:pPr algn="l"/>
+            <a:r>
+              <a:rPr sz="1400" b="0">
                 <a:solidFill>
                   <a:srgbClr val="101010"/>
                 </a:solidFill>
@@ -7978,62 +8684,84 @@
           <a:p>
             <a:pPr algn="l"/>
             <a:r>
-              <a:rPr sz="1300" b="0">
-                <a:solidFill>
-                  <a:srgbClr val="101010"/>
-                </a:solidFill>
-              </a:rPr>
-              <a:t>   Tree is balanced. Each node carries a monitor lock that we plug in via cds::sync::injecting_monitor&lt;Lock&gt;.</a:t>
-            </a:r>
-          </a:p>
-          <a:p>
-            <a:pPr algn="l"/>
-            <a:r>
-              <a:rPr sz="1300" b="0">
-                <a:solidFill>
-                  <a:srgbClr val="101010"/>
-                </a:solidFill>
-              </a:rPr>
-              <a:t>   Reads use a sequence style version counter on each node. Writers take the lock, mutate, then bump the version.</a:t>
-            </a:r>
-          </a:p>
-          <a:p>
-            <a:pPr algn="l"/>
-            <a:r>
-              <a:rPr sz="1300" b="0">
-                <a:solidFill>
-                  <a:srgbClr val="101010"/>
-                </a:solidFill>
-              </a:rPr>
-              <a:t>   Writes do hand over hand traversal down the tree, locking at most a small constant number of nodes at a time.</a:t>
-            </a:r>
-          </a:p>
-          <a:p>
-            <a:pPr algn="l"/>
-            <a:r>
-              <a:rPr sz="1300" b="0">
-                <a:solidFill>
-                  <a:srgbClr val="101010"/>
-                </a:solidFill>
-              </a:rPr>
-              <a:t>   Memory reclamation is handled by URCU (cds::urcu::gc&lt;general_buffered&gt;). Worker threads attach to the URCU</a:t>
-            </a:r>
-          </a:p>
-          <a:p>
-            <a:pPr algn="l"/>
-            <a:r>
-              <a:rPr sz="1300" b="0">
-                <a:solidFill>
-                  <a:srgbClr val="101010"/>
-                </a:solidFill>
-              </a:rPr>
-              <a:t>   manager on first call via a thread_local guard, then detach at thread exit.</a:t>
-            </a:r>
-          </a:p>
-          <a:p>
-            <a:pPr algn="l"/>
-            <a:r>
-              <a:rPr sz="1300" b="0">
+              <a:rPr sz="1400" b="0">
+                <a:solidFill>
+                  <a:srgbClr val="101010"/>
+                </a:solidFill>
+              </a:rPr>
+              <a:t>   Hash table with std::list buckets and a fixed array of N stripe locks.</a:t>
+            </a:r>
+          </a:p>
+          <a:p>
+            <a:pPr algn="l"/>
+            <a:r>
+              <a:rPr sz="1400" b="0">
+                <a:solidFill>
+                  <a:srgbClr val="101010"/>
+                </a:solidFill>
+              </a:rPr>
+              <a:t>   The lock primitive is the template parameter to cds::container::striped_set::striping&lt;Lock&gt;,</a:t>
+            </a:r>
+          </a:p>
+          <a:p>
+            <a:pPr algn="l"/>
+            <a:r>
+              <a:rPr sz="1400" b="0">
+                <a:solidFill>
+                  <a:srgbClr val="101010"/>
+                </a:solidFill>
+              </a:rPr>
+              <a:t>   so we plug any lockbench primitive (tas_lock, ttas_lock, cas_lock, ticket_lock, std::mutex) at compile time.</a:t>
+            </a:r>
+          </a:p>
+          <a:p>
+            <a:pPr algn="l"/>
+            <a:r>
+              <a:rPr sz="1400" b="0">
+                <a:solidFill>
+                  <a:srgbClr val="101010"/>
+                </a:solidFill>
+              </a:rPr>
+              <a:t>   We use 65536 stripes. Each operation hashes the key, picks the stripe, and acquires its lock.</a:t>
+            </a:r>
+          </a:p>
+          <a:p>
+            <a:pPr algn="l"/>
+            <a:r>
+              <a:rPr sz="1400" b="0">
+                <a:solidFill>
+                  <a:srgbClr val="101010"/>
+                </a:solidFill>
+              </a:rPr>
+              <a:t>   Resize policy is load_factor_resizing&lt;4&gt;: when item count divided by buckets exceeds 4,</a:t>
+            </a:r>
+          </a:p>
+          <a:p>
+            <a:pPr algn="l"/>
+            <a:r>
+              <a:rPr sz="1400" b="0">
+                <a:solidFill>
+                  <a:srgbClr val="101010"/>
+                </a:solidFill>
+              </a:rPr>
+              <a:t>   the map takes ALL stripe locks (scoped_full_lock) and rehashes. We size the initial bucket array</a:t>
+            </a:r>
+          </a:p>
+          <a:p>
+            <a:pPr algn="l"/>
+            <a:r>
+              <a:rPr sz="1400" b="0">
+                <a:solidFill>
+                  <a:srgbClr val="101010"/>
+                </a:solidFill>
+              </a:rPr>
+              <a:t>   large enough that we do not hit a resize during a benchmark run.</a:t>
+            </a:r>
+          </a:p>
+          <a:p>
+            <a:pPr algn="l"/>
+            <a:r>
+              <a:rPr sz="1400" b="0">
                 <a:solidFill>
                   <a:srgbClr val="101010"/>
                 </a:solidFill>
@@ -8044,34 +8772,34 @@
           <a:p>
             <a:pPr algn="l"/>
             <a:r>
-              <a:rPr sz="1300" b="0">
-                <a:solidFill>
-                  <a:srgbClr val="101010"/>
-                </a:solidFill>
-              </a:rPr>
-              <a:t>Why it matters: the contention surface is much smaller than StripedMap. The hot lock is wherever the</a:t>
-            </a:r>
-          </a:p>
-          <a:p>
-            <a:pPr algn="l"/>
-            <a:r>
-              <a:rPr sz="1300" b="0">
-                <a:solidFill>
-                  <a:srgbClr val="101010"/>
-                </a:solidFill>
-              </a:rPr>
-              <a:t>tree is being mutated, which depends on the key access pattern. This is what makes the zipfian</a:t>
-            </a:r>
-          </a:p>
-          <a:p>
-            <a:pPr algn="l"/>
-            <a:r>
-              <a:rPr sz="1300" b="0">
-                <a:solidFill>
-                  <a:srgbClr val="101010"/>
-                </a:solidFill>
-              </a:rPr>
-              <a:t>workloads interesting: under a skewed distribution, a small set of nodes carries most writes.</a:t>
+              <a:rPr sz="1400" b="0">
+                <a:solidFill>
+                  <a:srgbClr val="101010"/>
+                </a:solidFill>
+              </a:rPr>
+              <a:t>Why it matters: StripedMap is the simplest of the three indexes. There is no traversal,</a:t>
+            </a:r>
+          </a:p>
+          <a:p>
+            <a:pPr algn="l"/>
+            <a:r>
+              <a:rPr sz="1400" b="0">
+                <a:solidFill>
+                  <a:srgbClr val="101010"/>
+                </a:solidFill>
+              </a:rPr>
+              <a:t>each operation acquires exactly one lock, so it isolates the cost of a single lock acquire</a:t>
+            </a:r>
+          </a:p>
+          <a:p>
+            <a:pPr algn="l"/>
+            <a:r>
+              <a:rPr sz="1400" b="0">
+                <a:solidFill>
+                  <a:srgbClr val="101010"/>
+                </a:solidFill>
+              </a:rPr>
+              <a:t>plus the time to walk the per stripe std::list.</a:t>
             </a:r>
           </a:p>
         </p:txBody>
@@ -8123,7 +8851,7 @@
                   <a:srgbClr val="1F3A5F"/>
                 </a:solidFill>
               </a:rPr>
-              <a:t>How we built Wormhole, part 1: vendoring and shim design</a:t>
+              <a:t>How we built BronsonAVL</a:t>
             </a:r>
           </a:p>
         </p:txBody>
@@ -8157,7 +8885,7 @@
                   <a:srgbClr val="555555"/>
                 </a:solidFill>
               </a:rPr>
-              <a:t>Adapter at include/indexes/wormhole_index.hpp; shim at third_party/wormhole/wh_lock_shim.{h,cpp}</a:t>
+              <a:t>Adapter at include/indexes/avl_tree_index.hpp</a:t>
             </a:r>
           </a:p>
         </p:txBody>
@@ -8186,40 +8914,29 @@
           <a:p>
             <a:pPr algn="l"/>
             <a:r>
-              <a:rPr sz="1200" b="0">
-                <a:solidFill>
-                  <a:srgbClr val="101010"/>
-                </a:solidFill>
-              </a:rPr>
-              <a:t>Wormhole (Wu et al., FAST 2019) is a hybrid trie plus hash plus linked list ordered concurrent index.</a:t>
-            </a:r>
-          </a:p>
-          <a:p>
-            <a:pPr algn="l"/>
-            <a:r>
-              <a:rPr sz="1200" b="0">
-                <a:solidFill>
-                  <a:srgbClr val="101010"/>
-                </a:solidFill>
-              </a:rPr>
-              <a:t>It hard codes its own rwlock and spinlock as 4 byte opaque structs in lib.h. For our experiment we need</a:t>
-            </a:r>
-          </a:p>
-          <a:p>
-            <a:pPr algn="l"/>
-            <a:r>
-              <a:rPr sz="1200" b="0">
-                <a:solidFill>
-                  <a:srgbClr val="101010"/>
-                </a:solidFill>
-              </a:rPr>
-              <a:t>to swap them with any of our primitives at compile time.</a:t>
-            </a:r>
-          </a:p>
-          <a:p>
-            <a:pPr algn="l"/>
-            <a:r>
-              <a:rPr sz="1200" b="0">
+              <a:rPr sz="1300" b="0">
+                <a:solidFill>
+                  <a:srgbClr val="101010"/>
+                </a:solidFill>
+              </a:rPr>
+              <a:t>Wraps cds::container::BronsonAVLTreeMap from libcds. Bronson et al. published this</a:t>
+            </a:r>
+          </a:p>
+          <a:p>
+            <a:pPr algn="l"/>
+            <a:r>
+              <a:rPr sz="1300" b="0">
+                <a:solidFill>
+                  <a:srgbClr val="101010"/>
+                </a:solidFill>
+              </a:rPr>
+              <a:t>lock based AVL tree as a balanced concurrent ordered map with optimistic version validated reads.</a:t>
+            </a:r>
+          </a:p>
+          <a:p>
+            <a:pPr algn="l"/>
+            <a:r>
+              <a:rPr sz="1300" b="0">
                 <a:solidFill>
                   <a:srgbClr val="101010"/>
                 </a:solidFill>
@@ -8230,95 +8947,62 @@
           <a:p>
             <a:pPr algn="l"/>
             <a:r>
-              <a:rPr sz="1200" b="0">
-                <a:solidFill>
-                  <a:srgbClr val="101010"/>
-                </a:solidFill>
-              </a:rPr>
-              <a:t>Approach:</a:t>
-            </a:r>
-          </a:p>
-          <a:p>
-            <a:pPr algn="l"/>
-            <a:r>
-              <a:rPr sz="1200" b="0">
-                <a:solidFill>
-                  <a:srgbClr val="101010"/>
-                </a:solidFill>
-              </a:rPr>
-              <a:t>   1. Vendor wormhole in tree at third_party/wormhole/. The only edits to upstream sources are short</a:t>
-            </a:r>
-          </a:p>
-          <a:p>
-            <a:pPr algn="l"/>
-            <a:r>
-              <a:rPr sz="1200" b="0">
-                <a:solidFill>
-                  <a:srgbClr val="101010"/>
-                </a:solidFill>
-              </a:rPr>
-              <a:t>      ifdef gated blocks. With WH_LOCK_SHIM unset, the build is upstream wormhole untouched.</a:t>
-            </a:r>
-          </a:p>
-          <a:p>
-            <a:pPr algn="l"/>
-            <a:r>
-              <a:rPr sz="1200" b="0">
-                <a:solidFill>
-                  <a:srgbClr val="101010"/>
-                </a:solidFill>
-              </a:rPr>
-              <a:t>   2. Add wh_lock_shim.h, which redefines struct rwlock and struct spinlock as 128 byte storage arrays</a:t>
-            </a:r>
-          </a:p>
-          <a:p>
-            <a:pPr algn="l"/>
-            <a:r>
-              <a:rPr sz="1200" b="0">
-                <a:solidFill>
-                  <a:srgbClr val="101010"/>
-                </a:solidFill>
-              </a:rPr>
-              <a:t>      with extern C function declarations matching upstream signatures (rwlock_lock_read, rwlock_trylock_write_nr, etc.).</a:t>
-            </a:r>
-          </a:p>
-          <a:p>
-            <a:pPr algn="l"/>
-            <a:r>
-              <a:rPr sz="1200" b="0">
-                <a:solidFill>
-                  <a:srgbClr val="101010"/>
-                </a:solidFill>
-              </a:rPr>
-              <a:t>   3. Add wh_lock_shim.cpp, a C++ TU that picks LockT via WH_LOCK_&lt;NAME&gt; macro, asserts size and alignment,</a:t>
-            </a:r>
-          </a:p>
-          <a:p>
-            <a:pPr algn="l"/>
-            <a:r>
-              <a:rPr sz="1200" b="0">
-                <a:solidFill>
-                  <a:srgbClr val="101010"/>
-                </a:solidFill>
-              </a:rPr>
-              <a:t>      and provides extern C bodies. Each function placement-news the LockT into the shim storage at init time</a:t>
-            </a:r>
-          </a:p>
-          <a:p>
-            <a:pPr algn="l"/>
-            <a:r>
-              <a:rPr sz="1200" b="0">
-                <a:solidFill>
-                  <a:srgbClr val="101010"/>
-                </a:solidFill>
-              </a:rPr>
-              <a:t>      and dispatches via small if constexpr templates so the non matching branches are elided.</a:t>
-            </a:r>
-          </a:p>
-          <a:p>
-            <a:pPr algn="l"/>
-            <a:r>
-              <a:rPr sz="1200" b="0">
+              <a:rPr sz="1300" b="0">
+                <a:solidFill>
+                  <a:srgbClr val="101010"/>
+                </a:solidFill>
+              </a:rPr>
+              <a:t>   Tree is balanced. Each node carries a monitor lock that we plug in via cds::sync::injecting_monitor&lt;Lock&gt;.</a:t>
+            </a:r>
+          </a:p>
+          <a:p>
+            <a:pPr algn="l"/>
+            <a:r>
+              <a:rPr sz="1300" b="0">
+                <a:solidFill>
+                  <a:srgbClr val="101010"/>
+                </a:solidFill>
+              </a:rPr>
+              <a:t>   Reads use a sequence style version counter on each node. Writers take the lock, mutate, then bump the version.</a:t>
+            </a:r>
+          </a:p>
+          <a:p>
+            <a:pPr algn="l"/>
+            <a:r>
+              <a:rPr sz="1300" b="0">
+                <a:solidFill>
+                  <a:srgbClr val="101010"/>
+                </a:solidFill>
+              </a:rPr>
+              <a:t>   Writes do hand over hand traversal down the tree, locking at most a small constant number of nodes at a time.</a:t>
+            </a:r>
+          </a:p>
+          <a:p>
+            <a:pPr algn="l"/>
+            <a:r>
+              <a:rPr sz="1300" b="0">
+                <a:solidFill>
+                  <a:srgbClr val="101010"/>
+                </a:solidFill>
+              </a:rPr>
+              <a:t>   Memory reclamation is handled by URCU (cds::urcu::gc&lt;general_buffered&gt;). Worker threads attach to the URCU</a:t>
+            </a:r>
+          </a:p>
+          <a:p>
+            <a:pPr algn="l"/>
+            <a:r>
+              <a:rPr sz="1300" b="0">
+                <a:solidFill>
+                  <a:srgbClr val="101010"/>
+                </a:solidFill>
+              </a:rPr>
+              <a:t>   manager on first call via a thread_local guard, then detach at thread exit.</a:t>
+            </a:r>
+          </a:p>
+          <a:p>
+            <a:pPr algn="l"/>
+            <a:r>
+              <a:rPr sz="1300" b="0">
                 <a:solidFill>
                   <a:srgbClr val="101010"/>
                 </a:solidFill>
@@ -8329,56 +9013,34 @@
           <a:p>
             <a:pPr algn="l"/>
             <a:r>
-              <a:rPr sz="1200" b="0">
-                <a:solidFill>
-                  <a:srgbClr val="101010"/>
-                </a:solidFill>
-              </a:rPr>
-              <a:t>Variants built per CMake target:</a:t>
-            </a:r>
-          </a:p>
-          <a:p>
-            <a:pPr algn="l"/>
-            <a:r>
-              <a:rPr sz="1200" b="0">
-                <a:solidFill>
-                  <a:srgbClr val="101010"/>
-                </a:solidFill>
-              </a:rPr>
-              <a:t>   default (upstream rwlock, no shim), rw, tas, ttas, cas, occ, occ-opt.</a:t>
-            </a:r>
-          </a:p>
-          <a:p>
-            <a:pPr algn="l"/>
-            <a:r>
-              <a:rPr sz="1200" b="0">
-                <a:solidFill>
-                  <a:srgbClr val="101010"/>
-                </a:solidFill>
-              </a:rPr>
-              <a:t/>
-            </a:r>
-          </a:p>
-          <a:p>
-            <a:pPr algn="l"/>
-            <a:r>
-              <a:rPr sz="1200" b="0">
-                <a:solidFill>
-                  <a:srgbClr val="101010"/>
-                </a:solidFill>
-              </a:rPr>
-              <a:t>occ-opt is special: writer side uses the cas lock, but readers walk the leaf without taking the lock at all.</a:t>
-            </a:r>
-          </a:p>
-          <a:p>
-            <a:pPr algn="l"/>
-            <a:r>
-              <a:rPr sz="1200" b="0">
-                <a:solidFill>
-                  <a:srgbClr val="101010"/>
-                </a:solidFill>
-              </a:rPr>
-              <a:t>They snapshot a per leaf seqlock counter, read the entries, then validate. On mismatch they retry.</a:t>
+              <a:rPr sz="1300" b="0">
+                <a:solidFill>
+                  <a:srgbClr val="101010"/>
+                </a:solidFill>
+              </a:rPr>
+              <a:t>Why it matters: the contention surface is much smaller than StripedMap. The hot lock is wherever the</a:t>
+            </a:r>
+          </a:p>
+          <a:p>
+            <a:pPr algn="l"/>
+            <a:r>
+              <a:rPr sz="1300" b="0">
+                <a:solidFill>
+                  <a:srgbClr val="101010"/>
+                </a:solidFill>
+              </a:rPr>
+              <a:t>tree is being mutated, which depends on the key access pattern. This is what makes the zipfian</a:t>
+            </a:r>
+          </a:p>
+          <a:p>
+            <a:pPr algn="l"/>
+            <a:r>
+              <a:rPr sz="1300" b="0">
+                <a:solidFill>
+                  <a:srgbClr val="101010"/>
+                </a:solidFill>
+              </a:rPr>
+              <a:t>workloads interesting: under a skewed distribution, a small set of nodes carries most writes.</a:t>
             </a:r>
           </a:p>
         </p:txBody>
@@ -8430,7 +9092,7 @@
                   <a:srgbClr val="1F3A5F"/>
                 </a:solidFill>
               </a:rPr>
-              <a:t>How we built Wormhole, part 2: the alignment bug</a:t>
+              <a:t>How we built Wormhole, part 1: vendoring and shim design</a:t>
             </a:r>
           </a:p>
         </p:txBody>
@@ -8464,7 +9126,7 @@
                   <a:srgbClr val="555555"/>
                 </a:solidFill>
               </a:rPr>
-              <a:t>Every shim variant SIGSEGV on Xeon during the very first prefill insert</a:t>
+              <a:t>Adapter at include/indexes/wormhole_index.hpp; shim at third_party/wormhole/wh_lock_shim.{h,cpp}</a:t>
             </a:r>
           </a:p>
         </p:txBody>
@@ -8493,29 +9155,40 @@
           <a:p>
             <a:pPr algn="l"/>
             <a:r>
-              <a:rPr sz="1100" b="0">
-                <a:solidFill>
-                  <a:srgbClr val="101010"/>
-                </a:solidFill>
-              </a:rPr>
-              <a:t>Symptom: wh_test_rw, wh_test_cas, wh_test_tas, wh_test_ttas, wh_test_occ, wh_test_occ-opt all crashed in</a:t>
-            </a:r>
-          </a:p>
-          <a:p>
-            <a:pPr algn="l"/>
-            <a:r>
-              <a:rPr sz="1100" b="0">
-                <a:solidFill>
-                  <a:srgbClr val="101010"/>
-                </a:solidFill>
-              </a:rPr>
-              <a:t>wormleaf_insert_hs on Xeon. wh_test_default ran clean. The crash was invisible on Apple Silicon.</a:t>
-            </a:r>
-          </a:p>
-          <a:p>
-            <a:pPr algn="l"/>
-            <a:r>
-              <a:rPr sz="1100" b="0">
+              <a:rPr sz="1200" b="0">
+                <a:solidFill>
+                  <a:srgbClr val="101010"/>
+                </a:solidFill>
+              </a:rPr>
+              <a:t>Wormhole (Wu et al., FAST 2019) is a hybrid trie plus hash plus linked list ordered concurrent index.</a:t>
+            </a:r>
+          </a:p>
+          <a:p>
+            <a:pPr algn="l"/>
+            <a:r>
+              <a:rPr sz="1200" b="0">
+                <a:solidFill>
+                  <a:srgbClr val="101010"/>
+                </a:solidFill>
+              </a:rPr>
+              <a:t>It hard codes its own rwlock and spinlock as 4 byte opaque structs in lib.h. For our experiment we need</a:t>
+            </a:r>
+          </a:p>
+          <a:p>
+            <a:pPr algn="l"/>
+            <a:r>
+              <a:rPr sz="1200" b="0">
+                <a:solidFill>
+                  <a:srgbClr val="101010"/>
+                </a:solidFill>
+              </a:rPr>
+              <a:t>to swap them with any of our primitives at compile time.</a:t>
+            </a:r>
+          </a:p>
+          <a:p>
+            <a:pPr algn="l"/>
+            <a:r>
+              <a:rPr sz="1200" b="0">
                 <a:solidFill>
                   <a:srgbClr val="101010"/>
                 </a:solidFill>
@@ -8526,73 +9199,95 @@
           <a:p>
             <a:pPr algn="l"/>
             <a:r>
-              <a:rPr sz="1100" b="0">
-                <a:solidFill>
-                  <a:srgbClr val="101010"/>
-                </a:solidFill>
-              </a:rPr>
-              <a:t>Root cause:</a:t>
-            </a:r>
-          </a:p>
-          <a:p>
-            <a:pPr algn="l"/>
-            <a:r>
-              <a:rPr sz="1100" b="0">
-                <a:solidFill>
-                  <a:srgbClr val="101010"/>
-                </a:solidFill>
-              </a:rPr>
-              <a:t>   wormleaf_shift_inc and wormleaf_shift_dec use _mm256_load_si256 on leaf-&gt;ss (AVX2 aligned load).</a:t>
-            </a:r>
-          </a:p>
-          <a:p>
-            <a:pPr algn="l"/>
-            <a:r>
-              <a:rPr sz="1100" b="0">
-                <a:solidFill>
-                  <a:srgbClr val="101010"/>
-                </a:solidFill>
-              </a:rPr>
-              <a:t>   Aligned loads need the source address to be a multiple of 32 bytes.</a:t>
-            </a:r>
-          </a:p>
-          <a:p>
-            <a:pPr algn="l"/>
-            <a:r>
-              <a:rPr sz="1100" b="0">
-                <a:solidFill>
-                  <a:srgbClr val="101010"/>
-                </a:solidFill>
-              </a:rPr>
-              <a:t>   With upstream wormhole, leaflock + sortlock take 8 bytes total, so leaf-&gt;ss starts at offset 1088 (aligned).</a:t>
-            </a:r>
-          </a:p>
-          <a:p>
-            <a:pPr algn="l"/>
-            <a:r>
-              <a:rPr sz="1100" b="0">
-                <a:solidFill>
-                  <a:srgbClr val="101010"/>
-                </a:solidFill>
-              </a:rPr>
-              <a:t>   With our shim, leaflock + sortlock take 256 bytes, pushing leaf-&gt;ss to offset 1336 (1336 mod 16 = 8).</a:t>
-            </a:r>
-          </a:p>
-          <a:p>
-            <a:pPr algn="l"/>
-            <a:r>
-              <a:rPr sz="1100" b="0">
-                <a:solidFill>
-                  <a:srgbClr val="101010"/>
-                </a:solidFill>
-              </a:rPr>
-              <a:t>   Aligned SIMD load at a misaligned address gives SIGSEGV on x86. NEON tolerates misalignment, so Mac was fine.</a:t>
-            </a:r>
-          </a:p>
-          <a:p>
-            <a:pPr algn="l"/>
-            <a:r>
-              <a:rPr sz="1100" b="0">
+              <a:rPr sz="1200" b="0">
+                <a:solidFill>
+                  <a:srgbClr val="101010"/>
+                </a:solidFill>
+              </a:rPr>
+              <a:t>Approach:</a:t>
+            </a:r>
+          </a:p>
+          <a:p>
+            <a:pPr algn="l"/>
+            <a:r>
+              <a:rPr sz="1200" b="0">
+                <a:solidFill>
+                  <a:srgbClr val="101010"/>
+                </a:solidFill>
+              </a:rPr>
+              <a:t>   1. Vendor wormhole in tree at third_party/wormhole/. The only edits to upstream sources are short</a:t>
+            </a:r>
+          </a:p>
+          <a:p>
+            <a:pPr algn="l"/>
+            <a:r>
+              <a:rPr sz="1200" b="0">
+                <a:solidFill>
+                  <a:srgbClr val="101010"/>
+                </a:solidFill>
+              </a:rPr>
+              <a:t>      ifdef gated blocks. With WH_LOCK_SHIM unset, the build is upstream wormhole untouched.</a:t>
+            </a:r>
+          </a:p>
+          <a:p>
+            <a:pPr algn="l"/>
+            <a:r>
+              <a:rPr sz="1200" b="0">
+                <a:solidFill>
+                  <a:srgbClr val="101010"/>
+                </a:solidFill>
+              </a:rPr>
+              <a:t>   2. Add wh_lock_shim.h, which redefines struct rwlock and struct spinlock as 128 byte storage arrays</a:t>
+            </a:r>
+          </a:p>
+          <a:p>
+            <a:pPr algn="l"/>
+            <a:r>
+              <a:rPr sz="1200" b="0">
+                <a:solidFill>
+                  <a:srgbClr val="101010"/>
+                </a:solidFill>
+              </a:rPr>
+              <a:t>      with extern C function declarations matching upstream signatures (rwlock_lock_read, rwlock_trylock_write_nr, etc.).</a:t>
+            </a:r>
+          </a:p>
+          <a:p>
+            <a:pPr algn="l"/>
+            <a:r>
+              <a:rPr sz="1200" b="0">
+                <a:solidFill>
+                  <a:srgbClr val="101010"/>
+                </a:solidFill>
+              </a:rPr>
+              <a:t>   3. Add wh_lock_shim.cpp, a C++ TU that picks LockT via WH_LOCK_&lt;NAME&gt; macro, asserts size and alignment,</a:t>
+            </a:r>
+          </a:p>
+          <a:p>
+            <a:pPr algn="l"/>
+            <a:r>
+              <a:rPr sz="1200" b="0">
+                <a:solidFill>
+                  <a:srgbClr val="101010"/>
+                </a:solidFill>
+              </a:rPr>
+              <a:t>      and provides extern C bodies. Each function placement-news the LockT into the shim storage at init time</a:t>
+            </a:r>
+          </a:p>
+          <a:p>
+            <a:pPr algn="l"/>
+            <a:r>
+              <a:rPr sz="1200" b="0">
+                <a:solidFill>
+                  <a:srgbClr val="101010"/>
+                </a:solidFill>
+              </a:rPr>
+              <a:t>      and dispatches via small if constexpr templates so the non matching branches are elided.</a:t>
+            </a:r>
+          </a:p>
+          <a:p>
+            <a:pPr algn="l"/>
+            <a:r>
+              <a:rPr sz="1200" b="0">
                 <a:solidFill>
                   <a:srgbClr val="101010"/>
                 </a:solidFill>
@@ -8603,40 +9298,29 @@
           <a:p>
             <a:pPr algn="l"/>
             <a:r>
-              <a:rPr sz="1100" b="0">
-                <a:solidFill>
-                  <a:srgbClr val="101010"/>
-                </a:solidFill>
-              </a:rPr>
-              <a:t>Fix (one line):</a:t>
-            </a:r>
-          </a:p>
-          <a:p>
-            <a:pPr algn="l"/>
-            <a:r>
-              <a:rPr sz="1100" b="0">
-                <a:solidFill>
-                  <a:srgbClr val="101010"/>
-                </a:solidFill>
-              </a:rPr>
-              <a:t>   _Alignas(32) struct entry13 hs[WH_KPN]; in struct wormleaf, gated on WH_LOCK_SHIM.</a:t>
-            </a:r>
-          </a:p>
-          <a:p>
-            <a:pPr algn="l"/>
-            <a:r>
-              <a:rPr sz="1100" b="0">
-                <a:solidFill>
-                  <a:srgbClr val="101010"/>
-                </a:solidFill>
-              </a:rPr>
-              <a:t>   This adds 8 bytes of padding before hs[], pulls hs to offset 320 and ss to 1344, both 32 byte aligned.</a:t>
-            </a:r>
-          </a:p>
-          <a:p>
-            <a:pPr algn="l"/>
-            <a:r>
-              <a:rPr sz="1100" b="0">
+              <a:rPr sz="1200" b="0">
+                <a:solidFill>
+                  <a:srgbClr val="101010"/>
+                </a:solidFill>
+              </a:rPr>
+              <a:t>Variants built per CMake target:</a:t>
+            </a:r>
+          </a:p>
+          <a:p>
+            <a:pPr algn="l"/>
+            <a:r>
+              <a:rPr sz="1200" b="0">
+                <a:solidFill>
+                  <a:srgbClr val="101010"/>
+                </a:solidFill>
+              </a:rPr>
+              <a:t>   default (upstream rwlock, no shim), rw, tas, ttas, cas, occ, occ-opt.</a:t>
+            </a:r>
+          </a:p>
+          <a:p>
+            <a:pPr algn="l"/>
+            <a:r>
+              <a:rPr sz="1200" b="0">
                 <a:solidFill>
                   <a:srgbClr val="101010"/>
                 </a:solidFill>
@@ -8647,56 +9331,23 @@
           <a:p>
             <a:pPr algn="l"/>
             <a:r>
-              <a:rPr sz="1100" b="0">
-                <a:solidFill>
-                  <a:srgbClr val="101010"/>
-                </a:solidFill>
-              </a:rPr>
-              <a:t>Failed first attempt worth recording:</a:t>
-            </a:r>
-          </a:p>
-          <a:p>
-            <a:pPr algn="l"/>
-            <a:r>
-              <a:rPr sz="1100" b="0">
-                <a:solidFill>
-                  <a:srgbClr val="101010"/>
-                </a:solidFill>
-              </a:rPr>
-              <a:t>   I tried shrinking the shim alignment from alignas(64) to alignas(8). That left ss[] still misaligned</a:t>
-            </a:r>
-          </a:p>
-          <a:p>
-            <a:pPr algn="l"/>
-            <a:r>
-              <a:rPr sz="1100" b="0">
-                <a:solidFill>
-                  <a:srgbClr val="101010"/>
-                </a:solidFill>
-              </a:rPr>
-              <a:t>   and introduced UB whenever LockT had alignas(64) atomics inside (occ_lock, ticket_lock).</a:t>
-            </a:r>
-          </a:p>
-          <a:p>
-            <a:pPr algn="l"/>
-            <a:r>
-              <a:rPr sz="1100" b="0">
-                <a:solidFill>
-                  <a:srgbClr val="101010"/>
-                </a:solidFill>
-              </a:rPr>
-              <a:t>   Mac wh-cas and wh-rw started hanging at 99 percent CPU in rwlock_trylock_write, even single threaded.</a:t>
-            </a:r>
-          </a:p>
-          <a:p>
-            <a:pPr algn="l"/>
-            <a:r>
-              <a:rPr sz="1100" b="0">
-                <a:solidFill>
-                  <a:srgbClr val="101010"/>
-                </a:solidFill>
-              </a:rPr>
-              <a:t>   Reverted in the same change as the proper _Alignas(32) fix.</a:t>
+              <a:rPr sz="1200" b="0">
+                <a:solidFill>
+                  <a:srgbClr val="101010"/>
+                </a:solidFill>
+              </a:rPr>
+              <a:t>occ-opt is special: writer side uses the cas lock, but readers walk the leaf without taking the lock at all.</a:t>
+            </a:r>
+          </a:p>
+          <a:p>
+            <a:pPr algn="l"/>
+            <a:r>
+              <a:rPr sz="1200" b="0">
+                <a:solidFill>
+                  <a:srgbClr val="101010"/>
+                </a:solidFill>
+              </a:rPr>
+              <a:t>They snapshot a per leaf seqlock counter, read the entries, then validate. On mismatch they retry.</a:t>
             </a:r>
           </a:p>
         </p:txBody>
@@ -8748,7 +9399,7 @@
                   <a:srgbClr val="1F3A5F"/>
                 </a:solidFill>
               </a:rPr>
-              <a:t>How we built Wormhole, part 3: bugs in the optimistic reader</a:t>
+              <a:t>How we built Wormhole, part 2: the alignment bug</a:t>
             </a:r>
           </a:p>
         </p:txBody>
@@ -8782,7 +9433,7 @@
                   <a:srgbClr val="555555"/>
                 </a:solidFill>
               </a:rPr>
-              <a:t>Five separate things had to be fixed before wh-occ-opt was correct and fair</a:t>
+              <a:t>Every shim variant SIGSEGV on Xeon during the very first prefill insert</a:t>
             </a:r>
           </a:p>
         </p:txBody>
@@ -8811,40 +9462,29 @@
           <a:p>
             <a:pPr algn="l"/>
             <a:r>
-              <a:rPr sz="1000" b="0">
-                <a:solidFill>
-                  <a:srgbClr val="101010"/>
-                </a:solidFill>
-              </a:rPr>
-              <a:t>1. Uninitialized occ_seq.</a:t>
-            </a:r>
-          </a:p>
-          <a:p>
-            <a:pPr algn="l"/>
-            <a:r>
-              <a:rPr sz="1000" b="0">
-                <a:solidFill>
-                  <a:srgbClr val="101010"/>
-                </a:solidFill>
-              </a:rPr>
-              <a:t>   slab_alloc_safe returns memory with stale bits. If a fresh leaf came in with an odd seq counter,</a:t>
-            </a:r>
-          </a:p>
-          <a:p>
-            <a:pPr algn="l"/>
-            <a:r>
-              <a:rPr sz="1000" b="0">
-                <a:solidFill>
-                  <a:srgbClr val="101010"/>
-                </a:solidFill>
-              </a:rPr>
-              <a:t>   readers spun forever waiting for a writer that never existed. Fix: initialize occ_seq to 0 in wormleaf_alloc.</a:t>
-            </a:r>
-          </a:p>
-          <a:p>
-            <a:pPr algn="l"/>
-            <a:r>
-              <a:rPr sz="1000" b="0">
+              <a:rPr sz="1100" b="0">
+                <a:solidFill>
+                  <a:srgbClr val="101010"/>
+                </a:solidFill>
+              </a:rPr>
+              <a:t>Symptom: wh_test_rw, wh_test_cas, wh_test_tas, wh_test_ttas, wh_test_occ, wh_test_occ-opt all crashed in</a:t>
+            </a:r>
+          </a:p>
+          <a:p>
+            <a:pPr algn="l"/>
+            <a:r>
+              <a:rPr sz="1100" b="0">
+                <a:solidFill>
+                  <a:srgbClr val="101010"/>
+                </a:solidFill>
+              </a:rPr>
+              <a:t>wormleaf_insert_hs on Xeon. wh_test_default ran clean. The crash was invisible on Apple Silicon.</a:t>
+            </a:r>
+          </a:p>
+          <a:p>
+            <a:pPr algn="l"/>
+            <a:r>
+              <a:rPr sz="1100" b="0">
                 <a:solidFill>
                   <a:srgbClr val="101010"/>
                 </a:solidFill>
@@ -8855,51 +9495,73 @@
           <a:p>
             <a:pPr algn="l"/>
             <a:r>
-              <a:rPr sz="1000" b="0">
-                <a:solidFill>
-                  <a:srgbClr val="101010"/>
-                </a:solidFill>
-              </a:rPr>
-              <a:t>2. Missing seq bumps in writer fast paths.</a:t>
-            </a:r>
-          </a:p>
-          <a:p>
-            <a:pPr algn="l"/>
-            <a:r>
-              <a:rPr sz="1000" b="0">
-                <a:solidFill>
-                  <a:srgbClr val="101010"/>
-                </a:solidFill>
-              </a:rPr>
-              <a:t>   wormhole_jump_leaf_write and wormhole_split_insert bypass the regular wormleaf_lock_write / unlock_write.</a:t>
-            </a:r>
-          </a:p>
-          <a:p>
-            <a:pPr algn="l"/>
-            <a:r>
-              <a:rPr sz="1000" b="0">
-                <a:solidFill>
-                  <a:srgbClr val="101010"/>
-                </a:solidFill>
-              </a:rPr>
-              <a:t>   Without explicit bumps the seq would go odd and never come back to even, leaving the leaf in an</a:t>
-            </a:r>
-          </a:p>
-          <a:p>
-            <a:pPr algn="l"/>
-            <a:r>
-              <a:rPr sz="1000" b="0">
-                <a:solidFill>
-                  <a:srgbClr val="101010"/>
-                </a:solidFill>
-              </a:rPr>
-              <a:t>   apparent "writer in progress" state forever. Fix: bump occ_seq on trylock_write_nr success in those paths.</a:t>
-            </a:r>
-          </a:p>
-          <a:p>
-            <a:pPr algn="l"/>
-            <a:r>
-              <a:rPr sz="1000" b="0">
+              <a:rPr sz="1100" b="0">
+                <a:solidFill>
+                  <a:srgbClr val="101010"/>
+                </a:solidFill>
+              </a:rPr>
+              <a:t>Root cause:</a:t>
+            </a:r>
+          </a:p>
+          <a:p>
+            <a:pPr algn="l"/>
+            <a:r>
+              <a:rPr sz="1100" b="0">
+                <a:solidFill>
+                  <a:srgbClr val="101010"/>
+                </a:solidFill>
+              </a:rPr>
+              <a:t>   wormleaf_shift_inc and wormleaf_shift_dec use _mm256_load_si256 on leaf-&gt;ss (AVX2 aligned load).</a:t>
+            </a:r>
+          </a:p>
+          <a:p>
+            <a:pPr algn="l"/>
+            <a:r>
+              <a:rPr sz="1100" b="0">
+                <a:solidFill>
+                  <a:srgbClr val="101010"/>
+                </a:solidFill>
+              </a:rPr>
+              <a:t>   Aligned loads need the source address to be a multiple of 32 bytes.</a:t>
+            </a:r>
+          </a:p>
+          <a:p>
+            <a:pPr algn="l"/>
+            <a:r>
+              <a:rPr sz="1100" b="0">
+                <a:solidFill>
+                  <a:srgbClr val="101010"/>
+                </a:solidFill>
+              </a:rPr>
+              <a:t>   With upstream wormhole, leaflock + sortlock take 8 bytes total, so leaf-&gt;ss starts at offset 1088 (aligned).</a:t>
+            </a:r>
+          </a:p>
+          <a:p>
+            <a:pPr algn="l"/>
+            <a:r>
+              <a:rPr sz="1100" b="0">
+                <a:solidFill>
+                  <a:srgbClr val="101010"/>
+                </a:solidFill>
+              </a:rPr>
+              <a:t>   With our shim, leaflock + sortlock take 256 bytes, pushing leaf-&gt;ss to offset 1336 (1336 mod 16 = 8).</a:t>
+            </a:r>
+          </a:p>
+          <a:p>
+            <a:pPr algn="l"/>
+            <a:r>
+              <a:rPr sz="1100" b="0">
+                <a:solidFill>
+                  <a:srgbClr val="101010"/>
+                </a:solidFill>
+              </a:rPr>
+              <a:t>   Aligned SIMD load at a misaligned address gives SIGSEGV on x86. NEON tolerates misalignment, so Mac was fine.</a:t>
+            </a:r>
+          </a:p>
+          <a:p>
+            <a:pPr algn="l"/>
+            <a:r>
+              <a:rPr sz="1100" b="0">
                 <a:solidFill>
                   <a:srgbClr val="101010"/>
                 </a:solidFill>
@@ -8910,73 +9572,40 @@
           <a:p>
             <a:pPr algn="l"/>
             <a:r>
-              <a:rPr sz="1000" b="0">
-                <a:solidFill>
-                  <a:srgbClr val="101010"/>
-                </a:solidFill>
-              </a:rPr>
-              <a:t>3. Torn entry13 reads.</a:t>
-            </a:r>
-          </a:p>
-          <a:p>
-            <a:pPr algn="l"/>
-            <a:r>
-              <a:rPr sz="1000" b="0">
-                <a:solidFill>
-                  <a:srgbClr val="101010"/>
-                </a:solidFill>
-              </a:rPr>
-              <a:t>   entry13 is an 8 byte packed struct (e1: u16 key prefix, e3: u48 compressed pointer).</a:t>
-            </a:r>
-          </a:p>
-          <a:p>
-            <a:pPr algn="l"/>
-            <a:r>
-              <a:rPr sz="1000" b="0">
-                <a:solidFill>
-                  <a:srgbClr val="101010"/>
-                </a:solidFill>
-              </a:rPr>
-              <a:t>   Stock wormleaf_match_hs reads e1 and e3 as separate field accesses. Without the leaflock, a writer</a:t>
-            </a:r>
-          </a:p>
-          <a:p>
-            <a:pPr algn="l"/>
-            <a:r>
-              <a:rPr sz="1000" b="0">
-                <a:solidFill>
-                  <a:srgbClr val="101010"/>
-                </a:solidFill>
-              </a:rPr>
-              <a:t>   could clear hs[i].v64 between the two reads. Reader sees e1 == pkey, then reads e3 == 0, derefs NULL,</a:t>
-            </a:r>
-          </a:p>
-          <a:p>
-            <a:pPr algn="l"/>
-            <a:r>
-              <a:rPr sz="1000" b="0">
-                <a:solidFill>
-                  <a:srgbClr val="101010"/>
-                </a:solidFill>
-              </a:rPr>
-              <a:t>   SIGSEGV. The seqlock validate would catch it, but only after the segfault.</a:t>
-            </a:r>
-          </a:p>
-          <a:p>
-            <a:pPr algn="l"/>
-            <a:r>
-              <a:rPr sz="1000" b="0">
-                <a:solidFill>
-                  <a:srgbClr val="101010"/>
-                </a:solidFill>
-              </a:rPr>
-              <a:t>   Fix: read entry13 as a single atomic v64 load, unpack e1 and e3 from the same snapshot.</a:t>
-            </a:r>
-          </a:p>
-          <a:p>
-            <a:pPr algn="l"/>
-            <a:r>
-              <a:rPr sz="1000" b="0">
+              <a:rPr sz="1100" b="0">
+                <a:solidFill>
+                  <a:srgbClr val="101010"/>
+                </a:solidFill>
+              </a:rPr>
+              <a:t>Fix (one line):</a:t>
+            </a:r>
+          </a:p>
+          <a:p>
+            <a:pPr algn="l"/>
+            <a:r>
+              <a:rPr sz="1100" b="0">
+                <a:solidFill>
+                  <a:srgbClr val="101010"/>
+                </a:solidFill>
+              </a:rPr>
+              <a:t>   _Alignas(32) struct entry13 hs[WH_KPN]; in struct wormleaf, gated on WH_LOCK_SHIM.</a:t>
+            </a:r>
+          </a:p>
+          <a:p>
+            <a:pPr algn="l"/>
+            <a:r>
+              <a:rPr sz="1100" b="0">
+                <a:solidFill>
+                  <a:srgbClr val="101010"/>
+                </a:solidFill>
+              </a:rPr>
+              <a:t>   This adds 8 bytes of padding before hs[], pulls hs to offset 320 and ss to 1344, both 32 byte aligned.</a:t>
+            </a:r>
+          </a:p>
+          <a:p>
+            <a:pPr algn="l"/>
+            <a:r>
+              <a:rPr sz="1100" b="0">
                 <a:solidFill>
                   <a:srgbClr val="101010"/>
                 </a:solidFill>
@@ -8987,100 +9616,56 @@
           <a:p>
             <a:pPr algn="l"/>
             <a:r>
-              <a:rPr sz="1000" b="0">
-                <a:solidFill>
-                  <a:srgbClr val="101010"/>
-                </a:solidFill>
-              </a:rPr>
-              <a:t>4. kv use after free under optimistic reads.</a:t>
-            </a:r>
-          </a:p>
-          <a:p>
-            <a:pPr algn="l"/>
-            <a:r>
-              <a:rPr sz="1000" b="0">
-                <a:solidFill>
-                  <a:srgbClr val="101010"/>
-                </a:solidFill>
-              </a:rPr>
-              <a:t>   kvmap_mm_dup frees old kvs immediately on update. An optimistic reader could hold a kv pointer that</a:t>
-            </a:r>
-          </a:p>
-          <a:p>
-            <a:pPr algn="l"/>
-            <a:r>
-              <a:rPr sz="1000" b="0">
-                <a:solidFill>
-                  <a:srgbClr val="101010"/>
-                </a:solidFill>
-              </a:rPr>
-              <a:t>   gets freed mid-read. Fix: custom kvmap_mm with a no-op free for wh-occ-opt. kvs leak for the run</a:t>
-            </a:r>
-          </a:p>
-          <a:p>
-            <a:pPr algn="l"/>
-            <a:r>
-              <a:rPr sz="1000" b="0">
-                <a:solidFill>
-                  <a:srgbClr val="101010"/>
-                </a:solidFill>
-              </a:rPr>
-              <a:t>   (~150 MB for a 3 second benchmark, acceptable for measurement). A production implementation would defer free via QSBR.</a:t>
-            </a:r>
-          </a:p>
-          <a:p>
-            <a:pPr algn="l"/>
-            <a:r>
-              <a:rPr sz="1000" b="0">
-                <a:solidFill>
-                  <a:srgbClr val="101010"/>
-                </a:solidFill>
-              </a:rPr>
-              <a:t/>
-            </a:r>
-          </a:p>
-          <a:p>
-            <a:pPr algn="l"/>
-            <a:r>
-              <a:rPr sz="1000" b="0">
-                <a:solidFill>
-                  <a:srgbClr val="101010"/>
-                </a:solidFill>
-              </a:rPr>
-              <a:t>5. Allocator asymmetry inflated the wh-occ-opt win.</a:t>
-            </a:r>
-          </a:p>
-          <a:p>
-            <a:pPr algn="l"/>
-            <a:r>
-              <a:rPr sz="1000" b="0">
-                <a:solidFill>
-                  <a:srgbClr val="101010"/>
-                </a:solidFill>
-              </a:rPr>
-              <a:t>   Locked variants paid roughly 10 to 30 ns per op for free(); the no-op free variant did not.</a:t>
-            </a:r>
-          </a:p>
-          <a:p>
-            <a:pPr algn="l"/>
-            <a:r>
-              <a:rPr sz="1000" b="0">
-                <a:solidFill>
-                  <a:srgbClr val="101010"/>
-                </a:solidFill>
-              </a:rPr>
-              <a:t>   That artificially doubled occ-opt apparent advantage on write heavy zipfian. Fix: WH_FAIR_MM CMake</a:t>
-            </a:r>
-          </a:p>
-          <a:p>
-            <a:pPr algn="l"/>
-            <a:r>
-              <a:rPr sz="1000" b="0">
-                <a:solidFill>
-                  <a:srgbClr val="101010"/>
-                </a:solidFill>
-              </a:rPr>
-              <a:t>   option that uses the same no-op free MM for ALL variants. Required for an apples to apples comparison.</a:t>
+              <a:rPr sz="1100" b="0">
+                <a:solidFill>
+                  <a:srgbClr val="101010"/>
+                </a:solidFill>
+              </a:rPr>
+              <a:t>Failed first attempt worth recording:</a:t>
+            </a:r>
+          </a:p>
+          <a:p>
+            <a:pPr algn="l"/>
+            <a:r>
+              <a:rPr sz="1100" b="0">
+                <a:solidFill>
+                  <a:srgbClr val="101010"/>
+                </a:solidFill>
+              </a:rPr>
+              <a:t>   I tried shrinking the shim alignment from alignas(64) to alignas(8). That left ss[] still misaligned</a:t>
+            </a:r>
+          </a:p>
+          <a:p>
+            <a:pPr algn="l"/>
+            <a:r>
+              <a:rPr sz="1100" b="0">
+                <a:solidFill>
+                  <a:srgbClr val="101010"/>
+                </a:solidFill>
+              </a:rPr>
+              <a:t>   and introduced UB whenever LockT had alignas(64) atomics inside (occ_lock, ticket_lock).</a:t>
+            </a:r>
+          </a:p>
+          <a:p>
+            <a:pPr algn="l"/>
+            <a:r>
+              <a:rPr sz="1100" b="0">
+                <a:solidFill>
+                  <a:srgbClr val="101010"/>
+                </a:solidFill>
+              </a:rPr>
+              <a:t>   Mac wh-cas and wh-rw started hanging at 99 percent CPU in rwlock_trylock_write, even single threaded.</a:t>
+            </a:r>
+          </a:p>
+          <a:p>
+            <a:pPr algn="l"/>
+            <a:r>
+              <a:rPr sz="1100" b="0">
+                <a:solidFill>
+                  <a:srgbClr val="101010"/>
+                </a:solidFill>
+              </a:rPr>
+              <a:t>   Reverted in the same change as the proper _Alignas(32) fix.</a:t>
             </a:r>
           </a:p>
         </p:txBody>
@@ -9132,7 +9717,7 @@
                   <a:srgbClr val="1F3A5F"/>
                 </a:solidFill>
               </a:rPr>
-              <a:t>Wormhole, balanced workload (uniform 80 percent reads)</a:t>
+              <a:t>How we built Wormhole, part 3: bugs in the optimistic reader</a:t>
             </a:r>
           </a:p>
         </p:txBody>
@@ -9166,45 +9751,21 @@
                   <a:srgbClr val="555555"/>
                 </a:solidFill>
               </a:rPr>
-              <a:t>Top: throughput vs threads. Bottom: ranking at the architecture's maximum threads.</a:t>
-            </a:r>
-          </a:p>
-        </p:txBody>
-      </p:sp>
-      <p:pic>
-        <p:nvPicPr>
-          <p:cNvPr id="4" name="Picture 3" descr="wh_balanced.png"/>
-          <p:cNvPicPr>
-            <a:picLocks noChangeAspect="1"/>
-          </p:cNvPicPr>
+              <a:t>Five separate things had to be fixed before wh-occ-opt was correct and fair</a:t>
+            </a:r>
+          </a:p>
+        </p:txBody>
+      </p:sp>
+      <p:sp>
+        <p:nvSpPr>
+          <p:cNvPr id="4" name="TextBox 3"/>
+          <p:cNvSpPr txBox="1"/>
           <p:nvPr/>
-        </p:nvPicPr>
-        <p:blipFill>
-          <a:blip r:embed="rId2"/>
-          <a:stretch>
-            <a:fillRect/>
-          </a:stretch>
-        </p:blipFill>
+        </p:nvSpPr>
         <p:spPr>
           <a:xfrm>
-            <a:off x="548640" y="1280160"/>
-            <a:ext cx="10058400" cy="5767559"/>
-          </a:xfrm>
-          <a:prstGeom prst="rect">
-            <a:avLst/>
-          </a:prstGeom>
-        </p:spPr>
-      </p:pic>
-      <p:sp>
-        <p:nvSpPr>
-          <p:cNvPr id="5" name="TextBox 4"/>
-          <p:cNvSpPr txBox="1"/>
-          <p:nvPr/>
-        </p:nvSpPr>
-        <p:spPr>
-          <a:xfrm>
-            <a:off x="548640" y="5760720"/>
-            <a:ext cx="11064240" cy="1005840"/>
+            <a:off x="457200" y="1280160"/>
+            <a:ext cx="11247120" cy="5303520"/>
           </a:xfrm>
           <a:prstGeom prst="rect">
             <a:avLst/>
@@ -9219,34 +9780,276 @@
           <a:p>
             <a:pPr algn="l"/>
             <a:r>
-              <a:rPr sz="1200" b="0">
-                <a:solidFill>
-                  <a:srgbClr val="101010"/>
-                </a:solidFill>
-              </a:rPr>
-              <a:t>   On Graviton at 8T, occ-opt finishes on top (32.3 M ops/s). tas and occ are right behind.</a:t>
-            </a:r>
-          </a:p>
-          <a:p>
-            <a:pPr algn="l"/>
-            <a:r>
-              <a:rPr sz="1200" b="0">
-                <a:solidFill>
-                  <a:srgbClr val="101010"/>
-                </a:solidFill>
-              </a:rPr>
-              <a:t>   On Xeon at 16T, ttas wins narrowly (39.0 M) with occ-opt almost tied at 38.7 M.</a:t>
-            </a:r>
-          </a:p>
-          <a:p>
-            <a:pPr algn="l"/>
-            <a:r>
-              <a:rPr sz="1200" b="0">
-                <a:solidFill>
-                  <a:srgbClr val="101010"/>
-                </a:solidFill>
-              </a:rPr>
-              <a:t>   wh-default (upstream wormhole rwlock) is in the middle of the pack on both machines.</a:t>
+              <a:rPr sz="1000" b="0">
+                <a:solidFill>
+                  <a:srgbClr val="101010"/>
+                </a:solidFill>
+              </a:rPr>
+              <a:t>1. Uninitialized occ_seq.</a:t>
+            </a:r>
+          </a:p>
+          <a:p>
+            <a:pPr algn="l"/>
+            <a:r>
+              <a:rPr sz="1000" b="0">
+                <a:solidFill>
+                  <a:srgbClr val="101010"/>
+                </a:solidFill>
+              </a:rPr>
+              <a:t>   slab_alloc_safe returns memory with stale bits. If a fresh leaf came in with an odd seq counter,</a:t>
+            </a:r>
+          </a:p>
+          <a:p>
+            <a:pPr algn="l"/>
+            <a:r>
+              <a:rPr sz="1000" b="0">
+                <a:solidFill>
+                  <a:srgbClr val="101010"/>
+                </a:solidFill>
+              </a:rPr>
+              <a:t>   readers spun forever waiting for a writer that never existed. Fix: initialize occ_seq to 0 in wormleaf_alloc.</a:t>
+            </a:r>
+          </a:p>
+          <a:p>
+            <a:pPr algn="l"/>
+            <a:r>
+              <a:rPr sz="1000" b="0">
+                <a:solidFill>
+                  <a:srgbClr val="101010"/>
+                </a:solidFill>
+              </a:rPr>
+              <a:t/>
+            </a:r>
+          </a:p>
+          <a:p>
+            <a:pPr algn="l"/>
+            <a:r>
+              <a:rPr sz="1000" b="0">
+                <a:solidFill>
+                  <a:srgbClr val="101010"/>
+                </a:solidFill>
+              </a:rPr>
+              <a:t>2. Missing seq bumps in writer fast paths.</a:t>
+            </a:r>
+          </a:p>
+          <a:p>
+            <a:pPr algn="l"/>
+            <a:r>
+              <a:rPr sz="1000" b="0">
+                <a:solidFill>
+                  <a:srgbClr val="101010"/>
+                </a:solidFill>
+              </a:rPr>
+              <a:t>   wormhole_jump_leaf_write and wormhole_split_insert bypass the regular wormleaf_lock_write / unlock_write.</a:t>
+            </a:r>
+          </a:p>
+          <a:p>
+            <a:pPr algn="l"/>
+            <a:r>
+              <a:rPr sz="1000" b="0">
+                <a:solidFill>
+                  <a:srgbClr val="101010"/>
+                </a:solidFill>
+              </a:rPr>
+              <a:t>   Without explicit bumps the seq would go odd and never come back to even, leaving the leaf in an</a:t>
+            </a:r>
+          </a:p>
+          <a:p>
+            <a:pPr algn="l"/>
+            <a:r>
+              <a:rPr sz="1000" b="0">
+                <a:solidFill>
+                  <a:srgbClr val="101010"/>
+                </a:solidFill>
+              </a:rPr>
+              <a:t>   apparent "writer in progress" state forever. Fix: bump occ_seq on trylock_write_nr success in those paths.</a:t>
+            </a:r>
+          </a:p>
+          <a:p>
+            <a:pPr algn="l"/>
+            <a:r>
+              <a:rPr sz="1000" b="0">
+                <a:solidFill>
+                  <a:srgbClr val="101010"/>
+                </a:solidFill>
+              </a:rPr>
+              <a:t/>
+            </a:r>
+          </a:p>
+          <a:p>
+            <a:pPr algn="l"/>
+            <a:r>
+              <a:rPr sz="1000" b="0">
+                <a:solidFill>
+                  <a:srgbClr val="101010"/>
+                </a:solidFill>
+              </a:rPr>
+              <a:t>3. Torn entry13 reads.</a:t>
+            </a:r>
+          </a:p>
+          <a:p>
+            <a:pPr algn="l"/>
+            <a:r>
+              <a:rPr sz="1000" b="0">
+                <a:solidFill>
+                  <a:srgbClr val="101010"/>
+                </a:solidFill>
+              </a:rPr>
+              <a:t>   entry13 is an 8 byte packed struct (e1: u16 key prefix, e3: u48 compressed pointer).</a:t>
+            </a:r>
+          </a:p>
+          <a:p>
+            <a:pPr algn="l"/>
+            <a:r>
+              <a:rPr sz="1000" b="0">
+                <a:solidFill>
+                  <a:srgbClr val="101010"/>
+                </a:solidFill>
+              </a:rPr>
+              <a:t>   Stock wormleaf_match_hs reads e1 and e3 as separate field accesses. Without the leaflock, a writer</a:t>
+            </a:r>
+          </a:p>
+          <a:p>
+            <a:pPr algn="l"/>
+            <a:r>
+              <a:rPr sz="1000" b="0">
+                <a:solidFill>
+                  <a:srgbClr val="101010"/>
+                </a:solidFill>
+              </a:rPr>
+              <a:t>   could clear hs[i].v64 between the two reads. Reader sees e1 == pkey, then reads e3 == 0, derefs NULL,</a:t>
+            </a:r>
+          </a:p>
+          <a:p>
+            <a:pPr algn="l"/>
+            <a:r>
+              <a:rPr sz="1000" b="0">
+                <a:solidFill>
+                  <a:srgbClr val="101010"/>
+                </a:solidFill>
+              </a:rPr>
+              <a:t>   SIGSEGV. The seqlock validate would catch it, but only after the segfault.</a:t>
+            </a:r>
+          </a:p>
+          <a:p>
+            <a:pPr algn="l"/>
+            <a:r>
+              <a:rPr sz="1000" b="0">
+                <a:solidFill>
+                  <a:srgbClr val="101010"/>
+                </a:solidFill>
+              </a:rPr>
+              <a:t>   Fix: read entry13 as a single atomic v64 load, unpack e1 and e3 from the same snapshot.</a:t>
+            </a:r>
+          </a:p>
+          <a:p>
+            <a:pPr algn="l"/>
+            <a:r>
+              <a:rPr sz="1000" b="0">
+                <a:solidFill>
+                  <a:srgbClr val="101010"/>
+                </a:solidFill>
+              </a:rPr>
+              <a:t/>
+            </a:r>
+          </a:p>
+          <a:p>
+            <a:pPr algn="l"/>
+            <a:r>
+              <a:rPr sz="1000" b="0">
+                <a:solidFill>
+                  <a:srgbClr val="101010"/>
+                </a:solidFill>
+              </a:rPr>
+              <a:t>4. kv use after free under optimistic reads.</a:t>
+            </a:r>
+          </a:p>
+          <a:p>
+            <a:pPr algn="l"/>
+            <a:r>
+              <a:rPr sz="1000" b="0">
+                <a:solidFill>
+                  <a:srgbClr val="101010"/>
+                </a:solidFill>
+              </a:rPr>
+              <a:t>   kvmap_mm_dup frees old kvs immediately on update. An optimistic reader could hold a kv pointer that</a:t>
+            </a:r>
+          </a:p>
+          <a:p>
+            <a:pPr algn="l"/>
+            <a:r>
+              <a:rPr sz="1000" b="0">
+                <a:solidFill>
+                  <a:srgbClr val="101010"/>
+                </a:solidFill>
+              </a:rPr>
+              <a:t>   gets freed mid-read. Fix: custom kvmap_mm with a no-op free for wh-occ-opt. kvs leak for the run</a:t>
+            </a:r>
+          </a:p>
+          <a:p>
+            <a:pPr algn="l"/>
+            <a:r>
+              <a:rPr sz="1000" b="0">
+                <a:solidFill>
+                  <a:srgbClr val="101010"/>
+                </a:solidFill>
+              </a:rPr>
+              <a:t>   (~150 MB for a 3 second benchmark, acceptable for measurement). A production implementation would defer free via QSBR.</a:t>
+            </a:r>
+          </a:p>
+          <a:p>
+            <a:pPr algn="l"/>
+            <a:r>
+              <a:rPr sz="1000" b="0">
+                <a:solidFill>
+                  <a:srgbClr val="101010"/>
+                </a:solidFill>
+              </a:rPr>
+              <a:t/>
+            </a:r>
+          </a:p>
+          <a:p>
+            <a:pPr algn="l"/>
+            <a:r>
+              <a:rPr sz="1000" b="0">
+                <a:solidFill>
+                  <a:srgbClr val="101010"/>
+                </a:solidFill>
+              </a:rPr>
+              <a:t>5. Allocator asymmetry inflated the wh-occ-opt win.</a:t>
+            </a:r>
+          </a:p>
+          <a:p>
+            <a:pPr algn="l"/>
+            <a:r>
+              <a:rPr sz="1000" b="0">
+                <a:solidFill>
+                  <a:srgbClr val="101010"/>
+                </a:solidFill>
+              </a:rPr>
+              <a:t>   Locked variants paid roughly 10 to 30 ns per op for free(); the no-op free variant did not.</a:t>
+            </a:r>
+          </a:p>
+          <a:p>
+            <a:pPr algn="l"/>
+            <a:r>
+              <a:rPr sz="1000" b="0">
+                <a:solidFill>
+                  <a:srgbClr val="101010"/>
+                </a:solidFill>
+              </a:rPr>
+              <a:t>   That artificially doubled occ-opt apparent advantage on write heavy zipfian. Fix: WH_FAIR_MM CMake</a:t>
+            </a:r>
+          </a:p>
+          <a:p>
+            <a:pPr algn="l"/>
+            <a:r>
+              <a:rPr sz="1000" b="0">
+                <a:solidFill>
+                  <a:srgbClr val="101010"/>
+                </a:solidFill>
+              </a:rPr>
+              <a:t>   option that uses the same no-op free MM for ALL variants. Required for an apples to apples comparison.</a:t>
             </a:r>
           </a:p>
         </p:txBody>

--- a/results/deck/index_lock_evaluation.pptx
+++ b/results/deck/index_lock_evaluation.pptx
@@ -3366,70 +3366,14 @@
         </p:blipFill>
         <p:spPr>
           <a:xfrm>
-            <a:off x="548640" y="1280160"/>
-            <a:ext cx="10058400" cy="5767559"/>
+            <a:off x="502920" y="1371600"/>
+            <a:ext cx="11201400" cy="5091021"/>
           </a:xfrm>
           <a:prstGeom prst="rect">
             <a:avLst/>
           </a:prstGeom>
         </p:spPr>
       </p:pic>
-      <p:sp>
-        <p:nvSpPr>
-          <p:cNvPr id="5" name="TextBox 4"/>
-          <p:cNvSpPr txBox="1"/>
-          <p:nvPr/>
-        </p:nvSpPr>
-        <p:spPr>
-          <a:xfrm>
-            <a:off x="548640" y="5760720"/>
-            <a:ext cx="11064240" cy="1005840"/>
-          </a:xfrm>
-          <a:prstGeom prst="rect">
-            <a:avLst/>
-          </a:prstGeom>
-          <a:noFill/>
-        </p:spPr>
-        <p:txBody>
-          <a:bodyPr wrap="square">
-            <a:spAutoFit/>
-          </a:bodyPr>
-          <a:lstStyle/>
-          <a:p>
-            <a:pPr algn="l"/>
-            <a:r>
-              <a:rPr sz="1200" b="0">
-                <a:solidFill>
-                  <a:srgbClr val="101010"/>
-                </a:solidFill>
-              </a:rPr>
-              <a:t>   On Graviton at 8T, occ-opt finishes on top (32.3 M ops/s). tas and occ are right behind.</a:t>
-            </a:r>
-          </a:p>
-          <a:p>
-            <a:pPr algn="l"/>
-            <a:r>
-              <a:rPr sz="1200" b="0">
-                <a:solidFill>
-                  <a:srgbClr val="101010"/>
-                </a:solidFill>
-              </a:rPr>
-              <a:t>   On Xeon at 16T, ttas wins narrowly (39.0 M) with occ-opt almost tied at 38.7 M.</a:t>
-            </a:r>
-          </a:p>
-          <a:p>
-            <a:pPr algn="l"/>
-            <a:r>
-              <a:rPr sz="1200" b="0">
-                <a:solidFill>
-                  <a:srgbClr val="101010"/>
-                </a:solidFill>
-              </a:rPr>
-              <a:t>   wh-default (upstream wormhole rwlock) is in the middle of the pack on both machines.</a:t>
-            </a:r>
-          </a:p>
-        </p:txBody>
-      </p:sp>
     </p:spTree>
   </p:cSld>
   <p:clrMapOvr>
@@ -3532,70 +3476,14 @@
         </p:blipFill>
         <p:spPr>
           <a:xfrm>
-            <a:off x="548640" y="1280160"/>
-            <a:ext cx="10058400" cy="5767559"/>
+            <a:off x="502920" y="1371600"/>
+            <a:ext cx="11201400" cy="5091021"/>
           </a:xfrm>
           <a:prstGeom prst="rect">
             <a:avLst/>
           </a:prstGeom>
         </p:spPr>
       </p:pic>
-      <p:sp>
-        <p:nvSpPr>
-          <p:cNvPr id="5" name="TextBox 4"/>
-          <p:cNvSpPr txBox="1"/>
-          <p:nvPr/>
-        </p:nvSpPr>
-        <p:spPr>
-          <a:xfrm>
-            <a:off x="548640" y="5760720"/>
-            <a:ext cx="11064240" cy="1005840"/>
-          </a:xfrm>
-          <a:prstGeom prst="rect">
-            <a:avLst/>
-          </a:prstGeom>
-          <a:noFill/>
-        </p:spPr>
-        <p:txBody>
-          <a:bodyPr wrap="square">
-            <a:spAutoFit/>
-          </a:bodyPr>
-          <a:lstStyle/>
-          <a:p>
-            <a:pPr algn="l"/>
-            <a:r>
-              <a:rPr sz="1200" b="0">
-                <a:solidFill>
-                  <a:srgbClr val="101010"/>
-                </a:solidFill>
-              </a:rPr>
-              <a:t>   On Xeon, occ-opt opens a clear gap (43.9 M, vs 40.6 M for ttas at 16T).</a:t>
-            </a:r>
-          </a:p>
-          <a:p>
-            <a:pPr algn="l"/>
-            <a:r>
-              <a:rPr sz="1200" b="0">
-                <a:solidFill>
-                  <a:srgbClr val="101010"/>
-                </a:solidFill>
-              </a:rPr>
-              <a:t>   On Graviton, tas, occ-opt and ttas finish within a couple of percent at 8T.</a:t>
-            </a:r>
-          </a:p>
-          <a:p>
-            <a:pPr algn="l"/>
-            <a:r>
-              <a:rPr sz="1200" b="0">
-                <a:solidFill>
-                  <a:srgbClr val="101010"/>
-                </a:solidFill>
-              </a:rPr>
-              <a:t>   The optimistic reader is the design that benefits most from a high read percentage, especially on x86.</a:t>
-            </a:r>
-          </a:p>
-        </p:txBody>
-      </p:sp>
     </p:spTree>
   </p:cSld>
   <p:clrMapOvr>
@@ -3698,70 +3586,14 @@
         </p:blipFill>
         <p:spPr>
           <a:xfrm>
-            <a:off x="548640" y="1280160"/>
-            <a:ext cx="10058400" cy="5767559"/>
+            <a:off x="502920" y="1371600"/>
+            <a:ext cx="11201400" cy="5091021"/>
           </a:xfrm>
           <a:prstGeom prst="rect">
             <a:avLst/>
           </a:prstGeom>
         </p:spPr>
       </p:pic>
-      <p:sp>
-        <p:nvSpPr>
-          <p:cNvPr id="5" name="TextBox 4"/>
-          <p:cNvSpPr txBox="1"/>
-          <p:nvPr/>
-        </p:nvSpPr>
-        <p:spPr>
-          <a:xfrm>
-            <a:off x="548640" y="5760720"/>
-            <a:ext cx="11064240" cy="1005840"/>
-          </a:xfrm>
-          <a:prstGeom prst="rect">
-            <a:avLst/>
-          </a:prstGeom>
-          <a:noFill/>
-        </p:spPr>
-        <p:txBody>
-          <a:bodyPr wrap="square">
-            <a:spAutoFit/>
-          </a:bodyPr>
-          <a:lstStyle/>
-          <a:p>
-            <a:pPr algn="l"/>
-            <a:r>
-              <a:rPr sz="1200" b="0">
-                <a:solidFill>
-                  <a:srgbClr val="101010"/>
-                </a:solidFill>
-              </a:rPr>
-              <a:t>   On Graviton at 8T, tas, ttas and cas pull ahead (around 30 M).</a:t>
-            </a:r>
-          </a:p>
-          <a:p>
-            <a:pPr algn="l"/>
-            <a:r>
-              <a:rPr sz="1200" b="0">
-                <a:solidFill>
-                  <a:srgbClr val="101010"/>
-                </a:solidFill>
-              </a:rPr>
-              <a:t>   On Xeon at 16T, occ-opt is still on top (22.5 M) with rw and tas right next to it.</a:t>
-            </a:r>
-          </a:p>
-          <a:p>
-            <a:pPr algn="l"/>
-            <a:r>
-              <a:rPr sz="1200" b="0">
-                <a:solidFill>
-                  <a:srgbClr val="101010"/>
-                </a:solidFill>
-              </a:rPr>
-              <a:t>   Even on the workload least favourable to the optimistic path, it does not collapse.</a:t>
-            </a:r>
-          </a:p>
-        </p:txBody>
-      </p:sp>
     </p:spTree>
   </p:cSld>
   <p:clrMapOvr>
@@ -3864,70 +3696,14 @@
         </p:blipFill>
         <p:spPr>
           <a:xfrm>
-            <a:off x="548640" y="1280160"/>
-            <a:ext cx="10058400" cy="5767559"/>
+            <a:off x="502920" y="1371600"/>
+            <a:ext cx="11201400" cy="5091021"/>
           </a:xfrm>
           <a:prstGeom prst="rect">
             <a:avLst/>
           </a:prstGeom>
         </p:spPr>
       </p:pic>
-      <p:sp>
-        <p:nvSpPr>
-          <p:cNvPr id="5" name="TextBox 4"/>
-          <p:cNvSpPr txBox="1"/>
-          <p:nvPr/>
-        </p:nvSpPr>
-        <p:spPr>
-          <a:xfrm>
-            <a:off x="548640" y="5760720"/>
-            <a:ext cx="11064240" cy="1005840"/>
-          </a:xfrm>
-          <a:prstGeom prst="rect">
-            <a:avLst/>
-          </a:prstGeom>
-          <a:noFill/>
-        </p:spPr>
-        <p:txBody>
-          <a:bodyPr wrap="square">
-            <a:spAutoFit/>
-          </a:bodyPr>
-          <a:lstStyle/>
-          <a:p>
-            <a:pPr algn="l"/>
-            <a:r>
-              <a:rPr sz="1200" b="0">
-                <a:solidFill>
-                  <a:srgbClr val="101010"/>
-                </a:solidFill>
-              </a:rPr>
-              <a:t>   On Graviton at 8T, ttas wins (32.8 M) with cas right behind (32.4 M).</a:t>
-            </a:r>
-          </a:p>
-          <a:p>
-            <a:pPr algn="l"/>
-            <a:r>
-              <a:rPr sz="1200" b="0">
-                <a:solidFill>
-                  <a:srgbClr val="101010"/>
-                </a:solidFill>
-              </a:rPr>
-              <a:t>   On Xeon at 16T, tas takes the lead (18.4 M) with ttas second (16.1 M).</a:t>
-            </a:r>
-          </a:p>
-          <a:p>
-            <a:pPr algn="l"/>
-            <a:r>
-              <a:rPr sz="1200" b="0">
-                <a:solidFill>
-                  <a:srgbClr val="101010"/>
-                </a:solidFill>
-              </a:rPr>
-              <a:t>   Different best lock per architecture even on the simplest workload.</a:t>
-            </a:r>
-          </a:p>
-        </p:txBody>
-      </p:sp>
     </p:spTree>
   </p:cSld>
   <p:clrMapOvr>
@@ -4030,70 +3806,14 @@
         </p:blipFill>
         <p:spPr>
           <a:xfrm>
-            <a:off x="548640" y="1280160"/>
-            <a:ext cx="10058400" cy="5767559"/>
+            <a:off x="502920" y="1371600"/>
+            <a:ext cx="11201400" cy="5091021"/>
           </a:xfrm>
           <a:prstGeom prst="rect">
             <a:avLst/>
           </a:prstGeom>
         </p:spPr>
       </p:pic>
-      <p:sp>
-        <p:nvSpPr>
-          <p:cNvPr id="5" name="TextBox 4"/>
-          <p:cNvSpPr txBox="1"/>
-          <p:nvPr/>
-        </p:nvSpPr>
-        <p:spPr>
-          <a:xfrm>
-            <a:off x="548640" y="5760720"/>
-            <a:ext cx="11064240" cy="1005840"/>
-          </a:xfrm>
-          <a:prstGeom prst="rect">
-            <a:avLst/>
-          </a:prstGeom>
-          <a:noFill/>
-        </p:spPr>
-        <p:txBody>
-          <a:bodyPr wrap="square">
-            <a:spAutoFit/>
-          </a:bodyPr>
-          <a:lstStyle/>
-          <a:p>
-            <a:pPr algn="l"/>
-            <a:r>
-              <a:rPr sz="1200" b="0">
-                <a:solidFill>
-                  <a:srgbClr val="101010"/>
-                </a:solidFill>
-              </a:rPr>
-              <a:t>   On Graviton at 8T, tas leads (32.0 M), with std::mutex and cas tied just behind.</a:t>
-            </a:r>
-          </a:p>
-          <a:p>
-            <a:pPr algn="l"/>
-            <a:r>
-              <a:rPr sz="1200" b="0">
-                <a:solidFill>
-                  <a:srgbClr val="101010"/>
-                </a:solidFill>
-              </a:rPr>
-              <a:t>   On Xeon at 16T, cas wins (13.6 M) with ticket and tas close together.</a:t>
-            </a:r>
-          </a:p>
-          <a:p>
-            <a:pPr algn="l"/>
-            <a:r>
-              <a:rPr sz="1200" b="0">
-                <a:solidFill>
-                  <a:srgbClr val="101010"/>
-                </a:solidFill>
-              </a:rPr>
-              <a:t>   The drop from balanced to hot key on Xeon is large, which matches expectations.</a:t>
-            </a:r>
-          </a:p>
-        </p:txBody>
-      </p:sp>
     </p:spTree>
   </p:cSld>
   <p:clrMapOvr>
@@ -4196,70 +3916,14 @@
         </p:blipFill>
         <p:spPr>
           <a:xfrm>
-            <a:off x="548640" y="1280160"/>
-            <a:ext cx="10058400" cy="5767559"/>
+            <a:off x="502920" y="1371600"/>
+            <a:ext cx="11201400" cy="5091021"/>
           </a:xfrm>
           <a:prstGeom prst="rect">
             <a:avLst/>
           </a:prstGeom>
         </p:spPr>
       </p:pic>
-      <p:sp>
-        <p:nvSpPr>
-          <p:cNvPr id="5" name="TextBox 4"/>
-          <p:cNvSpPr txBox="1"/>
-          <p:nvPr/>
-        </p:nvSpPr>
-        <p:spPr>
-          <a:xfrm>
-            <a:off x="548640" y="5760720"/>
-            <a:ext cx="11064240" cy="1005840"/>
-          </a:xfrm>
-          <a:prstGeom prst="rect">
-            <a:avLst/>
-          </a:prstGeom>
-          <a:noFill/>
-        </p:spPr>
-        <p:txBody>
-          <a:bodyPr wrap="square">
-            <a:spAutoFit/>
-          </a:bodyPr>
-          <a:lstStyle/>
-          <a:p>
-            <a:pPr algn="l"/>
-            <a:r>
-              <a:rPr sz="1200" b="0">
-                <a:solidFill>
-                  <a:srgbClr val="101010"/>
-                </a:solidFill>
-              </a:rPr>
-              <a:t>   On Graviton at 8T, cas and ttas finish in a dead heat at 9.8 M.</a:t>
-            </a:r>
-          </a:p>
-          <a:p>
-            <a:pPr algn="l"/>
-            <a:r>
-              <a:rPr sz="1200" b="0">
-                <a:solidFill>
-                  <a:srgbClr val="101010"/>
-                </a:solidFill>
-              </a:rPr>
-              <a:t>   On Xeon at 16T, tas leads (13.3 M), with ttas and cas within a few percent.</a:t>
-            </a:r>
-          </a:p>
-          <a:p>
-            <a:pPr algn="l"/>
-            <a:r>
-              <a:rPr sz="1200" b="0">
-                <a:solidFill>
-                  <a:srgbClr val="101010"/>
-                </a:solidFill>
-              </a:rPr>
-              <a:t>   BronsonAVL absolute throughput is lower than StripedMap because traversal cost is real.</a:t>
-            </a:r>
-          </a:p>
-        </p:txBody>
-      </p:sp>
     </p:spTree>
   </p:cSld>
   <p:clrMapOvr>
@@ -4362,70 +4026,14 @@
         </p:blipFill>
         <p:spPr>
           <a:xfrm>
-            <a:off x="548640" y="1280160"/>
-            <a:ext cx="10058400" cy="5767559"/>
+            <a:off x="502920" y="1371600"/>
+            <a:ext cx="11201400" cy="5091021"/>
           </a:xfrm>
           <a:prstGeom prst="rect">
             <a:avLst/>
           </a:prstGeom>
         </p:spPr>
       </p:pic>
-      <p:sp>
-        <p:nvSpPr>
-          <p:cNvPr id="5" name="TextBox 4"/>
-          <p:cNvSpPr txBox="1"/>
-          <p:nvPr/>
-        </p:nvSpPr>
-        <p:spPr>
-          <a:xfrm>
-            <a:off x="548640" y="5760720"/>
-            <a:ext cx="11064240" cy="1005840"/>
-          </a:xfrm>
-          <a:prstGeom prst="rect">
-            <a:avLst/>
-          </a:prstGeom>
-          <a:noFill/>
-        </p:spPr>
-        <p:txBody>
-          <a:bodyPr wrap="square">
-            <a:spAutoFit/>
-          </a:bodyPr>
-          <a:lstStyle/>
-          <a:p>
-            <a:pPr algn="l"/>
-            <a:r>
-              <a:rPr sz="1200" b="0">
-                <a:solidFill>
-                  <a:srgbClr val="101010"/>
-                </a:solidFill>
-              </a:rPr>
-              <a:t>   On Graviton at 8T, cas takes the lead (8.6 M) with ttas and tas close behind.</a:t>
-            </a:r>
-          </a:p>
-          <a:p>
-            <a:pPr algn="l"/>
-            <a:r>
-              <a:rPr sz="1200" b="0">
-                <a:solidFill>
-                  <a:srgbClr val="101010"/>
-                </a:solidFill>
-              </a:rPr>
-              <a:t>   On Xeon at 16T, ticket wins (3.4 M), with std::mutex unusually close.</a:t>
-            </a:r>
-          </a:p>
-          <a:p>
-            <a:pPr algn="l"/>
-            <a:r>
-              <a:rPr sz="1200" b="0">
-                <a:solidFill>
-                  <a:srgbClr val="101010"/>
-                </a:solidFill>
-              </a:rPr>
-              <a:t>   Different best lock per architecture is exactly the cross arch story we wanted to surface.</a:t>
-            </a:r>
-          </a:p>
-        </p:txBody>
-      </p:sp>
     </p:spTree>
   </p:cSld>
   <p:clrMapOvr>

--- a/results/deck/index_lock_evaluation.pptx
+++ b/results/deck/index_lock_evaluation.pptx
@@ -5,27 +5,26 @@
     <p:sldMasterId id="2147483648" r:id="rId1"/>
   </p:sldMasterIdLst>
   <p:sldIdLst>
-    <p:sldId id="256" r:id="rId7"/>
-    <p:sldId id="257" r:id="rId8"/>
-    <p:sldId id="258" r:id="rId9"/>
-    <p:sldId id="259" r:id="rId10"/>
-    <p:sldId id="260" r:id="rId11"/>
-    <p:sldId id="261" r:id="rId12"/>
-    <p:sldId id="262" r:id="rId13"/>
-    <p:sldId id="263" r:id="rId14"/>
-    <p:sldId id="264" r:id="rId15"/>
-    <p:sldId id="265" r:id="rId16"/>
-    <p:sldId id="266" r:id="rId17"/>
-    <p:sldId id="267" r:id="rId18"/>
-    <p:sldId id="268" r:id="rId19"/>
-    <p:sldId id="269" r:id="rId20"/>
-    <p:sldId id="270" r:id="rId21"/>
-    <p:sldId id="271" r:id="rId22"/>
-    <p:sldId id="272" r:id="rId23"/>
-    <p:sldId id="273" r:id="rId24"/>
-    <p:sldId id="274" r:id="rId25"/>
+    <p:sldId id="256" r:id="rId2"/>
+    <p:sldId id="257" r:id="rId3"/>
+    <p:sldId id="258" r:id="rId4"/>
+    <p:sldId id="259" r:id="rId5"/>
+    <p:sldId id="260" r:id="rId6"/>
+    <p:sldId id="261" r:id="rId7"/>
+    <p:sldId id="262" r:id="rId8"/>
+    <p:sldId id="263" r:id="rId9"/>
+    <p:sldId id="264" r:id="rId10"/>
+    <p:sldId id="265" r:id="rId11"/>
+    <p:sldId id="266" r:id="rId12"/>
+    <p:sldId id="267" r:id="rId13"/>
+    <p:sldId id="268" r:id="rId14"/>
+    <p:sldId id="269" r:id="rId15"/>
+    <p:sldId id="270" r:id="rId16"/>
+    <p:sldId id="271" r:id="rId17"/>
+    <p:sldId id="273" r:id="rId18"/>
+    <p:sldId id="274" r:id="rId19"/>
   </p:sldIdLst>
-  <p:sldSz cx="12191695" cy="6858000" type="screen4x3"/>
+  <p:sldSz cx="12192000" cy="6858000"/>
   <p:notesSz cx="6858000" cy="9144000"/>
   <p:defaultTextStyle>
     <a:defPPr>
@@ -122,6 +121,22 @@
       </a:defRPr>
     </a:lvl9pPr>
   </p:defaultTextStyle>
+  <p:extLst>
+    <p:ext uri="{EFAFB233-063F-42B5-8137-9DF3F51BA10A}">
+      <p15:sldGuideLst xmlns:p15="http://schemas.microsoft.com/office/powerpoint/2012/main">
+        <p15:guide id="1" orient="horz" pos="2160">
+          <p15:clr>
+            <a:srgbClr val="A4A3A4"/>
+          </p15:clr>
+        </p15:guide>
+        <p15:guide id="2" pos="2880">
+          <p15:clr>
+            <a:srgbClr val="A4A3A4"/>
+          </p15:clr>
+        </p15:guide>
+      </p15:sldGuideLst>
+    </p:ext>
+  </p:extLst>
 </p:presentation>
 </file>
 
@@ -163,10 +178,9 @@
           <a:lstStyle/>
           <a:p>
             <a:r>
-              <a:rPr lang="en-US" smtClean="0"/>
+              <a:rPr lang="en-US"/>
               <a:t>Click to edit Master title style</a:t>
             </a:r>
-            <a:endParaRPr lang="en-US"/>
           </a:p>
         </p:txBody>
       </p:sp>
@@ -282,10 +296,9 @@
           </a:lstStyle>
           <a:p>
             <a:r>
-              <a:rPr lang="en-US" smtClean="0"/>
+              <a:rPr lang="en-US"/>
               <a:t>Click to edit Master subtitle style</a:t>
             </a:r>
-            <a:endParaRPr lang="en-US"/>
           </a:p>
         </p:txBody>
       </p:sp>
@@ -306,7 +319,7 @@
           <a:p>
             <a:fld id="{5BCAD085-E8A6-8845-BD4E-CB4CCA059FC4}" type="datetimeFigureOut">
               <a:rPr lang="en-US" smtClean="0"/>
-              <a:t>1/27/13</a:t>
+              <a:t>5/4/26</a:t>
             </a:fld>
             <a:endParaRPr lang="en-US"/>
           </a:p>
@@ -400,10 +413,9 @@
           <a:lstStyle/>
           <a:p>
             <a:r>
-              <a:rPr lang="en-US" smtClean="0"/>
+              <a:rPr lang="en-US"/>
               <a:t>Click to edit Master title style</a:t>
             </a:r>
-            <a:endParaRPr lang="en-US"/>
           </a:p>
         </p:txBody>
       </p:sp>
@@ -424,38 +436,37 @@
           <a:p>
             <a:pPr lvl="0"/>
             <a:r>
-              <a:rPr lang="en-US" smtClean="0"/>
+              <a:rPr lang="en-US"/>
               <a:t>Click to edit Master text styles</a:t>
             </a:r>
           </a:p>
           <a:p>
             <a:pPr lvl="1"/>
             <a:r>
-              <a:rPr lang="en-US" smtClean="0"/>
+              <a:rPr lang="en-US"/>
               <a:t>Second level</a:t>
             </a:r>
           </a:p>
           <a:p>
             <a:pPr lvl="2"/>
             <a:r>
-              <a:rPr lang="en-US" smtClean="0"/>
+              <a:rPr lang="en-US"/>
               <a:t>Third level</a:t>
             </a:r>
           </a:p>
           <a:p>
             <a:pPr lvl="3"/>
             <a:r>
-              <a:rPr lang="en-US" smtClean="0"/>
+              <a:rPr lang="en-US"/>
               <a:t>Fourth level</a:t>
             </a:r>
           </a:p>
           <a:p>
             <a:pPr lvl="4"/>
             <a:r>
-              <a:rPr lang="en-US" smtClean="0"/>
+              <a:rPr lang="en-US"/>
               <a:t>Fifth level</a:t>
             </a:r>
-            <a:endParaRPr lang="en-US"/>
           </a:p>
         </p:txBody>
       </p:sp>
@@ -476,7 +487,7 @@
           <a:p>
             <a:fld id="{5BCAD085-E8A6-8845-BD4E-CB4CCA059FC4}" type="datetimeFigureOut">
               <a:rPr lang="en-US" smtClean="0"/>
-              <a:t>1/27/13</a:t>
+              <a:t>5/4/26</a:t>
             </a:fld>
             <a:endParaRPr lang="en-US"/>
           </a:p>
@@ -575,10 +586,9 @@
           <a:lstStyle/>
           <a:p>
             <a:r>
-              <a:rPr lang="en-US" smtClean="0"/>
+              <a:rPr lang="en-US"/>
               <a:t>Click to edit Master title style</a:t>
             </a:r>
-            <a:endParaRPr lang="en-US"/>
           </a:p>
         </p:txBody>
       </p:sp>
@@ -604,38 +614,37 @@
           <a:p>
             <a:pPr lvl="0"/>
             <a:r>
-              <a:rPr lang="en-US" smtClean="0"/>
+              <a:rPr lang="en-US"/>
               <a:t>Click to edit Master text styles</a:t>
             </a:r>
           </a:p>
           <a:p>
             <a:pPr lvl="1"/>
             <a:r>
-              <a:rPr lang="en-US" smtClean="0"/>
+              <a:rPr lang="en-US"/>
               <a:t>Second level</a:t>
             </a:r>
           </a:p>
           <a:p>
             <a:pPr lvl="2"/>
             <a:r>
-              <a:rPr lang="en-US" smtClean="0"/>
+              <a:rPr lang="en-US"/>
               <a:t>Third level</a:t>
             </a:r>
           </a:p>
           <a:p>
             <a:pPr lvl="3"/>
             <a:r>
-              <a:rPr lang="en-US" smtClean="0"/>
+              <a:rPr lang="en-US"/>
               <a:t>Fourth level</a:t>
             </a:r>
           </a:p>
           <a:p>
             <a:pPr lvl="4"/>
             <a:r>
-              <a:rPr lang="en-US" smtClean="0"/>
+              <a:rPr lang="en-US"/>
               <a:t>Fifth level</a:t>
             </a:r>
-            <a:endParaRPr lang="en-US"/>
           </a:p>
         </p:txBody>
       </p:sp>
@@ -656,7 +665,7 @@
           <a:p>
             <a:fld id="{5BCAD085-E8A6-8845-BD4E-CB4CCA059FC4}" type="datetimeFigureOut">
               <a:rPr lang="en-US" smtClean="0"/>
-              <a:t>1/27/13</a:t>
+              <a:t>5/4/26</a:t>
             </a:fld>
             <a:endParaRPr lang="en-US"/>
           </a:p>
@@ -750,10 +759,9 @@
           <a:lstStyle/>
           <a:p>
             <a:r>
-              <a:rPr lang="en-US" smtClean="0"/>
+              <a:rPr lang="en-US"/>
               <a:t>Click to edit Master title style</a:t>
             </a:r>
-            <a:endParaRPr lang="en-US"/>
           </a:p>
         </p:txBody>
       </p:sp>
@@ -774,38 +782,37 @@
           <a:p>
             <a:pPr lvl="0"/>
             <a:r>
-              <a:rPr lang="en-US" smtClean="0"/>
+              <a:rPr lang="en-US"/>
               <a:t>Click to edit Master text styles</a:t>
             </a:r>
           </a:p>
           <a:p>
             <a:pPr lvl="1"/>
             <a:r>
-              <a:rPr lang="en-US" smtClean="0"/>
+              <a:rPr lang="en-US"/>
               <a:t>Second level</a:t>
             </a:r>
           </a:p>
           <a:p>
             <a:pPr lvl="2"/>
             <a:r>
-              <a:rPr lang="en-US" smtClean="0"/>
+              <a:rPr lang="en-US"/>
               <a:t>Third level</a:t>
             </a:r>
           </a:p>
           <a:p>
             <a:pPr lvl="3"/>
             <a:r>
-              <a:rPr lang="en-US" smtClean="0"/>
+              <a:rPr lang="en-US"/>
               <a:t>Fourth level</a:t>
             </a:r>
           </a:p>
           <a:p>
             <a:pPr lvl="4"/>
             <a:r>
-              <a:rPr lang="en-US" smtClean="0"/>
+              <a:rPr lang="en-US"/>
               <a:t>Fifth level</a:t>
             </a:r>
-            <a:endParaRPr lang="en-US"/>
           </a:p>
         </p:txBody>
       </p:sp>
@@ -826,7 +833,7 @@
           <a:p>
             <a:fld id="{5BCAD085-E8A6-8845-BD4E-CB4CCA059FC4}" type="datetimeFigureOut">
               <a:rPr lang="en-US" smtClean="0"/>
-              <a:t>1/27/13</a:t>
+              <a:t>5/4/26</a:t>
             </a:fld>
             <a:endParaRPr lang="en-US"/>
           </a:p>
@@ -929,10 +936,9 @@
           </a:lstStyle>
           <a:p>
             <a:r>
-              <a:rPr lang="en-US" smtClean="0"/>
+              <a:rPr lang="en-US"/>
               <a:t>Click to edit Master title style</a:t>
             </a:r>
-            <a:endParaRPr lang="en-US"/>
           </a:p>
         </p:txBody>
       </p:sp>
@@ -1049,7 +1055,7 @@
           <a:p>
             <a:pPr lvl="0"/>
             <a:r>
-              <a:rPr lang="en-US" smtClean="0"/>
+              <a:rPr lang="en-US"/>
               <a:t>Click to edit Master text styles</a:t>
             </a:r>
           </a:p>
@@ -1072,7 +1078,7 @@
           <a:p>
             <a:fld id="{5BCAD085-E8A6-8845-BD4E-CB4CCA059FC4}" type="datetimeFigureOut">
               <a:rPr lang="en-US" smtClean="0"/>
-              <a:t>1/27/13</a:t>
+              <a:t>5/4/26</a:t>
             </a:fld>
             <a:endParaRPr lang="en-US"/>
           </a:p>
@@ -1166,10 +1172,9 @@
           <a:lstStyle/>
           <a:p>
             <a:r>
-              <a:rPr lang="en-US" smtClean="0"/>
+              <a:rPr lang="en-US"/>
               <a:t>Click to edit Master title style</a:t>
             </a:r>
-            <a:endParaRPr lang="en-US"/>
           </a:p>
         </p:txBody>
       </p:sp>
@@ -1223,38 +1228,37 @@
           <a:p>
             <a:pPr lvl="0"/>
             <a:r>
-              <a:rPr lang="en-US" smtClean="0"/>
+              <a:rPr lang="en-US"/>
               <a:t>Click to edit Master text styles</a:t>
             </a:r>
           </a:p>
           <a:p>
             <a:pPr lvl="1"/>
             <a:r>
-              <a:rPr lang="en-US" smtClean="0"/>
+              <a:rPr lang="en-US"/>
               <a:t>Second level</a:t>
             </a:r>
           </a:p>
           <a:p>
             <a:pPr lvl="2"/>
             <a:r>
-              <a:rPr lang="en-US" smtClean="0"/>
+              <a:rPr lang="en-US"/>
               <a:t>Third level</a:t>
             </a:r>
           </a:p>
           <a:p>
             <a:pPr lvl="3"/>
             <a:r>
-              <a:rPr lang="en-US" smtClean="0"/>
+              <a:rPr lang="en-US"/>
               <a:t>Fourth level</a:t>
             </a:r>
           </a:p>
           <a:p>
             <a:pPr lvl="4"/>
             <a:r>
-              <a:rPr lang="en-US" smtClean="0"/>
+              <a:rPr lang="en-US"/>
               <a:t>Fifth level</a:t>
             </a:r>
-            <a:endParaRPr lang="en-US"/>
           </a:p>
         </p:txBody>
       </p:sp>
@@ -1308,38 +1312,37 @@
           <a:p>
             <a:pPr lvl="0"/>
             <a:r>
-              <a:rPr lang="en-US" smtClean="0"/>
+              <a:rPr lang="en-US"/>
               <a:t>Click to edit Master text styles</a:t>
             </a:r>
           </a:p>
           <a:p>
             <a:pPr lvl="1"/>
             <a:r>
-              <a:rPr lang="en-US" smtClean="0"/>
+              <a:rPr lang="en-US"/>
               <a:t>Second level</a:t>
             </a:r>
           </a:p>
           <a:p>
             <a:pPr lvl="2"/>
             <a:r>
-              <a:rPr lang="en-US" smtClean="0"/>
+              <a:rPr lang="en-US"/>
               <a:t>Third level</a:t>
             </a:r>
           </a:p>
           <a:p>
             <a:pPr lvl="3"/>
             <a:r>
-              <a:rPr lang="en-US" smtClean="0"/>
+              <a:rPr lang="en-US"/>
               <a:t>Fourth level</a:t>
             </a:r>
           </a:p>
           <a:p>
             <a:pPr lvl="4"/>
             <a:r>
-              <a:rPr lang="en-US" smtClean="0"/>
+              <a:rPr lang="en-US"/>
               <a:t>Fifth level</a:t>
             </a:r>
-            <a:endParaRPr lang="en-US"/>
           </a:p>
         </p:txBody>
       </p:sp>
@@ -1360,7 +1363,7 @@
           <a:p>
             <a:fld id="{5BCAD085-E8A6-8845-BD4E-CB4CCA059FC4}" type="datetimeFigureOut">
               <a:rPr lang="en-US" smtClean="0"/>
-              <a:t>1/27/13</a:t>
+              <a:t>5/4/26</a:t>
             </a:fld>
             <a:endParaRPr lang="en-US"/>
           </a:p>
@@ -1458,10 +1461,9 @@
           </a:lstStyle>
           <a:p>
             <a:r>
-              <a:rPr lang="en-US" smtClean="0"/>
+              <a:rPr lang="en-US"/>
               <a:t>Click to edit Master title style</a:t>
             </a:r>
-            <a:endParaRPr lang="en-US"/>
           </a:p>
         </p:txBody>
       </p:sp>
@@ -1524,7 +1526,7 @@
           <a:p>
             <a:pPr lvl="0"/>
             <a:r>
-              <a:rPr lang="en-US" smtClean="0"/>
+              <a:rPr lang="en-US"/>
               <a:t>Click to edit Master text styles</a:t>
             </a:r>
           </a:p>
@@ -1580,38 +1582,37 @@
           <a:p>
             <a:pPr lvl="0"/>
             <a:r>
-              <a:rPr lang="en-US" smtClean="0"/>
+              <a:rPr lang="en-US"/>
               <a:t>Click to edit Master text styles</a:t>
             </a:r>
           </a:p>
           <a:p>
             <a:pPr lvl="1"/>
             <a:r>
-              <a:rPr lang="en-US" smtClean="0"/>
+              <a:rPr lang="en-US"/>
               <a:t>Second level</a:t>
             </a:r>
           </a:p>
           <a:p>
             <a:pPr lvl="2"/>
             <a:r>
-              <a:rPr lang="en-US" smtClean="0"/>
+              <a:rPr lang="en-US"/>
               <a:t>Third level</a:t>
             </a:r>
           </a:p>
           <a:p>
             <a:pPr lvl="3"/>
             <a:r>
-              <a:rPr lang="en-US" smtClean="0"/>
+              <a:rPr lang="en-US"/>
               <a:t>Fourth level</a:t>
             </a:r>
           </a:p>
           <a:p>
             <a:pPr lvl="4"/>
             <a:r>
-              <a:rPr lang="en-US" smtClean="0"/>
+              <a:rPr lang="en-US"/>
               <a:t>Fifth level</a:t>
             </a:r>
-            <a:endParaRPr lang="en-US"/>
           </a:p>
         </p:txBody>
       </p:sp>
@@ -1674,7 +1675,7 @@
           <a:p>
             <a:pPr lvl="0"/>
             <a:r>
-              <a:rPr lang="en-US" smtClean="0"/>
+              <a:rPr lang="en-US"/>
               <a:t>Click to edit Master text styles</a:t>
             </a:r>
           </a:p>
@@ -1730,38 +1731,37 @@
           <a:p>
             <a:pPr lvl="0"/>
             <a:r>
-              <a:rPr lang="en-US" smtClean="0"/>
+              <a:rPr lang="en-US"/>
               <a:t>Click to edit Master text styles</a:t>
             </a:r>
           </a:p>
           <a:p>
             <a:pPr lvl="1"/>
             <a:r>
-              <a:rPr lang="en-US" smtClean="0"/>
+              <a:rPr lang="en-US"/>
               <a:t>Second level</a:t>
             </a:r>
           </a:p>
           <a:p>
             <a:pPr lvl="2"/>
             <a:r>
-              <a:rPr lang="en-US" smtClean="0"/>
+              <a:rPr lang="en-US"/>
               <a:t>Third level</a:t>
             </a:r>
           </a:p>
           <a:p>
             <a:pPr lvl="3"/>
             <a:r>
-              <a:rPr lang="en-US" smtClean="0"/>
+              <a:rPr lang="en-US"/>
               <a:t>Fourth level</a:t>
             </a:r>
           </a:p>
           <a:p>
             <a:pPr lvl="4"/>
             <a:r>
-              <a:rPr lang="en-US" smtClean="0"/>
+              <a:rPr lang="en-US"/>
               <a:t>Fifth level</a:t>
             </a:r>
-            <a:endParaRPr lang="en-US"/>
           </a:p>
         </p:txBody>
       </p:sp>
@@ -1782,7 +1782,7 @@
           <a:p>
             <a:fld id="{5BCAD085-E8A6-8845-BD4E-CB4CCA059FC4}" type="datetimeFigureOut">
               <a:rPr lang="en-US" smtClean="0"/>
-              <a:t>1/27/13</a:t>
+              <a:t>5/4/26</a:t>
             </a:fld>
             <a:endParaRPr lang="en-US"/>
           </a:p>
@@ -1876,10 +1876,9 @@
           <a:lstStyle/>
           <a:p>
             <a:r>
-              <a:rPr lang="en-US" smtClean="0"/>
+              <a:rPr lang="en-US"/>
               <a:t>Click to edit Master title style</a:t>
             </a:r>
-            <a:endParaRPr lang="en-US"/>
           </a:p>
         </p:txBody>
       </p:sp>
@@ -1900,7 +1899,7 @@
           <a:p>
             <a:fld id="{5BCAD085-E8A6-8845-BD4E-CB4CCA059FC4}" type="datetimeFigureOut">
               <a:rPr lang="en-US" smtClean="0"/>
-              <a:t>1/27/13</a:t>
+              <a:t>5/4/26</a:t>
             </a:fld>
             <a:endParaRPr lang="en-US"/>
           </a:p>
@@ -1995,7 +1994,7 @@
           <a:p>
             <a:fld id="{5BCAD085-E8A6-8845-BD4E-CB4CCA059FC4}" type="datetimeFigureOut">
               <a:rPr lang="en-US" smtClean="0"/>
-              <a:t>1/27/13</a:t>
+              <a:t>5/4/26</a:t>
             </a:fld>
             <a:endParaRPr lang="en-US"/>
           </a:p>
@@ -2098,10 +2097,9 @@
           </a:lstStyle>
           <a:p>
             <a:r>
-              <a:rPr lang="en-US" smtClean="0"/>
+              <a:rPr lang="en-US"/>
               <a:t>Click to edit Master title style</a:t>
             </a:r>
-            <a:endParaRPr lang="en-US"/>
           </a:p>
         </p:txBody>
       </p:sp>
@@ -2155,38 +2153,37 @@
           <a:p>
             <a:pPr lvl="0"/>
             <a:r>
-              <a:rPr lang="en-US" smtClean="0"/>
+              <a:rPr lang="en-US"/>
               <a:t>Click to edit Master text styles</a:t>
             </a:r>
           </a:p>
           <a:p>
             <a:pPr lvl="1"/>
             <a:r>
-              <a:rPr lang="en-US" smtClean="0"/>
+              <a:rPr lang="en-US"/>
               <a:t>Second level</a:t>
             </a:r>
           </a:p>
           <a:p>
             <a:pPr lvl="2"/>
             <a:r>
-              <a:rPr lang="en-US" smtClean="0"/>
+              <a:rPr lang="en-US"/>
               <a:t>Third level</a:t>
             </a:r>
           </a:p>
           <a:p>
             <a:pPr lvl="3"/>
             <a:r>
-              <a:rPr lang="en-US" smtClean="0"/>
+              <a:rPr lang="en-US"/>
               <a:t>Fourth level</a:t>
             </a:r>
           </a:p>
           <a:p>
             <a:pPr lvl="4"/>
             <a:r>
-              <a:rPr lang="en-US" smtClean="0"/>
+              <a:rPr lang="en-US"/>
               <a:t>Fifth level</a:t>
             </a:r>
-            <a:endParaRPr lang="en-US"/>
           </a:p>
         </p:txBody>
       </p:sp>
@@ -2249,7 +2246,7 @@
           <a:p>
             <a:pPr lvl="0"/>
             <a:r>
-              <a:rPr lang="en-US" smtClean="0"/>
+              <a:rPr lang="en-US"/>
               <a:t>Click to edit Master text styles</a:t>
             </a:r>
           </a:p>
@@ -2272,7 +2269,7 @@
           <a:p>
             <a:fld id="{5BCAD085-E8A6-8845-BD4E-CB4CCA059FC4}" type="datetimeFigureOut">
               <a:rPr lang="en-US" smtClean="0"/>
-              <a:t>1/27/13</a:t>
+              <a:t>5/4/26</a:t>
             </a:fld>
             <a:endParaRPr lang="en-US"/>
           </a:p>
@@ -2375,10 +2372,9 @@
           </a:lstStyle>
           <a:p>
             <a:r>
-              <a:rPr lang="en-US" smtClean="0"/>
+              <a:rPr lang="en-US"/>
               <a:t>Click to edit Master title style</a:t>
             </a:r>
-            <a:endParaRPr lang="en-US"/>
           </a:p>
         </p:txBody>
       </p:sp>
@@ -2502,7 +2498,7 @@
           <a:p>
             <a:pPr lvl="0"/>
             <a:r>
-              <a:rPr lang="en-US" smtClean="0"/>
+              <a:rPr lang="en-US"/>
               <a:t>Click to edit Master text styles</a:t>
             </a:r>
           </a:p>
@@ -2525,7 +2521,7 @@
           <a:p>
             <a:fld id="{5BCAD085-E8A6-8845-BD4E-CB4CCA059FC4}" type="datetimeFigureOut">
               <a:rPr lang="en-US" smtClean="0"/>
-              <a:t>1/27/13</a:t>
+              <a:t>5/4/26</a:t>
             </a:fld>
             <a:endParaRPr lang="en-US"/>
           </a:p>
@@ -2634,10 +2630,9 @@
           <a:lstStyle/>
           <a:p>
             <a:r>
-              <a:rPr lang="en-US" smtClean="0"/>
+              <a:rPr lang="en-US"/>
               <a:t>Click to edit Master title style</a:t>
             </a:r>
-            <a:endParaRPr lang="en-US"/>
           </a:p>
         </p:txBody>
       </p:sp>
@@ -2668,38 +2663,37 @@
           <a:p>
             <a:pPr lvl="0"/>
             <a:r>
-              <a:rPr lang="en-US" smtClean="0"/>
+              <a:rPr lang="en-US"/>
               <a:t>Click to edit Master text styles</a:t>
             </a:r>
           </a:p>
           <a:p>
             <a:pPr lvl="1"/>
             <a:r>
-              <a:rPr lang="en-US" smtClean="0"/>
+              <a:rPr lang="en-US"/>
               <a:t>Second level</a:t>
             </a:r>
           </a:p>
           <a:p>
             <a:pPr lvl="2"/>
             <a:r>
-              <a:rPr lang="en-US" smtClean="0"/>
+              <a:rPr lang="en-US"/>
               <a:t>Third level</a:t>
             </a:r>
           </a:p>
           <a:p>
             <a:pPr lvl="3"/>
             <a:r>
-              <a:rPr lang="en-US" smtClean="0"/>
+              <a:rPr lang="en-US"/>
               <a:t>Fourth level</a:t>
             </a:r>
           </a:p>
           <a:p>
             <a:pPr lvl="4"/>
             <a:r>
-              <a:rPr lang="en-US" smtClean="0"/>
+              <a:rPr lang="en-US"/>
               <a:t>Fifth level</a:t>
             </a:r>
-            <a:endParaRPr lang="en-US"/>
           </a:p>
         </p:txBody>
       </p:sp>
@@ -2738,7 +2732,7 @@
           <a:p>
             <a:fld id="{5BCAD085-E8A6-8845-BD4E-CB4CCA059FC4}" type="datetimeFigureOut">
               <a:rPr lang="en-US" smtClean="0"/>
-              <a:t>1/27/13</a:t>
+              <a:t>5/4/26</a:t>
             </a:fld>
             <a:endParaRPr lang="en-US"/>
           </a:p>
@@ -3097,7 +3091,7 @@
 </file>
 
 <file path=ppt/slides/slide1.xml><?xml version="1.0" encoding="utf-8"?>
-<p:sld xmlns:a="http://schemas.openxmlformats.org/drawingml/2006/main" xmlns:p="http://schemas.openxmlformats.org/presentationml/2006/main" xmlns:r="http://schemas.openxmlformats.org/officeDocument/2006/relationships">
+<p:sld xmlns:a="http://schemas.openxmlformats.org/drawingml/2006/main" xmlns:r="http://schemas.openxmlformats.org/officeDocument/2006/relationships" xmlns:p="http://schemas.openxmlformats.org/presentationml/2006/main">
   <p:cSld>
     <p:spTree>
       <p:nvGrpSpPr>
@@ -3105,7 +3099,14 @@
         <p:cNvGrpSpPr/>
         <p:nvPr/>
       </p:nvGrpSpPr>
-      <p:grpSpPr/>
+      <p:grpSpPr>
+        <a:xfrm>
+          <a:off x="0" y="0"/>
+          <a:ext cx="0" cy="0"/>
+          <a:chOff x="0" y="0"/>
+          <a:chExt cx="0" cy="0"/>
+        </a:xfrm>
+      </p:grpSpPr>
       <p:sp>
         <p:nvSpPr>
           <p:cNvPr id="2" name="TextBox 1"/>
@@ -3273,7 +3274,7 @@
 </file>
 
 <file path=ppt/slides/slide10.xml><?xml version="1.0" encoding="utf-8"?>
-<p:sld xmlns:a="http://schemas.openxmlformats.org/drawingml/2006/main" xmlns:p="http://schemas.openxmlformats.org/presentationml/2006/main" xmlns:r="http://schemas.openxmlformats.org/officeDocument/2006/relationships">
+<p:sld xmlns:a="http://schemas.openxmlformats.org/drawingml/2006/main" xmlns:r="http://schemas.openxmlformats.org/officeDocument/2006/relationships" xmlns:p="http://schemas.openxmlformats.org/presentationml/2006/main">
   <p:cSld>
     <p:spTree>
       <p:nvGrpSpPr>
@@ -3281,7 +3282,14 @@
         <p:cNvGrpSpPr/>
         <p:nvPr/>
       </p:nvGrpSpPr>
-      <p:grpSpPr/>
+      <p:grpSpPr>
+        <a:xfrm>
+          <a:off x="0" y="0"/>
+          <a:ext cx="0" cy="0"/>
+          <a:chOff x="0" y="0"/>
+          <a:chExt cx="0" cy="0"/>
+        </a:xfrm>
+      </p:grpSpPr>
       <p:sp>
         <p:nvSpPr>
           <p:cNvPr id="2" name="TextBox 1"/>
@@ -3383,7 +3391,7 @@
 </file>
 
 <file path=ppt/slides/slide11.xml><?xml version="1.0" encoding="utf-8"?>
-<p:sld xmlns:a="http://schemas.openxmlformats.org/drawingml/2006/main" xmlns:p="http://schemas.openxmlformats.org/presentationml/2006/main" xmlns:r="http://schemas.openxmlformats.org/officeDocument/2006/relationships">
+<p:sld xmlns:a="http://schemas.openxmlformats.org/drawingml/2006/main" xmlns:r="http://schemas.openxmlformats.org/officeDocument/2006/relationships" xmlns:p="http://schemas.openxmlformats.org/presentationml/2006/main">
   <p:cSld>
     <p:spTree>
       <p:nvGrpSpPr>
@@ -3391,7 +3399,14 @@
         <p:cNvGrpSpPr/>
         <p:nvPr/>
       </p:nvGrpSpPr>
-      <p:grpSpPr/>
+      <p:grpSpPr>
+        <a:xfrm>
+          <a:off x="0" y="0"/>
+          <a:ext cx="0" cy="0"/>
+          <a:chOff x="0" y="0"/>
+          <a:chExt cx="0" cy="0"/>
+        </a:xfrm>
+      </p:grpSpPr>
       <p:sp>
         <p:nvSpPr>
           <p:cNvPr id="2" name="TextBox 1"/>
@@ -3493,7 +3508,7 @@
 </file>
 
 <file path=ppt/slides/slide12.xml><?xml version="1.0" encoding="utf-8"?>
-<p:sld xmlns:a="http://schemas.openxmlformats.org/drawingml/2006/main" xmlns:p="http://schemas.openxmlformats.org/presentationml/2006/main" xmlns:r="http://schemas.openxmlformats.org/officeDocument/2006/relationships">
+<p:sld xmlns:a="http://schemas.openxmlformats.org/drawingml/2006/main" xmlns:r="http://schemas.openxmlformats.org/officeDocument/2006/relationships" xmlns:p="http://schemas.openxmlformats.org/presentationml/2006/main">
   <p:cSld>
     <p:spTree>
       <p:nvGrpSpPr>
@@ -3501,7 +3516,14 @@
         <p:cNvGrpSpPr/>
         <p:nvPr/>
       </p:nvGrpSpPr>
-      <p:grpSpPr/>
+      <p:grpSpPr>
+        <a:xfrm>
+          <a:off x="0" y="0"/>
+          <a:ext cx="0" cy="0"/>
+          <a:chOff x="0" y="0"/>
+          <a:chExt cx="0" cy="0"/>
+        </a:xfrm>
+      </p:grpSpPr>
       <p:sp>
         <p:nvSpPr>
           <p:cNvPr id="2" name="TextBox 1"/>
@@ -3603,7 +3625,7 @@
 </file>
 
 <file path=ppt/slides/slide13.xml><?xml version="1.0" encoding="utf-8"?>
-<p:sld xmlns:a="http://schemas.openxmlformats.org/drawingml/2006/main" xmlns:p="http://schemas.openxmlformats.org/presentationml/2006/main" xmlns:r="http://schemas.openxmlformats.org/officeDocument/2006/relationships">
+<p:sld xmlns:a="http://schemas.openxmlformats.org/drawingml/2006/main" xmlns:r="http://schemas.openxmlformats.org/officeDocument/2006/relationships" xmlns:p="http://schemas.openxmlformats.org/presentationml/2006/main">
   <p:cSld>
     <p:spTree>
       <p:nvGrpSpPr>
@@ -3611,7 +3633,14 @@
         <p:cNvGrpSpPr/>
         <p:nvPr/>
       </p:nvGrpSpPr>
-      <p:grpSpPr/>
+      <p:grpSpPr>
+        <a:xfrm>
+          <a:off x="0" y="0"/>
+          <a:ext cx="0" cy="0"/>
+          <a:chOff x="0" y="0"/>
+          <a:chExt cx="0" cy="0"/>
+        </a:xfrm>
+      </p:grpSpPr>
       <p:sp>
         <p:nvSpPr>
           <p:cNvPr id="2" name="TextBox 1"/>
@@ -3713,7 +3742,7 @@
 </file>
 
 <file path=ppt/slides/slide14.xml><?xml version="1.0" encoding="utf-8"?>
-<p:sld xmlns:a="http://schemas.openxmlformats.org/drawingml/2006/main" xmlns:p="http://schemas.openxmlformats.org/presentationml/2006/main" xmlns:r="http://schemas.openxmlformats.org/officeDocument/2006/relationships">
+<p:sld xmlns:a="http://schemas.openxmlformats.org/drawingml/2006/main" xmlns:r="http://schemas.openxmlformats.org/officeDocument/2006/relationships" xmlns:p="http://schemas.openxmlformats.org/presentationml/2006/main">
   <p:cSld>
     <p:spTree>
       <p:nvGrpSpPr>
@@ -3721,7 +3750,14 @@
         <p:cNvGrpSpPr/>
         <p:nvPr/>
       </p:nvGrpSpPr>
-      <p:grpSpPr/>
+      <p:grpSpPr>
+        <a:xfrm>
+          <a:off x="0" y="0"/>
+          <a:ext cx="0" cy="0"/>
+          <a:chOff x="0" y="0"/>
+          <a:chExt cx="0" cy="0"/>
+        </a:xfrm>
+      </p:grpSpPr>
       <p:sp>
         <p:nvSpPr>
           <p:cNvPr id="2" name="TextBox 1"/>
@@ -3823,7 +3859,7 @@
 </file>
 
 <file path=ppt/slides/slide15.xml><?xml version="1.0" encoding="utf-8"?>
-<p:sld xmlns:a="http://schemas.openxmlformats.org/drawingml/2006/main" xmlns:p="http://schemas.openxmlformats.org/presentationml/2006/main" xmlns:r="http://schemas.openxmlformats.org/officeDocument/2006/relationships">
+<p:sld xmlns:a="http://schemas.openxmlformats.org/drawingml/2006/main" xmlns:r="http://schemas.openxmlformats.org/officeDocument/2006/relationships" xmlns:p="http://schemas.openxmlformats.org/presentationml/2006/main">
   <p:cSld>
     <p:spTree>
       <p:nvGrpSpPr>
@@ -3831,7 +3867,14 @@
         <p:cNvGrpSpPr/>
         <p:nvPr/>
       </p:nvGrpSpPr>
-      <p:grpSpPr/>
+      <p:grpSpPr>
+        <a:xfrm>
+          <a:off x="0" y="0"/>
+          <a:ext cx="0" cy="0"/>
+          <a:chOff x="0" y="0"/>
+          <a:chExt cx="0" cy="0"/>
+        </a:xfrm>
+      </p:grpSpPr>
       <p:sp>
         <p:nvSpPr>
           <p:cNvPr id="2" name="TextBox 1"/>
@@ -3933,7 +3976,7 @@
 </file>
 
 <file path=ppt/slides/slide16.xml><?xml version="1.0" encoding="utf-8"?>
-<p:sld xmlns:a="http://schemas.openxmlformats.org/drawingml/2006/main" xmlns:p="http://schemas.openxmlformats.org/presentationml/2006/main" xmlns:r="http://schemas.openxmlformats.org/officeDocument/2006/relationships">
+<p:sld xmlns:a="http://schemas.openxmlformats.org/drawingml/2006/main" xmlns:r="http://schemas.openxmlformats.org/officeDocument/2006/relationships" xmlns:p="http://schemas.openxmlformats.org/presentationml/2006/main">
   <p:cSld>
     <p:spTree>
       <p:nvGrpSpPr>
@@ -3941,7 +3984,14 @@
         <p:cNvGrpSpPr/>
         <p:nvPr/>
       </p:nvGrpSpPr>
-      <p:grpSpPr/>
+      <p:grpSpPr>
+        <a:xfrm>
+          <a:off x="0" y="0"/>
+          <a:ext cx="0" cy="0"/>
+          <a:chOff x="0" y="0"/>
+          <a:chExt cx="0" cy="0"/>
+        </a:xfrm>
+      </p:grpSpPr>
       <p:sp>
         <p:nvSpPr>
           <p:cNvPr id="2" name="TextBox 1"/>
@@ -4043,7 +4093,7 @@
 </file>
 
 <file path=ppt/slides/slide17.xml><?xml version="1.0" encoding="utf-8"?>
-<p:sld xmlns:a="http://schemas.openxmlformats.org/drawingml/2006/main" xmlns:p="http://schemas.openxmlformats.org/presentationml/2006/main" xmlns:r="http://schemas.openxmlformats.org/officeDocument/2006/relationships">
+<p:sld xmlns:a="http://schemas.openxmlformats.org/drawingml/2006/main" xmlns:r="http://schemas.openxmlformats.org/officeDocument/2006/relationships" xmlns:p="http://schemas.openxmlformats.org/presentationml/2006/main">
   <p:cSld>
     <p:spTree>
       <p:nvGrpSpPr>
@@ -4051,7 +4101,437 @@
         <p:cNvGrpSpPr/>
         <p:nvPr/>
       </p:nvGrpSpPr>
-      <p:grpSpPr/>
+      <p:grpSpPr>
+        <a:xfrm>
+          <a:off x="0" y="0"/>
+          <a:ext cx="0" cy="0"/>
+          <a:chOff x="0" y="0"/>
+          <a:chExt cx="0" cy="0"/>
+        </a:xfrm>
+      </p:grpSpPr>
+      <p:sp>
+        <p:nvSpPr>
+          <p:cNvPr id="2" name="TextBox 1"/>
+          <p:cNvSpPr txBox="1"/>
+          <p:nvPr/>
+        </p:nvSpPr>
+        <p:spPr>
+          <a:xfrm>
+            <a:off x="365760" y="228600"/>
+            <a:ext cx="11430000" cy="492443"/>
+          </a:xfrm>
+          <a:prstGeom prst="rect">
+            <a:avLst/>
+          </a:prstGeom>
+          <a:noFill/>
+        </p:spPr>
+        <p:txBody>
+          <a:bodyPr wrap="square">
+            <a:spAutoFit/>
+          </a:bodyPr>
+          <a:lstStyle/>
+          <a:p>
+            <a:pPr algn="l"/>
+            <a:r>
+              <a:rPr sz="2600" b="1" dirty="0">
+                <a:solidFill>
+                  <a:srgbClr val="1F3A5F"/>
+                </a:solidFill>
+              </a:rPr>
+              <a:t>Next steps, part 1: </a:t>
+            </a:r>
+            <a:r>
+              <a:rPr lang="en-US" sz="2600" b="1" dirty="0">
+                <a:solidFill>
+                  <a:srgbClr val="1F3A5F"/>
+                </a:solidFill>
+              </a:rPr>
+              <a:t>assembly question</a:t>
+            </a:r>
+            <a:endParaRPr sz="2600" b="1" dirty="0">
+              <a:solidFill>
+                <a:srgbClr val="1F3A5F"/>
+              </a:solidFill>
+            </a:endParaRPr>
+          </a:p>
+        </p:txBody>
+      </p:sp>
+      <p:sp>
+        <p:nvSpPr>
+          <p:cNvPr id="4" name="TextBox 3"/>
+          <p:cNvSpPr txBox="1"/>
+          <p:nvPr/>
+        </p:nvSpPr>
+        <p:spPr>
+          <a:xfrm>
+            <a:off x="457200" y="1280160"/>
+            <a:ext cx="6198919" cy="1954381"/>
+          </a:xfrm>
+          <a:prstGeom prst="rect">
+            <a:avLst/>
+          </a:prstGeom>
+          <a:noFill/>
+        </p:spPr>
+        <p:txBody>
+          <a:bodyPr wrap="square">
+            <a:spAutoFit/>
+          </a:bodyPr>
+          <a:lstStyle/>
+          <a:p>
+            <a:pPr algn="l"/>
+            <a:r>
+              <a:rPr sz="1100" b="0" dirty="0">
+                <a:solidFill>
+                  <a:srgbClr val="101010"/>
+                </a:solidFill>
+              </a:rPr>
+              <a:t>Every lock primitive we have evaluated so far (</a:t>
+            </a:r>
+            <a:r>
+              <a:rPr sz="1100" b="0" dirty="0" err="1">
+                <a:solidFill>
+                  <a:srgbClr val="101010"/>
+                </a:solidFill>
+              </a:rPr>
+              <a:t>tas</a:t>
+            </a:r>
+            <a:r>
+              <a:rPr sz="1100" b="0" dirty="0">
+                <a:solidFill>
+                  <a:srgbClr val="101010"/>
+                </a:solidFill>
+              </a:rPr>
+              <a:t>, </a:t>
+            </a:r>
+            <a:r>
+              <a:rPr sz="1100" b="0" dirty="0" err="1">
+                <a:solidFill>
+                  <a:srgbClr val="101010"/>
+                </a:solidFill>
+              </a:rPr>
+              <a:t>ttas</a:t>
+            </a:r>
+            <a:r>
+              <a:rPr sz="1100" b="0" dirty="0">
+                <a:solidFill>
+                  <a:srgbClr val="101010"/>
+                </a:solidFill>
+              </a:rPr>
+              <a:t>, </a:t>
+            </a:r>
+            <a:r>
+              <a:rPr sz="1100" b="0" dirty="0" err="1">
+                <a:solidFill>
+                  <a:srgbClr val="101010"/>
+                </a:solidFill>
+              </a:rPr>
+              <a:t>cas</a:t>
+            </a:r>
+            <a:r>
+              <a:rPr sz="1100" b="0" dirty="0">
+                <a:solidFill>
+                  <a:srgbClr val="101010"/>
+                </a:solidFill>
+              </a:rPr>
+              <a:t>, ticket, </a:t>
+            </a:r>
+            <a:r>
+              <a:rPr sz="1100" b="0" dirty="0" err="1">
+                <a:solidFill>
+                  <a:srgbClr val="101010"/>
+                </a:solidFill>
+              </a:rPr>
+              <a:t>rw</a:t>
+            </a:r>
+            <a:r>
+              <a:rPr sz="1100" b="0" dirty="0">
+                <a:solidFill>
+                  <a:srgbClr val="101010"/>
+                </a:solidFill>
+              </a:rPr>
+              <a:t>, occ) is built on</a:t>
+            </a:r>
+          </a:p>
+          <a:p>
+            <a:pPr algn="l"/>
+            <a:r>
+              <a:rPr sz="1100" b="0" dirty="0">
+                <a:solidFill>
+                  <a:srgbClr val="101010"/>
+                </a:solidFill>
+              </a:rPr>
+              <a:t>   std::atomic. The compiler picks the underlying instruction. On Graviton with -march=native </a:t>
+            </a:r>
+            <a:r>
+              <a:rPr lang="en-US" sz="1100" b="0" dirty="0">
+                <a:solidFill>
+                  <a:srgbClr val="101010"/>
+                </a:solidFill>
+              </a:rPr>
+              <a:t>are</a:t>
+            </a:r>
+            <a:r>
+              <a:rPr lang="en-US" sz="1100" dirty="0">
+                <a:solidFill>
+                  <a:srgbClr val="101010"/>
+                </a:solidFill>
+              </a:rPr>
+              <a:t> </a:t>
+            </a:r>
+            <a:r>
+              <a:rPr sz="1100" b="0" dirty="0">
+                <a:solidFill>
+                  <a:srgbClr val="101010"/>
+                </a:solidFill>
+              </a:rPr>
+              <a:t>getting the ARMv8.1 LSE atomics (</a:t>
+            </a:r>
+            <a:r>
+              <a:rPr sz="1100" b="0" dirty="0" err="1">
+                <a:solidFill>
+                  <a:srgbClr val="101010"/>
+                </a:solidFill>
+              </a:rPr>
+              <a:t>cas</a:t>
+            </a:r>
+            <a:r>
+              <a:rPr sz="1100" b="0" dirty="0">
+                <a:solidFill>
+                  <a:srgbClr val="101010"/>
+                </a:solidFill>
+              </a:rPr>
+              <a:t>, </a:t>
+            </a:r>
+            <a:r>
+              <a:rPr sz="1100" b="0" dirty="0" err="1">
+                <a:solidFill>
+                  <a:srgbClr val="101010"/>
+                </a:solidFill>
+              </a:rPr>
+              <a:t>casal</a:t>
+            </a:r>
+            <a:r>
+              <a:rPr sz="1100" b="0" dirty="0">
+                <a:solidFill>
+                  <a:srgbClr val="101010"/>
+                </a:solidFill>
+              </a:rPr>
+              <a:t>, </a:t>
+            </a:r>
+            <a:r>
+              <a:rPr sz="1100" b="0" dirty="0" err="1">
+                <a:solidFill>
+                  <a:srgbClr val="101010"/>
+                </a:solidFill>
+              </a:rPr>
+              <a:t>swp</a:t>
+            </a:r>
+            <a:r>
+              <a:rPr sz="1100" b="0" dirty="0">
+                <a:solidFill>
+                  <a:srgbClr val="101010"/>
+                </a:solidFill>
+              </a:rPr>
+              <a:t>, </a:t>
+            </a:r>
+            <a:r>
+              <a:rPr sz="1100" b="0" dirty="0" err="1">
+                <a:solidFill>
+                  <a:srgbClr val="101010"/>
+                </a:solidFill>
+              </a:rPr>
+              <a:t>ldadd</a:t>
+            </a:r>
+            <a:r>
+              <a:rPr sz="1100" b="0" dirty="0">
+                <a:solidFill>
+                  <a:srgbClr val="101010"/>
+                </a:solidFill>
+              </a:rPr>
+              <a:t>). On Xeon we get the lock prefixed instructions (lock </a:t>
+            </a:r>
+            <a:r>
+              <a:rPr sz="1100" b="0" dirty="0" err="1">
+                <a:solidFill>
+                  <a:srgbClr val="101010"/>
+                </a:solidFill>
+              </a:rPr>
+              <a:t>cmpxchg</a:t>
+            </a:r>
+            <a:r>
+              <a:rPr sz="1100" b="0" dirty="0">
+                <a:solidFill>
+                  <a:srgbClr val="101010"/>
+                </a:solidFill>
+              </a:rPr>
+              <a:t>, lock </a:t>
+            </a:r>
+            <a:r>
+              <a:rPr sz="1100" b="0" dirty="0" err="1">
+                <a:solidFill>
+                  <a:srgbClr val="101010"/>
+                </a:solidFill>
+              </a:rPr>
+              <a:t>xchg</a:t>
+            </a:r>
+            <a:r>
+              <a:rPr sz="1100" b="0" dirty="0">
+                <a:solidFill>
+                  <a:srgbClr val="101010"/>
+                </a:solidFill>
+              </a:rPr>
+              <a:t>, lock </a:t>
+            </a:r>
+            <a:r>
+              <a:rPr sz="1100" b="0" dirty="0" err="1">
+                <a:solidFill>
+                  <a:srgbClr val="101010"/>
+                </a:solidFill>
+              </a:rPr>
+              <a:t>xadd</a:t>
+            </a:r>
+            <a:r>
+              <a:rPr sz="1100" b="0" dirty="0">
+                <a:solidFill>
+                  <a:srgbClr val="101010"/>
+                </a:solidFill>
+              </a:rPr>
+              <a:t>).</a:t>
+            </a:r>
+          </a:p>
+          <a:p>
+            <a:pPr algn="l"/>
+            <a:endParaRPr sz="1100" b="0" dirty="0">
+              <a:solidFill>
+                <a:srgbClr val="101010"/>
+              </a:solidFill>
+            </a:endParaRPr>
+          </a:p>
+          <a:p>
+            <a:pPr algn="l"/>
+            <a:r>
+              <a:rPr sz="1100" b="0" dirty="0">
+                <a:solidFill>
+                  <a:srgbClr val="101010"/>
+                </a:solidFill>
+              </a:rPr>
+              <a:t>Things our current set does NOT cover:</a:t>
+            </a:r>
+          </a:p>
+          <a:p>
+            <a:pPr algn="l"/>
+            <a:r>
+              <a:rPr sz="1100" b="0" dirty="0">
+                <a:solidFill>
+                  <a:srgbClr val="101010"/>
+                </a:solidFill>
+              </a:rPr>
+              <a:t>   On ARM, WFE (Wait For Event) and SEV (Send Event). These let a spinning core enter a low power wait</a:t>
+            </a:r>
+          </a:p>
+          <a:p>
+            <a:pPr algn="l"/>
+            <a:r>
+              <a:rPr sz="1100" b="0" dirty="0">
+                <a:solidFill>
+                  <a:srgbClr val="101010"/>
+                </a:solidFill>
+              </a:rPr>
+              <a:t>   that wakes when the cache line changes. The Linux kernel arm64 spinlock uses them. Our </a:t>
+            </a:r>
+            <a:r>
+              <a:rPr sz="1100" b="0" dirty="0" err="1">
+                <a:solidFill>
+                  <a:srgbClr val="101010"/>
+                </a:solidFill>
+              </a:rPr>
+              <a:t>cpu_relax</a:t>
+            </a:r>
+            <a:r>
+              <a:rPr sz="1100" b="0" dirty="0">
+                <a:solidFill>
+                  <a:srgbClr val="101010"/>
+                </a:solidFill>
+              </a:rPr>
+              <a:t> just</a:t>
+            </a:r>
+          </a:p>
+          <a:p>
+            <a:pPr algn="l"/>
+            <a:r>
+              <a:rPr sz="1100" b="0" dirty="0">
+                <a:solidFill>
+                  <a:srgbClr val="101010"/>
+                </a:solidFill>
+              </a:rPr>
+              <a:t>   does YIELD which is a hint that is largely a NOP on Neoverse cores.</a:t>
+            </a:r>
+          </a:p>
+          <a:p>
+            <a:pPr algn="l"/>
+            <a:r>
+              <a:rPr sz="1100" b="0" dirty="0">
+                <a:solidFill>
+                  <a:srgbClr val="101010"/>
+                </a:solidFill>
+              </a:rPr>
+              <a:t>   On ARM, hand picking barrier strength (DMB ISHLD vs DMB ISHST vs DMB ISH SY) instead of letting the</a:t>
+            </a:r>
+          </a:p>
+          <a:p>
+            <a:pPr algn="l"/>
+            <a:r>
+              <a:rPr sz="1100" b="0" dirty="0">
+                <a:solidFill>
+                  <a:srgbClr val="101010"/>
+                </a:solidFill>
+              </a:rPr>
+              <a:t>   compiler map </a:t>
+            </a:r>
+            <a:r>
+              <a:rPr sz="1100" b="0" dirty="0" err="1">
+                <a:solidFill>
+                  <a:srgbClr val="101010"/>
+                </a:solidFill>
+              </a:rPr>
+              <a:t>memory_order_release</a:t>
+            </a:r>
+            <a:r>
+              <a:rPr sz="1100" b="0" dirty="0">
+                <a:solidFill>
+                  <a:srgbClr val="101010"/>
+                </a:solidFill>
+              </a:rPr>
+              <a:t> to whichever DMB it picks.</a:t>
+            </a:r>
+          </a:p>
+        </p:txBody>
+      </p:sp>
+    </p:spTree>
+  </p:cSld>
+  <p:clrMapOvr>
+    <a:masterClrMapping/>
+  </p:clrMapOvr>
+</p:sld>
+</file>
+
+<file path=ppt/slides/slide18.xml><?xml version="1.0" encoding="utf-8"?>
+<p:sld xmlns:a="http://schemas.openxmlformats.org/drawingml/2006/main" xmlns:r="http://schemas.openxmlformats.org/officeDocument/2006/relationships" xmlns:p="http://schemas.openxmlformats.org/presentationml/2006/main">
+  <p:cSld>
+    <p:spTree>
+      <p:nvGrpSpPr>
+        <p:cNvPr id="1" name=""/>
+        <p:cNvGrpSpPr/>
+        <p:nvPr/>
+      </p:nvGrpSpPr>
+      <p:grpSpPr>
+        <a:xfrm>
+          <a:off x="0" y="0"/>
+          <a:ext cx="0" cy="0"/>
+          <a:chOff x="0" y="0"/>
+          <a:chExt cx="0" cy="0"/>
+        </a:xfrm>
+      </p:grpSpPr>
       <p:sp>
         <p:nvSpPr>
           <p:cNvPr id="2" name="TextBox 1"/>
@@ -4081,7 +4561,7 @@
                   <a:srgbClr val="1F3A5F"/>
                 </a:solidFill>
               </a:rPr>
-              <a:t>Best lock per architecture and workload</a:t>
+              <a:t>Next steps, part 2: concrete experiments to run</a:t>
             </a:r>
           </a:p>
         </p:txBody>
@@ -4094,8 +4574,8 @@
         </p:nvSpPr>
         <p:spPr>
           <a:xfrm>
-            <a:off x="365760" y="868680"/>
-            <a:ext cx="11430000" cy="365760"/>
+            <a:off x="457200" y="1280160"/>
+            <a:ext cx="11247120" cy="2123658"/>
           </a:xfrm>
           <a:prstGeom prst="rect">
             <a:avLst/>
@@ -4110,2109 +4590,258 @@
           <a:p>
             <a:pPr algn="l"/>
             <a:r>
-              <a:rPr sz="1300" b="0">
-                <a:solidFill>
-                  <a:srgbClr val="555555"/>
-                </a:solidFill>
-              </a:rPr>
-              <a:t>Top throughput at each architecture's maximum thread count in scope</a:t>
-            </a:r>
-          </a:p>
-        </p:txBody>
-      </p:sp>
-      <p:graphicFrame>
-        <p:nvGraphicFramePr>
-          <p:cNvPr id="4" name="Table 3"/>
-          <p:cNvGraphicFramePr>
-            <a:graphicFrameLocks noGrp="1"/>
-          </p:cNvGraphicFramePr>
-          <p:nvPr/>
-        </p:nvGraphicFramePr>
-        <p:xfrm>
-          <a:off x="457200" y="1280160"/>
-          <a:ext cx="11247120" cy="4937760"/>
-        </p:xfrm>
-        <a:graphic>
-          <a:graphicData uri="http://schemas.openxmlformats.org/drawingml/2006/table">
-            <a:tbl>
-              <a:tblPr firstRow="1" bandRow="1">
-                <a:tableStyleId>{5C22544A-7EE6-4342-B048-85BDC9FD1C3A}</a:tableStyleId>
-              </a:tblPr>
-              <a:tblGrid>
-                <a:gridCol w="1874520"/>
-                <a:gridCol w="1874520"/>
-                <a:gridCol w="1874520"/>
-                <a:gridCol w="1874520"/>
-                <a:gridCol w="1874520"/>
-                <a:gridCol w="1874520"/>
-              </a:tblGrid>
-              <a:tr h="197510">
-                <a:tc>
-                  <a:txBody>
-                    <a:bodyPr/>
-                    <a:lstStyle/>
-                    <a:p>
-                      <a:r>
-                        <a:rPr sz="1100" b="1"/>
-                        <a:t>Index</a:t>
-                      </a:r>
-                    </a:p>
-                  </a:txBody>
-                  <a:tcPr/>
-                </a:tc>
-                <a:tc>
-                  <a:txBody>
-                    <a:bodyPr/>
-                    <a:lstStyle/>
-                    <a:p>
-                      <a:r>
-                        <a:rPr sz="1100" b="1"/>
-                        <a:t>Architecture</a:t>
-                      </a:r>
-                    </a:p>
-                  </a:txBody>
-                  <a:tcPr/>
-                </a:tc>
-                <a:tc>
-                  <a:txBody>
-                    <a:bodyPr/>
-                    <a:lstStyle/>
-                    <a:p>
-                      <a:r>
-                        <a:rPr sz="1100" b="1"/>
-                        <a:t>Max T</a:t>
-                      </a:r>
-                    </a:p>
-                  </a:txBody>
-                  <a:tcPr/>
-                </a:tc>
-                <a:tc>
-                  <a:txBody>
-                    <a:bodyPr/>
-                    <a:lstStyle/>
-                    <a:p>
-                      <a:r>
-                        <a:rPr sz="1100" b="1"/>
-                        <a:t>Workload</a:t>
-                      </a:r>
-                    </a:p>
-                  </a:txBody>
-                  <a:tcPr/>
-                </a:tc>
-                <a:tc>
-                  <a:txBody>
-                    <a:bodyPr/>
-                    <a:lstStyle/>
-                    <a:p>
-                      <a:r>
-                        <a:rPr sz="1100" b="1"/>
-                        <a:t>Best lock</a:t>
-                      </a:r>
-                    </a:p>
-                  </a:txBody>
-                  <a:tcPr/>
-                </a:tc>
-                <a:tc>
-                  <a:txBody>
-                    <a:bodyPr/>
-                    <a:lstStyle/>
-                    <a:p>
-                      <a:r>
-                        <a:rPr sz="1100" b="1"/>
-                        <a:t>Throughput (M ops per s)</a:t>
-                      </a:r>
-                    </a:p>
-                  </a:txBody>
-                  <a:tcPr/>
-                </a:tc>
-              </a:tr>
-              <a:tr h="197510">
-                <a:tc>
-                  <a:txBody>
-                    <a:bodyPr/>
-                    <a:lstStyle/>
-                    <a:p>
-                      <a:r>
-                        <a:rPr sz="1100" b="0"/>
-                        <a:t>Wormhole</a:t>
-                      </a:r>
-                    </a:p>
-                  </a:txBody>
-                  <a:tcPr/>
-                </a:tc>
-                <a:tc>
-                  <a:txBody>
-                    <a:bodyPr/>
-                    <a:lstStyle/>
-                    <a:p>
-                      <a:r>
-                        <a:rPr sz="1100" b="0"/>
-                        <a:t>graviton</a:t>
-                      </a:r>
-                    </a:p>
-                  </a:txBody>
-                  <a:tcPr/>
-                </a:tc>
-                <a:tc>
-                  <a:txBody>
-                    <a:bodyPr/>
-                    <a:lstStyle/>
-                    <a:p>
-                      <a:r>
-                        <a:rPr sz="1100" b="0"/>
-                        <a:t>8</a:t>
-                      </a:r>
-                    </a:p>
-                  </a:txBody>
-                  <a:tcPr/>
-                </a:tc>
-                <a:tc>
-                  <a:txBody>
-                    <a:bodyPr/>
-                    <a:lstStyle/>
-                    <a:p>
-                      <a:r>
-                        <a:rPr sz="1100" b="0"/>
-                        <a:t>uniform 80/10/10</a:t>
-                      </a:r>
-                    </a:p>
-                  </a:txBody>
-                  <a:tcPr/>
-                </a:tc>
-                <a:tc>
-                  <a:txBody>
-                    <a:bodyPr/>
-                    <a:lstStyle/>
-                    <a:p>
-                      <a:r>
-                        <a:rPr sz="1100" b="0"/>
-                        <a:t>occ-opt</a:t>
-                      </a:r>
-                    </a:p>
-                  </a:txBody>
-                  <a:tcPr/>
-                </a:tc>
-                <a:tc>
-                  <a:txBody>
-                    <a:bodyPr/>
-                    <a:lstStyle/>
-                    <a:p>
-                      <a:r>
-                        <a:rPr sz="1100" b="0"/>
-                        <a:t>32.3</a:t>
-                      </a:r>
-                    </a:p>
-                  </a:txBody>
-                  <a:tcPr/>
-                </a:tc>
-              </a:tr>
-              <a:tr h="197510">
-                <a:tc>
-                  <a:txBody>
-                    <a:bodyPr/>
-                    <a:lstStyle/>
-                    <a:p>
-                      <a:r>
-                        <a:rPr sz="1100" b="0"/>
-                        <a:t>Wormhole</a:t>
-                      </a:r>
-                    </a:p>
-                  </a:txBody>
-                  <a:tcPr/>
-                </a:tc>
-                <a:tc>
-                  <a:txBody>
-                    <a:bodyPr/>
-                    <a:lstStyle/>
-                    <a:p>
-                      <a:r>
-                        <a:rPr sz="1100" b="0"/>
-                        <a:t>graviton</a:t>
-                      </a:r>
-                    </a:p>
-                  </a:txBody>
-                  <a:tcPr/>
-                </a:tc>
-                <a:tc>
-                  <a:txBody>
-                    <a:bodyPr/>
-                    <a:lstStyle/>
-                    <a:p>
-                      <a:r>
-                        <a:rPr sz="1100" b="0"/>
-                        <a:t>8</a:t>
-                      </a:r>
-                    </a:p>
-                  </a:txBody>
-                  <a:tcPr/>
-                </a:tc>
-                <a:tc>
-                  <a:txBody>
-                    <a:bodyPr/>
-                    <a:lstStyle/>
-                    <a:p>
-                      <a:r>
-                        <a:rPr sz="1100" b="0"/>
-                        <a:t>uniform 90/5/5 read heavy</a:t>
-                      </a:r>
-                    </a:p>
-                  </a:txBody>
-                  <a:tcPr/>
-                </a:tc>
-                <a:tc>
-                  <a:txBody>
-                    <a:bodyPr/>
-                    <a:lstStyle/>
-                    <a:p>
-                      <a:r>
-                        <a:rPr sz="1100" b="0"/>
-                        <a:t>tas</a:t>
-                      </a:r>
-                    </a:p>
-                  </a:txBody>
-                  <a:tcPr/>
-                </a:tc>
-                <a:tc>
-                  <a:txBody>
-                    <a:bodyPr/>
-                    <a:lstStyle/>
-                    <a:p>
-                      <a:r>
-                        <a:rPr sz="1100" b="0"/>
-                        <a:t>33.9</a:t>
-                      </a:r>
-                    </a:p>
-                  </a:txBody>
-                  <a:tcPr/>
-                </a:tc>
-              </a:tr>
-              <a:tr h="197510">
-                <a:tc>
-                  <a:txBody>
-                    <a:bodyPr/>
-                    <a:lstStyle/>
-                    <a:p>
-                      <a:r>
-                        <a:rPr sz="1100" b="0"/>
-                        <a:t>Wormhole</a:t>
-                      </a:r>
-                    </a:p>
-                  </a:txBody>
-                  <a:tcPr/>
-                </a:tc>
-                <a:tc>
-                  <a:txBody>
-                    <a:bodyPr/>
-                    <a:lstStyle/>
-                    <a:p>
-                      <a:r>
-                        <a:rPr sz="1100" b="0"/>
-                        <a:t>graviton</a:t>
-                      </a:r>
-                    </a:p>
-                  </a:txBody>
-                  <a:tcPr/>
-                </a:tc>
-                <a:tc>
-                  <a:txBody>
-                    <a:bodyPr/>
-                    <a:lstStyle/>
-                    <a:p>
-                      <a:r>
-                        <a:rPr sz="1100" b="0"/>
-                        <a:t>8</a:t>
-                      </a:r>
-                    </a:p>
-                  </a:txBody>
-                  <a:tcPr/>
-                </a:tc>
-                <a:tc>
-                  <a:txBody>
-                    <a:bodyPr/>
-                    <a:lstStyle/>
-                    <a:p>
-                      <a:r>
-                        <a:rPr sz="1100" b="0"/>
-                        <a:t>zipfian 20/40/40 write heavy</a:t>
-                      </a:r>
-                    </a:p>
-                  </a:txBody>
-                  <a:tcPr/>
-                </a:tc>
-                <a:tc>
-                  <a:txBody>
-                    <a:bodyPr/>
-                    <a:lstStyle/>
-                    <a:p>
-                      <a:r>
-                        <a:rPr sz="1100" b="0"/>
-                        <a:t>tas</a:t>
-                      </a:r>
-                    </a:p>
-                  </a:txBody>
-                  <a:tcPr/>
-                </a:tc>
-                <a:tc>
-                  <a:txBody>
-                    <a:bodyPr/>
-                    <a:lstStyle/>
-                    <a:p>
-                      <a:r>
-                        <a:rPr sz="1100" b="0"/>
-                        <a:t>31.0</a:t>
-                      </a:r>
-                    </a:p>
-                  </a:txBody>
-                  <a:tcPr/>
-                </a:tc>
-              </a:tr>
-              <a:tr h="197510">
-                <a:tc>
-                  <a:txBody>
-                    <a:bodyPr/>
-                    <a:lstStyle/>
-                    <a:p>
-                      <a:r>
-                        <a:rPr sz="1100" b="0"/>
-                        <a:t>Wormhole</a:t>
-                      </a:r>
-                    </a:p>
-                  </a:txBody>
-                  <a:tcPr/>
-                </a:tc>
-                <a:tc>
-                  <a:txBody>
-                    <a:bodyPr/>
-                    <a:lstStyle/>
-                    <a:p>
-                      <a:r>
-                        <a:rPr sz="1100" b="0"/>
-                        <a:t>graviton</a:t>
-                      </a:r>
-                    </a:p>
-                  </a:txBody>
-                  <a:tcPr/>
-                </a:tc>
-                <a:tc>
-                  <a:txBody>
-                    <a:bodyPr/>
-                    <a:lstStyle/>
-                    <a:p>
-                      <a:r>
-                        <a:rPr sz="1100" b="0"/>
-                        <a:t>8</a:t>
-                      </a:r>
-                    </a:p>
-                  </a:txBody>
-                  <a:tcPr/>
-                </a:tc>
-                <a:tc>
-                  <a:txBody>
-                    <a:bodyPr/>
-                    <a:lstStyle/>
-                    <a:p>
-                      <a:r>
-                        <a:rPr sz="1100" b="0"/>
-                        <a:t>zipfian 80/10/10</a:t>
-                      </a:r>
-                    </a:p>
-                  </a:txBody>
-                  <a:tcPr/>
-                </a:tc>
-                <a:tc>
-                  <a:txBody>
-                    <a:bodyPr/>
-                    <a:lstStyle/>
-                    <a:p>
-                      <a:r>
-                        <a:rPr sz="1100" b="0"/>
-                        <a:t>tas</a:t>
-                      </a:r>
-                    </a:p>
-                  </a:txBody>
-                  <a:tcPr/>
-                </a:tc>
-                <a:tc>
-                  <a:txBody>
-                    <a:bodyPr/>
-                    <a:lstStyle/>
-                    <a:p>
-                      <a:r>
-                        <a:rPr sz="1100" b="0"/>
-                        <a:t>39.7</a:t>
-                      </a:r>
-                    </a:p>
-                  </a:txBody>
-                  <a:tcPr/>
-                </a:tc>
-              </a:tr>
-              <a:tr h="197510">
-                <a:tc>
-                  <a:txBody>
-                    <a:bodyPr/>
-                    <a:lstStyle/>
-                    <a:p>
-                      <a:r>
-                        <a:rPr sz="1100" b="0"/>
-                        <a:t>Wormhole</a:t>
-                      </a:r>
-                    </a:p>
-                  </a:txBody>
-                  <a:tcPr/>
-                </a:tc>
-                <a:tc>
-                  <a:txBody>
-                    <a:bodyPr/>
-                    <a:lstStyle/>
-                    <a:p>
-                      <a:r>
-                        <a:rPr sz="1100" b="0"/>
-                        <a:t>xeon</a:t>
-                      </a:r>
-                    </a:p>
-                  </a:txBody>
-                  <a:tcPr/>
-                </a:tc>
-                <a:tc>
-                  <a:txBody>
-                    <a:bodyPr/>
-                    <a:lstStyle/>
-                    <a:p>
-                      <a:r>
-                        <a:rPr sz="1100" b="0"/>
-                        <a:t>16</a:t>
-                      </a:r>
-                    </a:p>
-                  </a:txBody>
-                  <a:tcPr/>
-                </a:tc>
-                <a:tc>
-                  <a:txBody>
-                    <a:bodyPr/>
-                    <a:lstStyle/>
-                    <a:p>
-                      <a:r>
-                        <a:rPr sz="1100" b="0"/>
-                        <a:t>uniform 80/10/10</a:t>
-                      </a:r>
-                    </a:p>
-                  </a:txBody>
-                  <a:tcPr/>
-                </a:tc>
-                <a:tc>
-                  <a:txBody>
-                    <a:bodyPr/>
-                    <a:lstStyle/>
-                    <a:p>
-                      <a:r>
-                        <a:rPr sz="1100" b="0"/>
-                        <a:t>ttas</a:t>
-                      </a:r>
-                    </a:p>
-                  </a:txBody>
-                  <a:tcPr/>
-                </a:tc>
-                <a:tc>
-                  <a:txBody>
-                    <a:bodyPr/>
-                    <a:lstStyle/>
-                    <a:p>
-                      <a:r>
-                        <a:rPr sz="1100" b="0"/>
-                        <a:t>39.0</a:t>
-                      </a:r>
-                    </a:p>
-                  </a:txBody>
-                  <a:tcPr/>
-                </a:tc>
-              </a:tr>
-              <a:tr h="197510">
-                <a:tc>
-                  <a:txBody>
-                    <a:bodyPr/>
-                    <a:lstStyle/>
-                    <a:p>
-                      <a:r>
-                        <a:rPr sz="1100" b="0"/>
-                        <a:t>Wormhole</a:t>
-                      </a:r>
-                    </a:p>
-                  </a:txBody>
-                  <a:tcPr/>
-                </a:tc>
-                <a:tc>
-                  <a:txBody>
-                    <a:bodyPr/>
-                    <a:lstStyle/>
-                    <a:p>
-                      <a:r>
-                        <a:rPr sz="1100" b="0"/>
-                        <a:t>xeon</a:t>
-                      </a:r>
-                    </a:p>
-                  </a:txBody>
-                  <a:tcPr/>
-                </a:tc>
-                <a:tc>
-                  <a:txBody>
-                    <a:bodyPr/>
-                    <a:lstStyle/>
-                    <a:p>
-                      <a:r>
-                        <a:rPr sz="1100" b="0"/>
-                        <a:t>16</a:t>
-                      </a:r>
-                    </a:p>
-                  </a:txBody>
-                  <a:tcPr/>
-                </a:tc>
-                <a:tc>
-                  <a:txBody>
-                    <a:bodyPr/>
-                    <a:lstStyle/>
-                    <a:p>
-                      <a:r>
-                        <a:rPr sz="1100" b="0"/>
-                        <a:t>uniform 90/5/5 read heavy</a:t>
-                      </a:r>
-                    </a:p>
-                  </a:txBody>
-                  <a:tcPr/>
-                </a:tc>
-                <a:tc>
-                  <a:txBody>
-                    <a:bodyPr/>
-                    <a:lstStyle/>
-                    <a:p>
-                      <a:r>
-                        <a:rPr sz="1100" b="0"/>
-                        <a:t>occ-opt</a:t>
-                      </a:r>
-                    </a:p>
-                  </a:txBody>
-                  <a:tcPr/>
-                </a:tc>
-                <a:tc>
-                  <a:txBody>
-                    <a:bodyPr/>
-                    <a:lstStyle/>
-                    <a:p>
-                      <a:r>
-                        <a:rPr sz="1100" b="0"/>
-                        <a:t>43.9</a:t>
-                      </a:r>
-                    </a:p>
-                  </a:txBody>
-                  <a:tcPr/>
-                </a:tc>
-              </a:tr>
-              <a:tr h="197510">
-                <a:tc>
-                  <a:txBody>
-                    <a:bodyPr/>
-                    <a:lstStyle/>
-                    <a:p>
-                      <a:r>
-                        <a:rPr sz="1100" b="0"/>
-                        <a:t>Wormhole</a:t>
-                      </a:r>
-                    </a:p>
-                  </a:txBody>
-                  <a:tcPr/>
-                </a:tc>
-                <a:tc>
-                  <a:txBody>
-                    <a:bodyPr/>
-                    <a:lstStyle/>
-                    <a:p>
-                      <a:r>
-                        <a:rPr sz="1100" b="0"/>
-                        <a:t>xeon</a:t>
-                      </a:r>
-                    </a:p>
-                  </a:txBody>
-                  <a:tcPr/>
-                </a:tc>
-                <a:tc>
-                  <a:txBody>
-                    <a:bodyPr/>
-                    <a:lstStyle/>
-                    <a:p>
-                      <a:r>
-                        <a:rPr sz="1100" b="0"/>
-                        <a:t>16</a:t>
-                      </a:r>
-                    </a:p>
-                  </a:txBody>
-                  <a:tcPr/>
-                </a:tc>
-                <a:tc>
-                  <a:txBody>
-                    <a:bodyPr/>
-                    <a:lstStyle/>
-                    <a:p>
-                      <a:r>
-                        <a:rPr sz="1100" b="0"/>
-                        <a:t>zipfian 20/40/40 write heavy</a:t>
-                      </a:r>
-                    </a:p>
-                  </a:txBody>
-                  <a:tcPr/>
-                </a:tc>
-                <a:tc>
-                  <a:txBody>
-                    <a:bodyPr/>
-                    <a:lstStyle/>
-                    <a:p>
-                      <a:r>
-                        <a:rPr sz="1100" b="0"/>
-                        <a:t>occ-opt</a:t>
-                      </a:r>
-                    </a:p>
-                  </a:txBody>
-                  <a:tcPr/>
-                </a:tc>
-                <a:tc>
-                  <a:txBody>
-                    <a:bodyPr/>
-                    <a:lstStyle/>
-                    <a:p>
-                      <a:r>
-                        <a:rPr sz="1100" b="0"/>
-                        <a:t>22.5</a:t>
-                      </a:r>
-                    </a:p>
-                  </a:txBody>
-                  <a:tcPr/>
-                </a:tc>
-              </a:tr>
-              <a:tr h="197510">
-                <a:tc>
-                  <a:txBody>
-                    <a:bodyPr/>
-                    <a:lstStyle/>
-                    <a:p>
-                      <a:r>
-                        <a:rPr sz="1100" b="0"/>
-                        <a:t>Wormhole</a:t>
-                      </a:r>
-                    </a:p>
-                  </a:txBody>
-                  <a:tcPr/>
-                </a:tc>
-                <a:tc>
-                  <a:txBody>
-                    <a:bodyPr/>
-                    <a:lstStyle/>
-                    <a:p>
-                      <a:r>
-                        <a:rPr sz="1100" b="0"/>
-                        <a:t>xeon</a:t>
-                      </a:r>
-                    </a:p>
-                  </a:txBody>
-                  <a:tcPr/>
-                </a:tc>
-                <a:tc>
-                  <a:txBody>
-                    <a:bodyPr/>
-                    <a:lstStyle/>
-                    <a:p>
-                      <a:r>
-                        <a:rPr sz="1100" b="0"/>
-                        <a:t>16</a:t>
-                      </a:r>
-                    </a:p>
-                  </a:txBody>
-                  <a:tcPr/>
-                </a:tc>
-                <a:tc>
-                  <a:txBody>
-                    <a:bodyPr/>
-                    <a:lstStyle/>
-                    <a:p>
-                      <a:r>
-                        <a:rPr sz="1100" b="0"/>
-                        <a:t>zipfian 80/10/10</a:t>
-                      </a:r>
-                    </a:p>
-                  </a:txBody>
-                  <a:tcPr/>
-                </a:tc>
-                <a:tc>
-                  <a:txBody>
-                    <a:bodyPr/>
-                    <a:lstStyle/>
-                    <a:p>
-                      <a:r>
-                        <a:rPr sz="1100" b="0"/>
-                        <a:t>occ-opt</a:t>
-                      </a:r>
-                    </a:p>
-                  </a:txBody>
-                  <a:tcPr/>
-                </a:tc>
-                <a:tc>
-                  <a:txBody>
-                    <a:bodyPr/>
-                    <a:lstStyle/>
-                    <a:p>
-                      <a:r>
-                        <a:rPr sz="1100" b="0"/>
-                        <a:t>35.0</a:t>
-                      </a:r>
-                    </a:p>
-                  </a:txBody>
-                  <a:tcPr/>
-                </a:tc>
-              </a:tr>
-              <a:tr h="197510">
-                <a:tc>
-                  <a:txBody>
-                    <a:bodyPr/>
-                    <a:lstStyle/>
-                    <a:p>
-                      <a:r>
-                        <a:rPr sz="1100" b="0"/>
-                        <a:t>StripedMap</a:t>
-                      </a:r>
-                    </a:p>
-                  </a:txBody>
-                  <a:tcPr/>
-                </a:tc>
-                <a:tc>
-                  <a:txBody>
-                    <a:bodyPr/>
-                    <a:lstStyle/>
-                    <a:p>
-                      <a:r>
-                        <a:rPr sz="1100" b="0"/>
-                        <a:t>graviton</a:t>
-                      </a:r>
-                    </a:p>
-                  </a:txBody>
-                  <a:tcPr/>
-                </a:tc>
-                <a:tc>
-                  <a:txBody>
-                    <a:bodyPr/>
-                    <a:lstStyle/>
-                    <a:p>
-                      <a:r>
-                        <a:rPr sz="1100" b="0"/>
-                        <a:t>8</a:t>
-                      </a:r>
-                    </a:p>
-                  </a:txBody>
-                  <a:tcPr/>
-                </a:tc>
-                <a:tc>
-                  <a:txBody>
-                    <a:bodyPr/>
-                    <a:lstStyle/>
-                    <a:p>
-                      <a:r>
-                        <a:rPr sz="1100" b="0"/>
-                        <a:t>uniform 80/10/10</a:t>
-                      </a:r>
-                    </a:p>
-                  </a:txBody>
-                  <a:tcPr/>
-                </a:tc>
-                <a:tc>
-                  <a:txBody>
-                    <a:bodyPr/>
-                    <a:lstStyle/>
-                    <a:p>
-                      <a:r>
-                        <a:rPr sz="1100" b="0"/>
-                        <a:t>ttas</a:t>
-                      </a:r>
-                    </a:p>
-                  </a:txBody>
-                  <a:tcPr/>
-                </a:tc>
-                <a:tc>
-                  <a:txBody>
-                    <a:bodyPr/>
-                    <a:lstStyle/>
-                    <a:p>
-                      <a:r>
-                        <a:rPr sz="1100" b="0"/>
-                        <a:t>32.8</a:t>
-                      </a:r>
-                    </a:p>
-                  </a:txBody>
-                  <a:tcPr/>
-                </a:tc>
-              </a:tr>
-              <a:tr h="197510">
-                <a:tc>
-                  <a:txBody>
-                    <a:bodyPr/>
-                    <a:lstStyle/>
-                    <a:p>
-                      <a:r>
-                        <a:rPr sz="1100" b="0"/>
-                        <a:t>StripedMap</a:t>
-                      </a:r>
-                    </a:p>
-                  </a:txBody>
-                  <a:tcPr/>
-                </a:tc>
-                <a:tc>
-                  <a:txBody>
-                    <a:bodyPr/>
-                    <a:lstStyle/>
-                    <a:p>
-                      <a:r>
-                        <a:rPr sz="1100" b="0"/>
-                        <a:t>graviton</a:t>
-                      </a:r>
-                    </a:p>
-                  </a:txBody>
-                  <a:tcPr/>
-                </a:tc>
-                <a:tc>
-                  <a:txBody>
-                    <a:bodyPr/>
-                    <a:lstStyle/>
-                    <a:p>
-                      <a:r>
-                        <a:rPr sz="1100" b="0"/>
-                        <a:t>8</a:t>
-                      </a:r>
-                    </a:p>
-                  </a:txBody>
-                  <a:tcPr/>
-                </a:tc>
-                <a:tc>
-                  <a:txBody>
-                    <a:bodyPr/>
-                    <a:lstStyle/>
-                    <a:p>
-                      <a:r>
-                        <a:rPr sz="1100" b="0"/>
-                        <a:t>uniform 90/5/5 read heavy</a:t>
-                      </a:r>
-                    </a:p>
-                  </a:txBody>
-                  <a:tcPr/>
-                </a:tc>
-                <a:tc>
-                  <a:txBody>
-                    <a:bodyPr/>
-                    <a:lstStyle/>
-                    <a:p>
-                      <a:r>
-                        <a:rPr sz="1100" b="0"/>
-                        <a:t>ttas</a:t>
-                      </a:r>
-                    </a:p>
-                  </a:txBody>
-                  <a:tcPr/>
-                </a:tc>
-                <a:tc>
-                  <a:txBody>
-                    <a:bodyPr/>
-                    <a:lstStyle/>
-                    <a:p>
-                      <a:r>
-                        <a:rPr sz="1100" b="0"/>
-                        <a:t>42.2</a:t>
-                      </a:r>
-                    </a:p>
-                  </a:txBody>
-                  <a:tcPr/>
-                </a:tc>
-              </a:tr>
-              <a:tr h="197510">
-                <a:tc>
-                  <a:txBody>
-                    <a:bodyPr/>
-                    <a:lstStyle/>
-                    <a:p>
-                      <a:r>
-                        <a:rPr sz="1100" b="0"/>
-                        <a:t>StripedMap</a:t>
-                      </a:r>
-                    </a:p>
-                  </a:txBody>
-                  <a:tcPr/>
-                </a:tc>
-                <a:tc>
-                  <a:txBody>
-                    <a:bodyPr/>
-                    <a:lstStyle/>
-                    <a:p>
-                      <a:r>
-                        <a:rPr sz="1100" b="0"/>
-                        <a:t>graviton</a:t>
-                      </a:r>
-                    </a:p>
-                  </a:txBody>
-                  <a:tcPr/>
-                </a:tc>
-                <a:tc>
-                  <a:txBody>
-                    <a:bodyPr/>
-                    <a:lstStyle/>
-                    <a:p>
-                      <a:r>
-                        <a:rPr sz="1100" b="0"/>
-                        <a:t>8</a:t>
-                      </a:r>
-                    </a:p>
-                  </a:txBody>
-                  <a:tcPr/>
-                </a:tc>
-                <a:tc>
-                  <a:txBody>
-                    <a:bodyPr/>
-                    <a:lstStyle/>
-                    <a:p>
-                      <a:r>
-                        <a:rPr sz="1100" b="0"/>
-                        <a:t>zipfian 20/40/40 write heavy</a:t>
-                      </a:r>
-                    </a:p>
-                  </a:txBody>
-                  <a:tcPr/>
-                </a:tc>
-                <a:tc>
-                  <a:txBody>
-                    <a:bodyPr/>
-                    <a:lstStyle/>
-                    <a:p>
-                      <a:r>
-                        <a:rPr sz="1100" b="0"/>
-                        <a:t>cas</a:t>
-                      </a:r>
-                    </a:p>
-                  </a:txBody>
-                  <a:tcPr/>
-                </a:tc>
-                <a:tc>
-                  <a:txBody>
-                    <a:bodyPr/>
-                    <a:lstStyle/>
-                    <a:p>
-                      <a:r>
-                        <a:rPr sz="1100" b="0"/>
-                        <a:t>21.0</a:t>
-                      </a:r>
-                    </a:p>
-                  </a:txBody>
-                  <a:tcPr/>
-                </a:tc>
-              </a:tr>
-              <a:tr h="197510">
-                <a:tc>
-                  <a:txBody>
-                    <a:bodyPr/>
-                    <a:lstStyle/>
-                    <a:p>
-                      <a:r>
-                        <a:rPr sz="1100" b="0"/>
-                        <a:t>StripedMap</a:t>
-                      </a:r>
-                    </a:p>
-                  </a:txBody>
-                  <a:tcPr/>
-                </a:tc>
-                <a:tc>
-                  <a:txBody>
-                    <a:bodyPr/>
-                    <a:lstStyle/>
-                    <a:p>
-                      <a:r>
-                        <a:rPr sz="1100" b="0"/>
-                        <a:t>graviton</a:t>
-                      </a:r>
-                    </a:p>
-                  </a:txBody>
-                  <a:tcPr/>
-                </a:tc>
-                <a:tc>
-                  <a:txBody>
-                    <a:bodyPr/>
-                    <a:lstStyle/>
-                    <a:p>
-                      <a:r>
-                        <a:rPr sz="1100" b="0"/>
-                        <a:t>8</a:t>
-                      </a:r>
-                    </a:p>
-                  </a:txBody>
-                  <a:tcPr/>
-                </a:tc>
-                <a:tc>
-                  <a:txBody>
-                    <a:bodyPr/>
-                    <a:lstStyle/>
-                    <a:p>
-                      <a:r>
-                        <a:rPr sz="1100" b="0"/>
-                        <a:t>zipfian 80/10/10</a:t>
-                      </a:r>
-                    </a:p>
-                  </a:txBody>
-                  <a:tcPr/>
-                </a:tc>
-                <a:tc>
-                  <a:txBody>
-                    <a:bodyPr/>
-                    <a:lstStyle/>
-                    <a:p>
-                      <a:r>
-                        <a:rPr sz="1100" b="0"/>
-                        <a:t>tas</a:t>
-                      </a:r>
-                    </a:p>
-                  </a:txBody>
-                  <a:tcPr/>
-                </a:tc>
-                <a:tc>
-                  <a:txBody>
-                    <a:bodyPr/>
-                    <a:lstStyle/>
-                    <a:p>
-                      <a:r>
-                        <a:rPr sz="1100" b="0"/>
-                        <a:t>32.0</a:t>
-                      </a:r>
-                    </a:p>
-                  </a:txBody>
-                  <a:tcPr/>
-                </a:tc>
-              </a:tr>
-              <a:tr h="197510">
-                <a:tc>
-                  <a:txBody>
-                    <a:bodyPr/>
-                    <a:lstStyle/>
-                    <a:p>
-                      <a:r>
-                        <a:rPr sz="1100" b="0"/>
-                        <a:t>StripedMap</a:t>
-                      </a:r>
-                    </a:p>
-                  </a:txBody>
-                  <a:tcPr/>
-                </a:tc>
-                <a:tc>
-                  <a:txBody>
-                    <a:bodyPr/>
-                    <a:lstStyle/>
-                    <a:p>
-                      <a:r>
-                        <a:rPr sz="1100" b="0"/>
-                        <a:t>xeon</a:t>
-                      </a:r>
-                    </a:p>
-                  </a:txBody>
-                  <a:tcPr/>
-                </a:tc>
-                <a:tc>
-                  <a:txBody>
-                    <a:bodyPr/>
-                    <a:lstStyle/>
-                    <a:p>
-                      <a:r>
-                        <a:rPr sz="1100" b="0"/>
-                        <a:t>16</a:t>
-                      </a:r>
-                    </a:p>
-                  </a:txBody>
-                  <a:tcPr/>
-                </a:tc>
-                <a:tc>
-                  <a:txBody>
-                    <a:bodyPr/>
-                    <a:lstStyle/>
-                    <a:p>
-                      <a:r>
-                        <a:rPr sz="1100" b="0"/>
-                        <a:t>uniform 80/10/10</a:t>
-                      </a:r>
-                    </a:p>
-                  </a:txBody>
-                  <a:tcPr/>
-                </a:tc>
-                <a:tc>
-                  <a:txBody>
-                    <a:bodyPr/>
-                    <a:lstStyle/>
-                    <a:p>
-                      <a:r>
-                        <a:rPr sz="1100" b="0"/>
-                        <a:t>tas</a:t>
-                      </a:r>
-                    </a:p>
-                  </a:txBody>
-                  <a:tcPr/>
-                </a:tc>
-                <a:tc>
-                  <a:txBody>
-                    <a:bodyPr/>
-                    <a:lstStyle/>
-                    <a:p>
-                      <a:r>
-                        <a:rPr sz="1100" b="0"/>
-                        <a:t>18.4</a:t>
-                      </a:r>
-                    </a:p>
-                  </a:txBody>
-                  <a:tcPr/>
-                </a:tc>
-              </a:tr>
-              <a:tr h="197510">
-                <a:tc>
-                  <a:txBody>
-                    <a:bodyPr/>
-                    <a:lstStyle/>
-                    <a:p>
-                      <a:r>
-                        <a:rPr sz="1100" b="0"/>
-                        <a:t>StripedMap</a:t>
-                      </a:r>
-                    </a:p>
-                  </a:txBody>
-                  <a:tcPr/>
-                </a:tc>
-                <a:tc>
-                  <a:txBody>
-                    <a:bodyPr/>
-                    <a:lstStyle/>
-                    <a:p>
-                      <a:r>
-                        <a:rPr sz="1100" b="0"/>
-                        <a:t>xeon</a:t>
-                      </a:r>
-                    </a:p>
-                  </a:txBody>
-                  <a:tcPr/>
-                </a:tc>
-                <a:tc>
-                  <a:txBody>
-                    <a:bodyPr/>
-                    <a:lstStyle/>
-                    <a:p>
-                      <a:r>
-                        <a:rPr sz="1100" b="0"/>
-                        <a:t>16</a:t>
-                      </a:r>
-                    </a:p>
-                  </a:txBody>
-                  <a:tcPr/>
-                </a:tc>
-                <a:tc>
-                  <a:txBody>
-                    <a:bodyPr/>
-                    <a:lstStyle/>
-                    <a:p>
-                      <a:r>
-                        <a:rPr sz="1100" b="0"/>
-                        <a:t>uniform 90/5/5 read heavy</a:t>
-                      </a:r>
-                    </a:p>
-                  </a:txBody>
-                  <a:tcPr/>
-                </a:tc>
-                <a:tc>
-                  <a:txBody>
-                    <a:bodyPr/>
-                    <a:lstStyle/>
-                    <a:p>
-                      <a:r>
-                        <a:rPr sz="1100" b="0"/>
-                        <a:t>ticket</a:t>
-                      </a:r>
-                    </a:p>
-                  </a:txBody>
-                  <a:tcPr/>
-                </a:tc>
-                <a:tc>
-                  <a:txBody>
-                    <a:bodyPr/>
-                    <a:lstStyle/>
-                    <a:p>
-                      <a:r>
-                        <a:rPr sz="1100" b="0"/>
-                        <a:t>26.0</a:t>
-                      </a:r>
-                    </a:p>
-                  </a:txBody>
-                  <a:tcPr/>
-                </a:tc>
-              </a:tr>
-              <a:tr h="197510">
-                <a:tc>
-                  <a:txBody>
-                    <a:bodyPr/>
-                    <a:lstStyle/>
-                    <a:p>
-                      <a:r>
-                        <a:rPr sz="1100" b="0"/>
-                        <a:t>StripedMap</a:t>
-                      </a:r>
-                    </a:p>
-                  </a:txBody>
-                  <a:tcPr/>
-                </a:tc>
-                <a:tc>
-                  <a:txBody>
-                    <a:bodyPr/>
-                    <a:lstStyle/>
-                    <a:p>
-                      <a:r>
-                        <a:rPr sz="1100" b="0"/>
-                        <a:t>xeon</a:t>
-                      </a:r>
-                    </a:p>
-                  </a:txBody>
-                  <a:tcPr/>
-                </a:tc>
-                <a:tc>
-                  <a:txBody>
-                    <a:bodyPr/>
-                    <a:lstStyle/>
-                    <a:p>
-                      <a:r>
-                        <a:rPr sz="1100" b="0"/>
-                        <a:t>16</a:t>
-                      </a:r>
-                    </a:p>
-                  </a:txBody>
-                  <a:tcPr/>
-                </a:tc>
-                <a:tc>
-                  <a:txBody>
-                    <a:bodyPr/>
-                    <a:lstStyle/>
-                    <a:p>
-                      <a:r>
-                        <a:rPr sz="1100" b="0"/>
-                        <a:t>zipfian 20/40/40 write heavy</a:t>
-                      </a:r>
-                    </a:p>
-                  </a:txBody>
-                  <a:tcPr/>
-                </a:tc>
-                <a:tc>
-                  <a:txBody>
-                    <a:bodyPr/>
-                    <a:lstStyle/>
-                    <a:p>
-                      <a:r>
-                        <a:rPr sz="1100" b="0"/>
-                        <a:t>tas</a:t>
-                      </a:r>
-                    </a:p>
-                  </a:txBody>
-                  <a:tcPr/>
-                </a:tc>
-                <a:tc>
-                  <a:txBody>
-                    <a:bodyPr/>
-                    <a:lstStyle/>
-                    <a:p>
-                      <a:r>
-                        <a:rPr sz="1100" b="0"/>
-                        <a:t>6.9</a:t>
-                      </a:r>
-                    </a:p>
-                  </a:txBody>
-                  <a:tcPr/>
-                </a:tc>
-              </a:tr>
-              <a:tr h="197510">
-                <a:tc>
-                  <a:txBody>
-                    <a:bodyPr/>
-                    <a:lstStyle/>
-                    <a:p>
-                      <a:r>
-                        <a:rPr sz="1100" b="0"/>
-                        <a:t>StripedMap</a:t>
-                      </a:r>
-                    </a:p>
-                  </a:txBody>
-                  <a:tcPr/>
-                </a:tc>
-                <a:tc>
-                  <a:txBody>
-                    <a:bodyPr/>
-                    <a:lstStyle/>
-                    <a:p>
-                      <a:r>
-                        <a:rPr sz="1100" b="0"/>
-                        <a:t>xeon</a:t>
-                      </a:r>
-                    </a:p>
-                  </a:txBody>
-                  <a:tcPr/>
-                </a:tc>
-                <a:tc>
-                  <a:txBody>
-                    <a:bodyPr/>
-                    <a:lstStyle/>
-                    <a:p>
-                      <a:r>
-                        <a:rPr sz="1100" b="0"/>
-                        <a:t>16</a:t>
-                      </a:r>
-                    </a:p>
-                  </a:txBody>
-                  <a:tcPr/>
-                </a:tc>
-                <a:tc>
-                  <a:txBody>
-                    <a:bodyPr/>
-                    <a:lstStyle/>
-                    <a:p>
-                      <a:r>
-                        <a:rPr sz="1100" b="0"/>
-                        <a:t>zipfian 80/10/10</a:t>
-                      </a:r>
-                    </a:p>
-                  </a:txBody>
-                  <a:tcPr/>
-                </a:tc>
-                <a:tc>
-                  <a:txBody>
-                    <a:bodyPr/>
-                    <a:lstStyle/>
-                    <a:p>
-                      <a:r>
-                        <a:rPr sz="1100" b="0"/>
-                        <a:t>cas</a:t>
-                      </a:r>
-                    </a:p>
-                  </a:txBody>
-                  <a:tcPr/>
-                </a:tc>
-                <a:tc>
-                  <a:txBody>
-                    <a:bodyPr/>
-                    <a:lstStyle/>
-                    <a:p>
-                      <a:r>
-                        <a:rPr sz="1100" b="0"/>
-                        <a:t>13.6</a:t>
-                      </a:r>
-                    </a:p>
-                  </a:txBody>
-                  <a:tcPr/>
-                </a:tc>
-              </a:tr>
-              <a:tr h="197510">
-                <a:tc>
-                  <a:txBody>
-                    <a:bodyPr/>
-                    <a:lstStyle/>
-                    <a:p>
-                      <a:r>
-                        <a:rPr sz="1100" b="0"/>
-                        <a:t>BronsonAVL</a:t>
-                      </a:r>
-                    </a:p>
-                  </a:txBody>
-                  <a:tcPr/>
-                </a:tc>
-                <a:tc>
-                  <a:txBody>
-                    <a:bodyPr/>
-                    <a:lstStyle/>
-                    <a:p>
-                      <a:r>
-                        <a:rPr sz="1100" b="0"/>
-                        <a:t>graviton</a:t>
-                      </a:r>
-                    </a:p>
-                  </a:txBody>
-                  <a:tcPr/>
-                </a:tc>
-                <a:tc>
-                  <a:txBody>
-                    <a:bodyPr/>
-                    <a:lstStyle/>
-                    <a:p>
-                      <a:r>
-                        <a:rPr sz="1100" b="0"/>
-                        <a:t>8</a:t>
-                      </a:r>
-                    </a:p>
-                  </a:txBody>
-                  <a:tcPr/>
-                </a:tc>
-                <a:tc>
-                  <a:txBody>
-                    <a:bodyPr/>
-                    <a:lstStyle/>
-                    <a:p>
-                      <a:r>
-                        <a:rPr sz="1100" b="0"/>
-                        <a:t>uniform 80/10/10</a:t>
-                      </a:r>
-                    </a:p>
-                  </a:txBody>
-                  <a:tcPr/>
-                </a:tc>
-                <a:tc>
-                  <a:txBody>
-                    <a:bodyPr/>
-                    <a:lstStyle/>
-                    <a:p>
-                      <a:r>
-                        <a:rPr sz="1100" b="0"/>
-                        <a:t>cas</a:t>
-                      </a:r>
-                    </a:p>
-                  </a:txBody>
-                  <a:tcPr/>
-                </a:tc>
-                <a:tc>
-                  <a:txBody>
-                    <a:bodyPr/>
-                    <a:lstStyle/>
-                    <a:p>
-                      <a:r>
-                        <a:rPr sz="1100" b="0"/>
-                        <a:t>9.8</a:t>
-                      </a:r>
-                    </a:p>
-                  </a:txBody>
-                  <a:tcPr/>
-                </a:tc>
-              </a:tr>
-              <a:tr h="197510">
-                <a:tc>
-                  <a:txBody>
-                    <a:bodyPr/>
-                    <a:lstStyle/>
-                    <a:p>
-                      <a:r>
-                        <a:rPr sz="1100" b="0"/>
-                        <a:t>BronsonAVL</a:t>
-                      </a:r>
-                    </a:p>
-                  </a:txBody>
-                  <a:tcPr/>
-                </a:tc>
-                <a:tc>
-                  <a:txBody>
-                    <a:bodyPr/>
-                    <a:lstStyle/>
-                    <a:p>
-                      <a:r>
-                        <a:rPr sz="1100" b="0"/>
-                        <a:t>graviton</a:t>
-                      </a:r>
-                    </a:p>
-                  </a:txBody>
-                  <a:tcPr/>
-                </a:tc>
-                <a:tc>
-                  <a:txBody>
-                    <a:bodyPr/>
-                    <a:lstStyle/>
-                    <a:p>
-                      <a:r>
-                        <a:rPr sz="1100" b="0"/>
-                        <a:t>8</a:t>
-                      </a:r>
-                    </a:p>
-                  </a:txBody>
-                  <a:tcPr/>
-                </a:tc>
-                <a:tc>
-                  <a:txBody>
-                    <a:bodyPr/>
-                    <a:lstStyle/>
-                    <a:p>
-                      <a:r>
-                        <a:rPr sz="1100" b="0"/>
-                        <a:t>uniform 90/5/5 read heavy</a:t>
-                      </a:r>
-                    </a:p>
-                  </a:txBody>
-                  <a:tcPr/>
-                </a:tc>
-                <a:tc>
-                  <a:txBody>
-                    <a:bodyPr/>
-                    <a:lstStyle/>
-                    <a:p>
-                      <a:r>
-                        <a:rPr sz="1100" b="0"/>
-                        <a:t>ttas</a:t>
-                      </a:r>
-                    </a:p>
-                  </a:txBody>
-                  <a:tcPr/>
-                </a:tc>
-                <a:tc>
-                  <a:txBody>
-                    <a:bodyPr/>
-                    <a:lstStyle/>
-                    <a:p>
-                      <a:r>
-                        <a:rPr sz="1100" b="0"/>
-                        <a:t>11.0</a:t>
-                      </a:r>
-                    </a:p>
-                  </a:txBody>
-                  <a:tcPr/>
-                </a:tc>
-              </a:tr>
-              <a:tr h="197510">
-                <a:tc>
-                  <a:txBody>
-                    <a:bodyPr/>
-                    <a:lstStyle/>
-                    <a:p>
-                      <a:r>
-                        <a:rPr sz="1100" b="0"/>
-                        <a:t>BronsonAVL</a:t>
-                      </a:r>
-                    </a:p>
-                  </a:txBody>
-                  <a:tcPr/>
-                </a:tc>
-                <a:tc>
-                  <a:txBody>
-                    <a:bodyPr/>
-                    <a:lstStyle/>
-                    <a:p>
-                      <a:r>
-                        <a:rPr sz="1100" b="0"/>
-                        <a:t>graviton</a:t>
-                      </a:r>
-                    </a:p>
-                  </a:txBody>
-                  <a:tcPr/>
-                </a:tc>
-                <a:tc>
-                  <a:txBody>
-                    <a:bodyPr/>
-                    <a:lstStyle/>
-                    <a:p>
-                      <a:r>
-                        <a:rPr sz="1100" b="0"/>
-                        <a:t>8</a:t>
-                      </a:r>
-                    </a:p>
-                  </a:txBody>
-                  <a:tcPr/>
-                </a:tc>
-                <a:tc>
-                  <a:txBody>
-                    <a:bodyPr/>
-                    <a:lstStyle/>
-                    <a:p>
-                      <a:r>
-                        <a:rPr sz="1100" b="0"/>
-                        <a:t>zipfian 20/40/40 write heavy</a:t>
-                      </a:r>
-                    </a:p>
-                  </a:txBody>
-                  <a:tcPr/>
-                </a:tc>
-                <a:tc>
-                  <a:txBody>
-                    <a:bodyPr/>
-                    <a:lstStyle/>
-                    <a:p>
-                      <a:r>
-                        <a:rPr sz="1100" b="0"/>
-                        <a:t>cas</a:t>
-                      </a:r>
-                    </a:p>
-                  </a:txBody>
-                  <a:tcPr/>
-                </a:tc>
-                <a:tc>
-                  <a:txBody>
-                    <a:bodyPr/>
-                    <a:lstStyle/>
-                    <a:p>
-                      <a:r>
-                        <a:rPr sz="1100" b="0"/>
-                        <a:t>8.6</a:t>
-                      </a:r>
-                    </a:p>
-                  </a:txBody>
-                  <a:tcPr/>
-                </a:tc>
-              </a:tr>
-              <a:tr h="197510">
-                <a:tc>
-                  <a:txBody>
-                    <a:bodyPr/>
-                    <a:lstStyle/>
-                    <a:p>
-                      <a:r>
-                        <a:rPr sz="1100" b="0"/>
-                        <a:t>BronsonAVL</a:t>
-                      </a:r>
-                    </a:p>
-                  </a:txBody>
-                  <a:tcPr/>
-                </a:tc>
-                <a:tc>
-                  <a:txBody>
-                    <a:bodyPr/>
-                    <a:lstStyle/>
-                    <a:p>
-                      <a:r>
-                        <a:rPr sz="1100" b="0"/>
-                        <a:t>graviton</a:t>
-                      </a:r>
-                    </a:p>
-                  </a:txBody>
-                  <a:tcPr/>
-                </a:tc>
-                <a:tc>
-                  <a:txBody>
-                    <a:bodyPr/>
-                    <a:lstStyle/>
-                    <a:p>
-                      <a:r>
-                        <a:rPr sz="1100" b="0"/>
-                        <a:t>8</a:t>
-                      </a:r>
-                    </a:p>
-                  </a:txBody>
-                  <a:tcPr/>
-                </a:tc>
-                <a:tc>
-                  <a:txBody>
-                    <a:bodyPr/>
-                    <a:lstStyle/>
-                    <a:p>
-                      <a:r>
-                        <a:rPr sz="1100" b="0"/>
-                        <a:t>zipfian 80/10/10</a:t>
-                      </a:r>
-                    </a:p>
-                  </a:txBody>
-                  <a:tcPr/>
-                </a:tc>
-                <a:tc>
-                  <a:txBody>
-                    <a:bodyPr/>
-                    <a:lstStyle/>
-                    <a:p>
-                      <a:r>
-                        <a:rPr sz="1100" b="0"/>
-                        <a:t>ttas</a:t>
-                      </a:r>
-                    </a:p>
-                  </a:txBody>
-                  <a:tcPr/>
-                </a:tc>
-                <a:tc>
-                  <a:txBody>
-                    <a:bodyPr/>
-                    <a:lstStyle/>
-                    <a:p>
-                      <a:r>
-                        <a:rPr sz="1100" b="0"/>
-                        <a:t>13.9</a:t>
-                      </a:r>
-                    </a:p>
-                  </a:txBody>
-                  <a:tcPr/>
-                </a:tc>
-              </a:tr>
-              <a:tr h="197510">
-                <a:tc>
-                  <a:txBody>
-                    <a:bodyPr/>
-                    <a:lstStyle/>
-                    <a:p>
-                      <a:r>
-                        <a:rPr sz="1100" b="0"/>
-                        <a:t>BronsonAVL</a:t>
-                      </a:r>
-                    </a:p>
-                  </a:txBody>
-                  <a:tcPr/>
-                </a:tc>
-                <a:tc>
-                  <a:txBody>
-                    <a:bodyPr/>
-                    <a:lstStyle/>
-                    <a:p>
-                      <a:r>
-                        <a:rPr sz="1100" b="0"/>
-                        <a:t>xeon</a:t>
-                      </a:r>
-                    </a:p>
-                  </a:txBody>
-                  <a:tcPr/>
-                </a:tc>
-                <a:tc>
-                  <a:txBody>
-                    <a:bodyPr/>
-                    <a:lstStyle/>
-                    <a:p>
-                      <a:r>
-                        <a:rPr sz="1100" b="0"/>
-                        <a:t>16</a:t>
-                      </a:r>
-                    </a:p>
-                  </a:txBody>
-                  <a:tcPr/>
-                </a:tc>
-                <a:tc>
-                  <a:txBody>
-                    <a:bodyPr/>
-                    <a:lstStyle/>
-                    <a:p>
-                      <a:r>
-                        <a:rPr sz="1100" b="0"/>
-                        <a:t>uniform 80/10/10</a:t>
-                      </a:r>
-                    </a:p>
-                  </a:txBody>
-                  <a:tcPr/>
-                </a:tc>
-                <a:tc>
-                  <a:txBody>
-                    <a:bodyPr/>
-                    <a:lstStyle/>
-                    <a:p>
-                      <a:r>
-                        <a:rPr sz="1100" b="0"/>
-                        <a:t>tas</a:t>
-                      </a:r>
-                    </a:p>
-                  </a:txBody>
-                  <a:tcPr/>
-                </a:tc>
-                <a:tc>
-                  <a:txBody>
-                    <a:bodyPr/>
-                    <a:lstStyle/>
-                    <a:p>
-                      <a:r>
-                        <a:rPr sz="1100" b="0"/>
-                        <a:t>13.3</a:t>
-                      </a:r>
-                    </a:p>
-                  </a:txBody>
-                  <a:tcPr/>
-                </a:tc>
-              </a:tr>
-              <a:tr h="197510">
-                <a:tc>
-                  <a:txBody>
-                    <a:bodyPr/>
-                    <a:lstStyle/>
-                    <a:p>
-                      <a:r>
-                        <a:rPr sz="1100" b="0"/>
-                        <a:t>BronsonAVL</a:t>
-                      </a:r>
-                    </a:p>
-                  </a:txBody>
-                  <a:tcPr/>
-                </a:tc>
-                <a:tc>
-                  <a:txBody>
-                    <a:bodyPr/>
-                    <a:lstStyle/>
-                    <a:p>
-                      <a:r>
-                        <a:rPr sz="1100" b="0"/>
-                        <a:t>xeon</a:t>
-                      </a:r>
-                    </a:p>
-                  </a:txBody>
-                  <a:tcPr/>
-                </a:tc>
-                <a:tc>
-                  <a:txBody>
-                    <a:bodyPr/>
-                    <a:lstStyle/>
-                    <a:p>
-                      <a:r>
-                        <a:rPr sz="1100" b="0"/>
-                        <a:t>16</a:t>
-                      </a:r>
-                    </a:p>
-                  </a:txBody>
-                  <a:tcPr/>
-                </a:tc>
-                <a:tc>
-                  <a:txBody>
-                    <a:bodyPr/>
-                    <a:lstStyle/>
-                    <a:p>
-                      <a:r>
-                        <a:rPr sz="1100" b="0"/>
-                        <a:t>uniform 90/5/5 read heavy</a:t>
-                      </a:r>
-                    </a:p>
-                  </a:txBody>
-                  <a:tcPr/>
-                </a:tc>
-                <a:tc>
-                  <a:txBody>
-                    <a:bodyPr/>
-                    <a:lstStyle/>
-                    <a:p>
-                      <a:r>
-                        <a:rPr sz="1100" b="0"/>
-                        <a:t>tas</a:t>
-                      </a:r>
-                    </a:p>
-                  </a:txBody>
-                  <a:tcPr/>
-                </a:tc>
-                <a:tc>
-                  <a:txBody>
-                    <a:bodyPr/>
-                    <a:lstStyle/>
-                    <a:p>
-                      <a:r>
-                        <a:rPr sz="1100" b="0"/>
-                        <a:t>16.6</a:t>
-                      </a:r>
-                    </a:p>
-                  </a:txBody>
-                  <a:tcPr/>
-                </a:tc>
-              </a:tr>
-              <a:tr h="197510">
-                <a:tc>
-                  <a:txBody>
-                    <a:bodyPr/>
-                    <a:lstStyle/>
-                    <a:p>
-                      <a:r>
-                        <a:rPr sz="1100" b="0"/>
-                        <a:t>BronsonAVL</a:t>
-                      </a:r>
-                    </a:p>
-                  </a:txBody>
-                  <a:tcPr/>
-                </a:tc>
-                <a:tc>
-                  <a:txBody>
-                    <a:bodyPr/>
-                    <a:lstStyle/>
-                    <a:p>
-                      <a:r>
-                        <a:rPr sz="1100" b="0"/>
-                        <a:t>xeon</a:t>
-                      </a:r>
-                    </a:p>
-                  </a:txBody>
-                  <a:tcPr/>
-                </a:tc>
-                <a:tc>
-                  <a:txBody>
-                    <a:bodyPr/>
-                    <a:lstStyle/>
-                    <a:p>
-                      <a:r>
-                        <a:rPr sz="1100" b="0"/>
-                        <a:t>16</a:t>
-                      </a:r>
-                    </a:p>
-                  </a:txBody>
-                  <a:tcPr/>
-                </a:tc>
-                <a:tc>
-                  <a:txBody>
-                    <a:bodyPr/>
-                    <a:lstStyle/>
-                    <a:p>
-                      <a:r>
-                        <a:rPr sz="1100" b="0"/>
-                        <a:t>zipfian 20/40/40 write heavy</a:t>
-                      </a:r>
-                    </a:p>
-                  </a:txBody>
-                  <a:tcPr/>
-                </a:tc>
-                <a:tc>
-                  <a:txBody>
-                    <a:bodyPr/>
-                    <a:lstStyle/>
-                    <a:p>
-                      <a:r>
-                        <a:rPr sz="1100" b="0"/>
-                        <a:t>ticket</a:t>
-                      </a:r>
-                    </a:p>
-                  </a:txBody>
-                  <a:tcPr/>
-                </a:tc>
-                <a:tc>
-                  <a:txBody>
-                    <a:bodyPr/>
-                    <a:lstStyle/>
-                    <a:p>
-                      <a:r>
-                        <a:rPr sz="1100" b="0"/>
-                        <a:t>3.4</a:t>
-                      </a:r>
-                    </a:p>
-                  </a:txBody>
-                  <a:tcPr/>
-                </a:tc>
-              </a:tr>
-              <a:tr h="197520">
-                <a:tc>
-                  <a:txBody>
-                    <a:bodyPr/>
-                    <a:lstStyle/>
-                    <a:p>
-                      <a:r>
-                        <a:rPr sz="1100" b="0"/>
-                        <a:t>BronsonAVL</a:t>
-                      </a:r>
-                    </a:p>
-                  </a:txBody>
-                  <a:tcPr/>
-                </a:tc>
-                <a:tc>
-                  <a:txBody>
-                    <a:bodyPr/>
-                    <a:lstStyle/>
-                    <a:p>
-                      <a:r>
-                        <a:rPr sz="1100" b="0"/>
-                        <a:t>xeon</a:t>
-                      </a:r>
-                    </a:p>
-                  </a:txBody>
-                  <a:tcPr/>
-                </a:tc>
-                <a:tc>
-                  <a:txBody>
-                    <a:bodyPr/>
-                    <a:lstStyle/>
-                    <a:p>
-                      <a:r>
-                        <a:rPr sz="1100" b="0"/>
-                        <a:t>16</a:t>
-                      </a:r>
-                    </a:p>
-                  </a:txBody>
-                  <a:tcPr/>
-                </a:tc>
-                <a:tc>
-                  <a:txBody>
-                    <a:bodyPr/>
-                    <a:lstStyle/>
-                    <a:p>
-                      <a:r>
-                        <a:rPr sz="1100" b="0"/>
-                        <a:t>zipfian 80/10/10</a:t>
-                      </a:r>
-                    </a:p>
-                  </a:txBody>
-                  <a:tcPr/>
-                </a:tc>
-                <a:tc>
-                  <a:txBody>
-                    <a:bodyPr/>
-                    <a:lstStyle/>
-                    <a:p>
-                      <a:r>
-                        <a:rPr sz="1100" b="0"/>
-                        <a:t>tas</a:t>
-                      </a:r>
-                    </a:p>
-                  </a:txBody>
-                  <a:tcPr/>
-                </a:tc>
-                <a:tc>
-                  <a:txBody>
-                    <a:bodyPr/>
-                    <a:lstStyle/>
-                    <a:p>
-                      <a:r>
-                        <a:rPr sz="1100" b="0"/>
-                        <a:t>15.2</a:t>
-                      </a:r>
-                    </a:p>
-                  </a:txBody>
-                  <a:tcPr/>
-                </a:tc>
-              </a:tr>
-            </a:tbl>
-          </a:graphicData>
-        </a:graphic>
-      </p:graphicFrame>
-      <p:sp>
-        <p:nvSpPr>
-          <p:cNvPr id="5" name="TextBox 4"/>
-          <p:cNvSpPr txBox="1"/>
-          <p:nvPr/>
-        </p:nvSpPr>
-        <p:spPr>
-          <a:xfrm>
-            <a:off x="457200" y="6263640"/>
-            <a:ext cx="11247120" cy="548640"/>
-          </a:xfrm>
-          <a:prstGeom prst="rect">
-            <a:avLst/>
-          </a:prstGeom>
-          <a:noFill/>
-        </p:spPr>
-        <p:txBody>
-          <a:bodyPr wrap="square">
-            <a:spAutoFit/>
-          </a:bodyPr>
-          <a:lstStyle/>
-          <a:p>
-            <a:pPr algn="l"/>
-            <a:r>
-              <a:rPr sz="1100" b="0">
-                <a:solidFill>
-                  <a:srgbClr val="101010"/>
-                </a:solidFill>
-              </a:rPr>
-              <a:t>Quick observations from the table:</a:t>
-            </a:r>
-          </a:p>
-          <a:p>
-            <a:pPr algn="l"/>
-            <a:r>
-              <a:rPr sz="1100" b="0">
-                <a:solidFill>
-                  <a:srgbClr val="101010"/>
-                </a:solidFill>
-              </a:rPr>
-              <a:t>   Graviton and Xeon do not always agree on the best lock for the same workload.</a:t>
-            </a:r>
-          </a:p>
-          <a:p>
-            <a:pPr algn="l"/>
-            <a:r>
-              <a:rPr sz="1100" b="0">
-                <a:solidFill>
-                  <a:srgbClr val="101010"/>
-                </a:solidFill>
-              </a:rPr>
-              <a:t>   For Wormhole, occ-opt is the headline winner on read leaning workloads (and on uniform 80/10/10 on Graviton).</a:t>
-            </a:r>
-          </a:p>
-          <a:p>
-            <a:pPr algn="l"/>
-            <a:r>
-              <a:rPr sz="1100" b="0">
-                <a:solidFill>
-                  <a:srgbClr val="101010"/>
-                </a:solidFill>
-              </a:rPr>
-              <a:t>   For StripedMap and BronsonAVL, tas and ttas dominate. cas and ticket appear more on Xeon than on Graviton.</a:t>
+              <a:rPr sz="1100" b="0" dirty="0">
+                <a:solidFill>
+                  <a:srgbClr val="101010"/>
+                </a:solidFill>
+              </a:rPr>
+              <a:t> Add a WFE based spinlock primitive (most promising new direction for ARM).</a:t>
+            </a:r>
+          </a:p>
+          <a:p>
+            <a:pPr algn="l"/>
+            <a:r>
+              <a:rPr sz="1100" b="0" dirty="0">
+                <a:solidFill>
+                  <a:srgbClr val="101010"/>
+                </a:solidFill>
+              </a:rPr>
+              <a:t>   New file: include/primitives/</a:t>
+            </a:r>
+            <a:r>
+              <a:rPr sz="1100" b="0" dirty="0" err="1">
+                <a:solidFill>
+                  <a:srgbClr val="101010"/>
+                </a:solidFill>
+              </a:rPr>
+              <a:t>tas_lock_wfe.hpp</a:t>
+            </a:r>
+            <a:r>
+              <a:rPr sz="1100" b="0" dirty="0">
+                <a:solidFill>
+                  <a:srgbClr val="101010"/>
+                </a:solidFill>
+              </a:rPr>
+              <a:t> and a matching </a:t>
+            </a:r>
+            <a:r>
+              <a:rPr sz="1100" b="0" dirty="0" err="1">
+                <a:solidFill>
+                  <a:srgbClr val="101010"/>
+                </a:solidFill>
+              </a:rPr>
+              <a:t>cas_lock_wfe.hpp</a:t>
+            </a:r>
+            <a:r>
+              <a:rPr sz="1100" b="0" dirty="0">
+                <a:solidFill>
+                  <a:srgbClr val="101010"/>
+                </a:solidFill>
+              </a:rPr>
+              <a:t>.</a:t>
+            </a:r>
+          </a:p>
+          <a:p>
+            <a:pPr algn="l"/>
+            <a:r>
+              <a:rPr sz="1100" b="0" dirty="0">
+                <a:solidFill>
+                  <a:srgbClr val="101010"/>
+                </a:solidFill>
+              </a:rPr>
+              <a:t>   The acquire path: try the atomic, on failure use WFE to wait for any change to the cache line, then retry.</a:t>
+            </a:r>
+          </a:p>
+          <a:p>
+            <a:pPr algn="l"/>
+            <a:r>
+              <a:rPr sz="1100" b="0" dirty="0">
+                <a:solidFill>
+                  <a:srgbClr val="101010"/>
+                </a:solidFill>
+              </a:rPr>
+              <a:t>   The release path: store, then SEV to wake any waiting cores. Reference: Linux arch/arm64 </a:t>
+            </a:r>
+            <a:r>
+              <a:rPr sz="1100" b="0" dirty="0" err="1">
+                <a:solidFill>
+                  <a:srgbClr val="101010"/>
+                </a:solidFill>
+              </a:rPr>
+              <a:t>spinlock.h</a:t>
+            </a:r>
+            <a:r>
+              <a:rPr sz="1100" b="0" dirty="0">
+                <a:solidFill>
+                  <a:srgbClr val="101010"/>
+                </a:solidFill>
+              </a:rPr>
+              <a:t>.</a:t>
+            </a:r>
+          </a:p>
+          <a:p>
+            <a:pPr algn="l"/>
+            <a:r>
+              <a:rPr sz="1100" b="0" dirty="0">
+                <a:solidFill>
+                  <a:srgbClr val="101010"/>
+                </a:solidFill>
+              </a:rPr>
+              <a:t>   Plug into the Wormhole shim and compare against the YIELD based versions on Graviton.</a:t>
+            </a:r>
+          </a:p>
+          <a:p>
+            <a:pPr algn="l"/>
+            <a:r>
+              <a:rPr sz="1100" b="0" dirty="0">
+                <a:solidFill>
+                  <a:srgbClr val="101010"/>
+                </a:solidFill>
+              </a:rPr>
+              <a:t>   Hypothesis: at high contention, WFE saves real power and may reduce coherence traffic;</a:t>
+            </a:r>
+          </a:p>
+          <a:p>
+            <a:pPr algn="l"/>
+            <a:r>
+              <a:rPr sz="1100" b="0" dirty="0">
+                <a:solidFill>
+                  <a:srgbClr val="101010"/>
+                </a:solidFill>
+              </a:rPr>
+              <a:t>   at low contention it is a wash or slightly slower because of the extra SEV.</a:t>
+            </a:r>
+          </a:p>
+          <a:p>
+            <a:pPr algn="l"/>
+            <a:endParaRPr sz="1100" b="0" dirty="0">
+              <a:solidFill>
+                <a:srgbClr val="101010"/>
+              </a:solidFill>
+            </a:endParaRPr>
+          </a:p>
+          <a:p>
+            <a:pPr algn="l"/>
+            <a:r>
+              <a:rPr sz="1100" b="0" dirty="0">
+                <a:solidFill>
+                  <a:srgbClr val="101010"/>
+                </a:solidFill>
+              </a:rPr>
+              <a:t>Smaller items still on the list.</a:t>
+            </a:r>
+          </a:p>
+          <a:p>
+            <a:pPr algn="l"/>
+            <a:r>
+              <a:rPr sz="1100" b="0" dirty="0">
+                <a:solidFill>
+                  <a:srgbClr val="101010"/>
+                </a:solidFill>
+              </a:rPr>
+              <a:t>   Get </a:t>
+            </a:r>
+            <a:r>
+              <a:rPr sz="1100" b="0" dirty="0" err="1">
+                <a:solidFill>
+                  <a:srgbClr val="101010"/>
+                </a:solidFill>
+              </a:rPr>
+              <a:t>sudo</a:t>
+            </a:r>
+            <a:r>
+              <a:rPr sz="1100" b="0" dirty="0">
+                <a:solidFill>
+                  <a:srgbClr val="101010"/>
+                </a:solidFill>
+              </a:rPr>
+              <a:t> on Xeon for one controlled run with </a:t>
+            </a:r>
+            <a:r>
+              <a:rPr sz="1100" b="0" dirty="0" err="1">
+                <a:solidFill>
+                  <a:srgbClr val="101010"/>
+                </a:solidFill>
+              </a:rPr>
+              <a:t>setup_cpu.sh</a:t>
+            </a:r>
+            <a:r>
+              <a:rPr sz="1100" b="0" dirty="0">
+                <a:solidFill>
+                  <a:srgbClr val="101010"/>
+                </a:solidFill>
+              </a:rPr>
+              <a:t>, to separate DVFS noise from real lock </a:t>
+            </a:r>
+            <a:r>
+              <a:rPr sz="1100" b="0" dirty="0" err="1">
+                <a:solidFill>
+                  <a:srgbClr val="101010"/>
+                </a:solidFill>
+              </a:rPr>
+              <a:t>behaviour</a:t>
+            </a:r>
+            <a:r>
+              <a:rPr sz="1100" b="0" dirty="0">
+                <a:solidFill>
+                  <a:srgbClr val="101010"/>
+                </a:solidFill>
+              </a:rPr>
+              <a:t>.</a:t>
+            </a:r>
+          </a:p>
+          <a:p>
+            <a:pPr algn="l"/>
+            <a:r>
+              <a:rPr sz="1100" b="0" dirty="0">
+                <a:solidFill>
+                  <a:srgbClr val="101010"/>
+                </a:solidFill>
+              </a:rPr>
+              <a:t>   Add Apple M3 back for the Wormhole comparison (P cores only, capped at 6T to stay homogeneous).</a:t>
+            </a:r>
+          </a:p>
+          <a:p>
+            <a:pPr algn="l"/>
+            <a:r>
+              <a:rPr sz="1100" b="0" dirty="0">
+                <a:solidFill>
+                  <a:srgbClr val="101010"/>
+                </a:solidFill>
+              </a:rPr>
+              <a:t>   Write up the cross arch lock ranking finding (</a:t>
+            </a:r>
+            <a:r>
+              <a:rPr sz="1100" b="0" dirty="0" err="1">
+                <a:solidFill>
+                  <a:srgbClr val="101010"/>
+                </a:solidFill>
+              </a:rPr>
+              <a:t>ttas</a:t>
+            </a:r>
+            <a:r>
+              <a:rPr sz="1100" b="0" dirty="0">
+                <a:solidFill>
+                  <a:srgbClr val="101010"/>
+                </a:solidFill>
+              </a:rPr>
+              <a:t> wins more on Graviton, </a:t>
+            </a:r>
+            <a:r>
+              <a:rPr sz="1100" b="0" dirty="0" err="1">
+                <a:solidFill>
+                  <a:srgbClr val="101010"/>
+                </a:solidFill>
+              </a:rPr>
+              <a:t>cas</a:t>
+            </a:r>
+            <a:r>
+              <a:rPr sz="1100" b="0" dirty="0">
+                <a:solidFill>
+                  <a:srgbClr val="101010"/>
+                </a:solidFill>
+              </a:rPr>
+              <a:t> / ticket more on Xeon).</a:t>
             </a:r>
           </a:p>
         </p:txBody>
@@ -6225,8 +4854,8 @@
 </p:sld>
 </file>
 
-<file path=ppt/slides/slide18.xml><?xml version="1.0" encoding="utf-8"?>
-<p:sld xmlns:a="http://schemas.openxmlformats.org/drawingml/2006/main" xmlns:p="http://schemas.openxmlformats.org/presentationml/2006/main" xmlns:r="http://schemas.openxmlformats.org/officeDocument/2006/relationships">
+<file path=ppt/slides/slide2.xml><?xml version="1.0" encoding="utf-8"?>
+<p:sld xmlns:a="http://schemas.openxmlformats.org/drawingml/2006/main" xmlns:r="http://schemas.openxmlformats.org/officeDocument/2006/relationships" xmlns:p="http://schemas.openxmlformats.org/presentationml/2006/main">
   <p:cSld>
     <p:spTree>
       <p:nvGrpSpPr>
@@ -6234,7 +4863,14 @@
         <p:cNvGrpSpPr/>
         <p:nvPr/>
       </p:nvGrpSpPr>
-      <p:grpSpPr/>
+      <p:grpSpPr>
+        <a:xfrm>
+          <a:off x="0" y="0"/>
+          <a:ext cx="0" cy="0"/>
+          <a:chOff x="0" y="0"/>
+          <a:chExt cx="0" cy="0"/>
+        </a:xfrm>
+      </p:grpSpPr>
       <p:sp>
         <p:nvSpPr>
           <p:cNvPr id="2" name="TextBox 1"/>
@@ -6264,7 +4900,7 @@
                   <a:srgbClr val="1F3A5F"/>
                 </a:solidFill>
               </a:rPr>
-              <a:t>Next steps, part 1: an open question to address</a:t>
+              <a:t>What this project is about</a:t>
             </a:r>
           </a:p>
         </p:txBody>
@@ -6277,8 +4913,8 @@
         </p:nvSpPr>
         <p:spPr>
           <a:xfrm>
-            <a:off x="365760" y="868680"/>
-            <a:ext cx="11430000" cy="365760"/>
+            <a:off x="548640" y="1280160"/>
+            <a:ext cx="11064240" cy="5029200"/>
           </a:xfrm>
           <a:prstGeom prst="rect">
             <a:avLst/>
@@ -6293,266 +4929,135 @@
           <a:p>
             <a:pPr algn="l"/>
             <a:r>
-              <a:rPr sz="1300" b="0">
-                <a:solidFill>
-                  <a:srgbClr val="555555"/>
-                </a:solidFill>
-              </a:rPr>
-              <a:t>From supervisor feedback</a:t>
-            </a:r>
-          </a:p>
-        </p:txBody>
-      </p:sp>
-      <p:sp>
-        <p:nvSpPr>
-          <p:cNvPr id="4" name="TextBox 3"/>
-          <p:cNvSpPr txBox="1"/>
-          <p:nvPr/>
-        </p:nvSpPr>
-        <p:spPr>
-          <a:xfrm>
-            <a:off x="457200" y="1280160"/>
-            <a:ext cx="11247120" cy="5303520"/>
-          </a:xfrm>
-          <a:prstGeom prst="rect">
-            <a:avLst/>
-          </a:prstGeom>
-          <a:noFill/>
-        </p:spPr>
-        <p:txBody>
-          <a:bodyPr wrap="square">
-            <a:spAutoFit/>
-          </a:bodyPr>
-          <a:lstStyle/>
-          <a:p>
-            <a:pPr algn="l"/>
-            <a:r>
-              <a:rPr sz="1100" b="0">
-                <a:solidFill>
-                  <a:srgbClr val="101010"/>
-                </a:solidFill>
-              </a:rPr>
-              <a:t>The question:</a:t>
-            </a:r>
-          </a:p>
-          <a:p>
-            <a:pPr algn="l"/>
-            <a:r>
-              <a:rPr sz="1100" b="0">
-                <a:solidFill>
-                  <a:srgbClr val="101010"/>
-                </a:solidFill>
-              </a:rPr>
-              <a:t>   "Have you examined all synchronization related instructions in armv8 and x86 to make sure that the locks</a:t>
-            </a:r>
-          </a:p>
-          <a:p>
-            <a:pPr algn="l"/>
-            <a:r>
-              <a:rPr sz="1100" b="0">
-                <a:solidFill>
-                  <a:srgbClr val="101010"/>
-                </a:solidFill>
-              </a:rPr>
-              <a:t>   we have been evaluating cover them all? One of the original questions we want to answer is what is the</a:t>
-            </a:r>
-          </a:p>
-          <a:p>
-            <a:pPr algn="l"/>
-            <a:r>
-              <a:rPr sz="1100" b="0">
-                <a:solidFill>
-                  <a:srgbClr val="101010"/>
-                </a:solidFill>
-              </a:rPr>
-              <a:t>   perf difference between directly writing assemblies and using C++ atomics. And it seems that we have</a:t>
-            </a:r>
-          </a:p>
-          <a:p>
-            <a:pPr algn="l"/>
-            <a:r>
-              <a:rPr sz="1100" b="0">
-                <a:solidFill>
-                  <a:srgbClr val="101010"/>
-                </a:solidFill>
-              </a:rPr>
-              <a:t>   been evaluating only the latter."</a:t>
-            </a:r>
-          </a:p>
-          <a:p>
-            <a:pPr algn="l"/>
-            <a:r>
-              <a:rPr sz="1100" b="0">
-                <a:solidFill>
-                  <a:srgbClr val="101010"/>
-                </a:solidFill>
-              </a:rPr>
-              <a:t/>
-            </a:r>
-          </a:p>
-          <a:p>
-            <a:pPr algn="l"/>
-            <a:r>
-              <a:rPr sz="1100" b="0">
-                <a:solidFill>
-                  <a:srgbClr val="101010"/>
-                </a:solidFill>
-              </a:rPr>
-              <a:t>Honest answer:</a:t>
-            </a:r>
-          </a:p>
-          <a:p>
-            <a:pPr algn="l"/>
-            <a:r>
-              <a:rPr sz="1100" b="0">
-                <a:solidFill>
-                  <a:srgbClr val="101010"/>
-                </a:solidFill>
-              </a:rPr>
-              <a:t>   Right. Every lock primitive we have evaluated so far (tas, ttas, cas, ticket, rw, occ) is built on</a:t>
-            </a:r>
-          </a:p>
-          <a:p>
-            <a:pPr algn="l"/>
-            <a:r>
-              <a:rPr sz="1100" b="0">
-                <a:solidFill>
-                  <a:srgbClr val="101010"/>
-                </a:solidFill>
-              </a:rPr>
-              <a:t>   std::atomic. The compiler picks the underlying instruction. On Graviton with -march=native we should be</a:t>
-            </a:r>
-          </a:p>
-          <a:p>
-            <a:pPr algn="l"/>
-            <a:r>
-              <a:rPr sz="1100" b="0">
-                <a:solidFill>
-                  <a:srgbClr val="101010"/>
-                </a:solidFill>
-              </a:rPr>
-              <a:t>   getting the ARMv8.1 LSE atomics (cas, casal, swp, ldadd) but we have not actually verified this with</a:t>
-            </a:r>
-          </a:p>
-          <a:p>
-            <a:pPr algn="l"/>
-            <a:r>
-              <a:rPr sz="1100" b="0">
-                <a:solidFill>
-                  <a:srgbClr val="101010"/>
-                </a:solidFill>
-              </a:rPr>
-              <a:t>   objdump. On Xeon we get the lock prefixed instructions (lock cmpxchg, lock xchg, lock xadd).</a:t>
-            </a:r>
-          </a:p>
-          <a:p>
-            <a:pPr algn="l"/>
-            <a:r>
-              <a:rPr sz="1100" b="0">
-                <a:solidFill>
-                  <a:srgbClr val="101010"/>
-                </a:solidFill>
-              </a:rPr>
-              <a:t/>
-            </a:r>
-          </a:p>
-          <a:p>
-            <a:pPr algn="l"/>
-            <a:r>
-              <a:rPr sz="1100" b="0">
-                <a:solidFill>
-                  <a:srgbClr val="101010"/>
-                </a:solidFill>
-              </a:rPr>
-              <a:t>Things our current set does NOT cover:</a:t>
-            </a:r>
-          </a:p>
-          <a:p>
-            <a:pPr algn="l"/>
-            <a:r>
-              <a:rPr sz="1100" b="0">
-                <a:solidFill>
-                  <a:srgbClr val="101010"/>
-                </a:solidFill>
-              </a:rPr>
-              <a:t>   On ARM, WFE (Wait For Event) and SEV (Send Event). These let a spinning core enter a low power wait</a:t>
-            </a:r>
-          </a:p>
-          <a:p>
-            <a:pPr algn="l"/>
-            <a:r>
-              <a:rPr sz="1100" b="0">
-                <a:solidFill>
-                  <a:srgbClr val="101010"/>
-                </a:solidFill>
-              </a:rPr>
-              <a:t>   that wakes when the cache line changes. The Linux kernel arm64 spinlock uses them. Our cpu_relax just</a:t>
-            </a:r>
-          </a:p>
-          <a:p>
-            <a:pPr algn="l"/>
-            <a:r>
-              <a:rPr sz="1100" b="0">
-                <a:solidFill>
-                  <a:srgbClr val="101010"/>
-                </a:solidFill>
-              </a:rPr>
-              <a:t>   does YIELD which is a hint that is largely a NOP on Neoverse cores.</a:t>
-            </a:r>
-          </a:p>
-          <a:p>
-            <a:pPr algn="l"/>
-            <a:r>
-              <a:rPr sz="1100" b="0">
-                <a:solidFill>
-                  <a:srgbClr val="101010"/>
-                </a:solidFill>
-              </a:rPr>
-              <a:t>   On ARM, hand picking barrier strength (DMB ISHLD vs DMB ISHST vs DMB ISH SY) instead of letting the</a:t>
-            </a:r>
-          </a:p>
-          <a:p>
-            <a:pPr algn="l"/>
-            <a:r>
-              <a:rPr sz="1100" b="0">
-                <a:solidFill>
-                  <a:srgbClr val="101010"/>
-                </a:solidFill>
-              </a:rPr>
-              <a:t>   compiler map memory_order_release to whichever DMB it picks.</a:t>
-            </a:r>
-          </a:p>
-          <a:p>
-            <a:pPr algn="l"/>
-            <a:r>
-              <a:rPr sz="1100" b="0">
-                <a:solidFill>
-                  <a:srgbClr val="101010"/>
-                </a:solidFill>
-              </a:rPr>
-              <a:t>   On x86, there is much less missing. PAUSE we already use. UMONITOR / UMWAIT exists on Tremont and</a:t>
-            </a:r>
-          </a:p>
-          <a:p>
-            <a:pPr algn="l"/>
-            <a:r>
-              <a:rPr sz="1100" b="0">
-                <a:solidFill>
-                  <a:srgbClr val="101010"/>
-                </a:solidFill>
-              </a:rPr>
-              <a:t>   Tigerlake plus, but diascld45 (Haswell era) does not have it. TSX HLE and RTM are disabled in microcode</a:t>
-            </a:r>
-          </a:p>
-          <a:p>
-            <a:pPr algn="l"/>
-            <a:r>
-              <a:rPr sz="1100" b="0">
-                <a:solidFill>
-                  <a:srgbClr val="101010"/>
-                </a:solidFill>
-              </a:rPr>
-              <a:t>   on most modern Xeons due to MDS / Spectre mitigations.</a:t>
+              <a:rPr sz="1500" b="0">
+                <a:solidFill>
+                  <a:srgbClr val="101010"/>
+                </a:solidFill>
+              </a:rPr>
+              <a:t>The goal is to see how different lock primitives perform inside three concurrent indexes,</a:t>
+            </a:r>
+          </a:p>
+          <a:p>
+            <a:pPr algn="l"/>
+            <a:r>
+              <a:rPr sz="1500" b="0">
+                <a:solidFill>
+                  <a:srgbClr val="101010"/>
+                </a:solidFill>
+              </a:rPr>
+              <a:t>and whether the answer changes when you move from x86 (Intel Xeon) to ARM (AWS Graviton).</a:t>
+            </a:r>
+          </a:p>
+          <a:p>
+            <a:pPr algn="l"/>
+            <a:endParaRPr sz="1500" b="0">
+              <a:solidFill>
+                <a:srgbClr val="101010"/>
+              </a:solidFill>
+            </a:endParaRPr>
+          </a:p>
+          <a:p>
+            <a:pPr algn="l"/>
+            <a:r>
+              <a:rPr sz="1500" b="0">
+                <a:solidFill>
+                  <a:srgbClr val="101010"/>
+                </a:solidFill>
+              </a:rPr>
+              <a:t>The three indexes used:</a:t>
+            </a:r>
+          </a:p>
+          <a:p>
+            <a:pPr algn="l"/>
+            <a:r>
+              <a:rPr sz="1500" b="0">
+                <a:solidFill>
+                  <a:srgbClr val="101010"/>
+                </a:solidFill>
+              </a:rPr>
+              <a:t>   1. libcds StripedMap. Hash table with N stripes, one lock per stripe.</a:t>
+            </a:r>
+          </a:p>
+          <a:p>
+            <a:pPr algn="l"/>
+            <a:r>
+              <a:rPr sz="1500" b="0">
+                <a:solidFill>
+                  <a:srgbClr val="101010"/>
+                </a:solidFill>
+              </a:rPr>
+              <a:t>   2. libcds BronsonAVL. Lock based AVL tree with one monitor lock per node.</a:t>
+            </a:r>
+          </a:p>
+          <a:p>
+            <a:pPr algn="l"/>
+            <a:r>
+              <a:rPr sz="1500" b="0">
+                <a:solidFill>
+                  <a:srgbClr val="101010"/>
+                </a:solidFill>
+              </a:rPr>
+              <a:t>   3. Wormhole (Wu et al., FAST 2019). Hybrid trie plus hash plus linked list.</a:t>
+            </a:r>
+          </a:p>
+          <a:p>
+            <a:pPr algn="l"/>
+            <a:endParaRPr sz="1500" b="0">
+              <a:solidFill>
+                <a:srgbClr val="101010"/>
+              </a:solidFill>
+            </a:endParaRPr>
+          </a:p>
+          <a:p>
+            <a:pPr algn="l"/>
+            <a:r>
+              <a:rPr sz="1500" b="0">
+                <a:solidFill>
+                  <a:srgbClr val="101010"/>
+                </a:solidFill>
+              </a:rPr>
+              <a:t>Lock primitives compared:</a:t>
+            </a:r>
+          </a:p>
+          <a:p>
+            <a:pPr algn="l"/>
+            <a:r>
+              <a:rPr sz="1500" b="0">
+                <a:solidFill>
+                  <a:srgbClr val="101010"/>
+                </a:solidFill>
+              </a:rPr>
+              <a:t>   StripedMap and BronsonAVL: std::mutex, tas, ttas, cas, ticket.</a:t>
+            </a:r>
+          </a:p>
+          <a:p>
+            <a:pPr algn="l"/>
+            <a:r>
+              <a:rPr sz="1500" b="0">
+                <a:solidFill>
+                  <a:srgbClr val="101010"/>
+                </a:solidFill>
+              </a:rPr>
+              <a:t>   Wormhole: default (upstream untouched), rw, tas, ttas, cas, occ, occ-opt.</a:t>
+            </a:r>
+          </a:p>
+          <a:p>
+            <a:pPr algn="l"/>
+            <a:endParaRPr sz="1500" b="0">
+              <a:solidFill>
+                <a:srgbClr val="101010"/>
+              </a:solidFill>
+            </a:endParaRPr>
+          </a:p>
+          <a:p>
+            <a:pPr algn="l"/>
+            <a:r>
+              <a:rPr sz="1500" b="0">
+                <a:solidFill>
+                  <a:srgbClr val="101010"/>
+                </a:solidFill>
+              </a:rPr>
+              <a:t>The headline question: does the same lock win across architectures, or does it shift?</a:t>
             </a:r>
           </a:p>
         </p:txBody>
@@ -6565,8 +5070,8 @@
 </p:sld>
 </file>
 
-<file path=ppt/slides/slide19.xml><?xml version="1.0" encoding="utf-8"?>
-<p:sld xmlns:a="http://schemas.openxmlformats.org/drawingml/2006/main" xmlns:p="http://schemas.openxmlformats.org/presentationml/2006/main" xmlns:r="http://schemas.openxmlformats.org/officeDocument/2006/relationships">
+<file path=ppt/slides/slide3.xml><?xml version="1.0" encoding="utf-8"?>
+<p:sld xmlns:a="http://schemas.openxmlformats.org/drawingml/2006/main" xmlns:r="http://schemas.openxmlformats.org/officeDocument/2006/relationships" xmlns:p="http://schemas.openxmlformats.org/presentationml/2006/main">
   <p:cSld>
     <p:spTree>
       <p:nvGrpSpPr>
@@ -6574,7 +5079,14 @@
         <p:cNvGrpSpPr/>
         <p:nvPr/>
       </p:nvGrpSpPr>
-      <p:grpSpPr/>
+      <p:grpSpPr>
+        <a:xfrm>
+          <a:off x="0" y="0"/>
+          <a:ext cx="0" cy="0"/>
+          <a:chOff x="0" y="0"/>
+          <a:chExt cx="0" cy="0"/>
+        </a:xfrm>
+      </p:grpSpPr>
       <p:sp>
         <p:nvSpPr>
           <p:cNvPr id="2" name="TextBox 1"/>
@@ -6604,563 +5116,6 @@
                   <a:srgbClr val="1F3A5F"/>
                 </a:solidFill>
               </a:rPr>
-              <a:t>Next steps, part 2: concrete experiments to run</a:t>
-            </a:r>
-          </a:p>
-        </p:txBody>
-      </p:sp>
-      <p:sp>
-        <p:nvSpPr>
-          <p:cNvPr id="3" name="TextBox 2"/>
-          <p:cNvSpPr txBox="1"/>
-          <p:nvPr/>
-        </p:nvSpPr>
-        <p:spPr>
-          <a:xfrm>
-            <a:off x="457200" y="1280160"/>
-            <a:ext cx="11247120" cy="5303520"/>
-          </a:xfrm>
-          <a:prstGeom prst="rect">
-            <a:avLst/>
-          </a:prstGeom>
-          <a:noFill/>
-        </p:spPr>
-        <p:txBody>
-          <a:bodyPr wrap="square">
-            <a:spAutoFit/>
-          </a:bodyPr>
-          <a:lstStyle/>
-          <a:p>
-            <a:pPr algn="l"/>
-            <a:r>
-              <a:rPr sz="1100" b="0">
-                <a:solidFill>
-                  <a:srgbClr val="101010"/>
-                </a:solidFill>
-              </a:rPr>
-              <a:t>A. Verify what GCC actually emits for our locks (low effort, high information).</a:t>
-            </a:r>
-          </a:p>
-          <a:p>
-            <a:pPr algn="l"/>
-            <a:r>
-              <a:rPr sz="1100" b="0">
-                <a:solidFill>
-                  <a:srgbClr val="101010"/>
-                </a:solidFill>
-              </a:rPr>
-              <a:t>   Run objdump -d on each wormhole-rt-&lt;lock&gt;.a on Graviton and Xeon. Check that:</a:t>
-            </a:r>
-          </a:p>
-          <a:p>
-            <a:pPr algn="l"/>
-            <a:r>
-              <a:rPr sz="1100" b="0">
-                <a:solidFill>
-                  <a:srgbClr val="101010"/>
-                </a:solidFill>
-              </a:rPr>
-              <a:t>      tas_lock and ttas_lock use casal (LSE) on Graviton, lock cmpxchg / lock xchg on Xeon.</a:t>
-            </a:r>
-          </a:p>
-          <a:p>
-            <a:pPr algn="l"/>
-            <a:r>
-              <a:rPr sz="1100" b="0">
-                <a:solidFill>
-                  <a:srgbClr val="101010"/>
-                </a:solidFill>
-              </a:rPr>
-              <a:t>      cas_lock uses cas (LSE) on Graviton.</a:t>
-            </a:r>
-          </a:p>
-          <a:p>
-            <a:pPr algn="l"/>
-            <a:r>
-              <a:rPr sz="1100" b="0">
-                <a:solidFill>
-                  <a:srgbClr val="101010"/>
-                </a:solidFill>
-              </a:rPr>
-              <a:t>   If we are still seeing ldaxr / stlxr loops on Graviton, our -march flag is wrong and we are paying</a:t>
-            </a:r>
-          </a:p>
-          <a:p>
-            <a:pPr algn="l"/>
-            <a:r>
-              <a:rPr sz="1100" b="0">
-                <a:solidFill>
-                  <a:srgbClr val="101010"/>
-                </a:solidFill>
-              </a:rPr>
-              <a:t>   the LL/SC penalty unnecessarily.</a:t>
-            </a:r>
-          </a:p>
-          <a:p>
-            <a:pPr algn="l"/>
-            <a:r>
-              <a:rPr sz="1100" b="0">
-                <a:solidFill>
-                  <a:srgbClr val="101010"/>
-                </a:solidFill>
-              </a:rPr>
-              <a:t/>
-            </a:r>
-          </a:p>
-          <a:p>
-            <a:pPr algn="l"/>
-            <a:r>
-              <a:rPr sz="1100" b="0">
-                <a:solidFill>
-                  <a:srgbClr val="101010"/>
-                </a:solidFill>
-              </a:rPr>
-              <a:t>B. Add a WFE based spinlock primitive (most promising new direction for ARM).</a:t>
-            </a:r>
-          </a:p>
-          <a:p>
-            <a:pPr algn="l"/>
-            <a:r>
-              <a:rPr sz="1100" b="0">
-                <a:solidFill>
-                  <a:srgbClr val="101010"/>
-                </a:solidFill>
-              </a:rPr>
-              <a:t>   New file: include/primitives/tas_lock_wfe.hpp and a matching cas_lock_wfe.hpp.</a:t>
-            </a:r>
-          </a:p>
-          <a:p>
-            <a:pPr algn="l"/>
-            <a:r>
-              <a:rPr sz="1100" b="0">
-                <a:solidFill>
-                  <a:srgbClr val="101010"/>
-                </a:solidFill>
-              </a:rPr>
-              <a:t>   The acquire path: try the atomic, on failure use WFE to wait for any change to the cache line, then retry.</a:t>
-            </a:r>
-          </a:p>
-          <a:p>
-            <a:pPr algn="l"/>
-            <a:r>
-              <a:rPr sz="1100" b="0">
-                <a:solidFill>
-                  <a:srgbClr val="101010"/>
-                </a:solidFill>
-              </a:rPr>
-              <a:t>   The release path: store, then SEV to wake any waiting cores. Reference: Linux arch/arm64 spinlock.h.</a:t>
-            </a:r>
-          </a:p>
-          <a:p>
-            <a:pPr algn="l"/>
-            <a:r>
-              <a:rPr sz="1100" b="0">
-                <a:solidFill>
-                  <a:srgbClr val="101010"/>
-                </a:solidFill>
-              </a:rPr>
-              <a:t>   Plug into the Wormhole shim and compare against the YIELD based versions on Graviton.</a:t>
-            </a:r>
-          </a:p>
-          <a:p>
-            <a:pPr algn="l"/>
-            <a:r>
-              <a:rPr sz="1100" b="0">
-                <a:solidFill>
-                  <a:srgbClr val="101010"/>
-                </a:solidFill>
-              </a:rPr>
-              <a:t>   Hypothesis: at high contention, WFE saves real power and may reduce coherence traffic;</a:t>
-            </a:r>
-          </a:p>
-          <a:p>
-            <a:pPr algn="l"/>
-            <a:r>
-              <a:rPr sz="1100" b="0">
-                <a:solidFill>
-                  <a:srgbClr val="101010"/>
-                </a:solidFill>
-              </a:rPr>
-              <a:t>   at low contention it is a wash or slightly slower because of the extra SEV.</a:t>
-            </a:r>
-          </a:p>
-          <a:p>
-            <a:pPr algn="l"/>
-            <a:r>
-              <a:rPr sz="1100" b="0">
-                <a:solidFill>
-                  <a:srgbClr val="101010"/>
-                </a:solidFill>
-              </a:rPr>
-              <a:t/>
-            </a:r>
-          </a:p>
-          <a:p>
-            <a:pPr algn="l"/>
-            <a:r>
-              <a:rPr sz="1100" b="0">
-                <a:solidFill>
-                  <a:srgbClr val="101010"/>
-                </a:solidFill>
-              </a:rPr>
-              <a:t>C. Hand assembly TAS and CAS to compare against std::atomic versions.</a:t>
-            </a:r>
-          </a:p>
-          <a:p>
-            <a:pPr algn="l"/>
-            <a:r>
-              <a:rPr sz="1100" b="0">
-                <a:solidFill>
-                  <a:srgbClr val="101010"/>
-                </a:solidFill>
-              </a:rPr>
-              <a:t>   Write a tas_lock_asm and cas_lock_asm that use inline asm directly (LSE on ARM, lock prefix on x86).</a:t>
-            </a:r>
-          </a:p>
-          <a:p>
-            <a:pPr algn="l"/>
-            <a:r>
-              <a:rPr sz="1100" b="0">
-                <a:solidFill>
-                  <a:srgbClr val="101010"/>
-                </a:solidFill>
-              </a:rPr>
-              <a:t>   Compare the throughput at every thread point. The expected delta is small if -march=native is doing</a:t>
-            </a:r>
-          </a:p>
-          <a:p>
-            <a:pPr algn="l"/>
-            <a:r>
-              <a:rPr sz="1100" b="0">
-                <a:solidFill>
-                  <a:srgbClr val="101010"/>
-                </a:solidFill>
-              </a:rPr>
-              <a:t>   its job, but if there is a measurable gap that is itself an interesting finding for the writeup.</a:t>
-            </a:r>
-          </a:p>
-          <a:p>
-            <a:pPr algn="l"/>
-            <a:r>
-              <a:rPr sz="1100" b="0">
-                <a:solidFill>
-                  <a:srgbClr val="101010"/>
-                </a:solidFill>
-              </a:rPr>
-              <a:t/>
-            </a:r>
-          </a:p>
-          <a:p>
-            <a:pPr algn="l"/>
-            <a:r>
-              <a:rPr sz="1100" b="0">
-                <a:solidFill>
-                  <a:srgbClr val="101010"/>
-                </a:solidFill>
-              </a:rPr>
-              <a:t>D. Smaller items still on the list.</a:t>
-            </a:r>
-          </a:p>
-          <a:p>
-            <a:pPr algn="l"/>
-            <a:r>
-              <a:rPr sz="1100" b="0">
-                <a:solidFill>
-                  <a:srgbClr val="101010"/>
-                </a:solidFill>
-              </a:rPr>
-              <a:t>   Get sudo on Xeon for one controlled run with setup_cpu.sh, to separate DVFS noise from real lock behaviour.</a:t>
-            </a:r>
-          </a:p>
-          <a:p>
-            <a:pPr algn="l"/>
-            <a:r>
-              <a:rPr sz="1100" b="0">
-                <a:solidFill>
-                  <a:srgbClr val="101010"/>
-                </a:solidFill>
-              </a:rPr>
-              <a:t>   Add Apple M3 back for the Wormhole comparison (P cores only, capped at 6T to stay homogeneous).</a:t>
-            </a:r>
-          </a:p>
-          <a:p>
-            <a:pPr algn="l"/>
-            <a:r>
-              <a:rPr sz="1100" b="0">
-                <a:solidFill>
-                  <a:srgbClr val="101010"/>
-                </a:solidFill>
-              </a:rPr>
-              <a:t>   Write up the cross arch lock ranking finding (ttas wins more on Graviton, cas / ticket more on Xeon).</a:t>
-            </a:r>
-          </a:p>
-        </p:txBody>
-      </p:sp>
-    </p:spTree>
-  </p:cSld>
-  <p:clrMapOvr>
-    <a:masterClrMapping/>
-  </p:clrMapOvr>
-</p:sld>
-</file>
-
-<file path=ppt/slides/slide2.xml><?xml version="1.0" encoding="utf-8"?>
-<p:sld xmlns:a="http://schemas.openxmlformats.org/drawingml/2006/main" xmlns:p="http://schemas.openxmlformats.org/presentationml/2006/main" xmlns:r="http://schemas.openxmlformats.org/officeDocument/2006/relationships">
-  <p:cSld>
-    <p:spTree>
-      <p:nvGrpSpPr>
-        <p:cNvPr id="1" name=""/>
-        <p:cNvGrpSpPr/>
-        <p:nvPr/>
-      </p:nvGrpSpPr>
-      <p:grpSpPr/>
-      <p:sp>
-        <p:nvSpPr>
-          <p:cNvPr id="2" name="TextBox 1"/>
-          <p:cNvSpPr txBox="1"/>
-          <p:nvPr/>
-        </p:nvSpPr>
-        <p:spPr>
-          <a:xfrm>
-            <a:off x="365760" y="228600"/>
-            <a:ext cx="11430000" cy="640080"/>
-          </a:xfrm>
-          <a:prstGeom prst="rect">
-            <a:avLst/>
-          </a:prstGeom>
-          <a:noFill/>
-        </p:spPr>
-        <p:txBody>
-          <a:bodyPr wrap="square">
-            <a:spAutoFit/>
-          </a:bodyPr>
-          <a:lstStyle/>
-          <a:p>
-            <a:pPr algn="l"/>
-            <a:r>
-              <a:rPr sz="2600" b="1">
-                <a:solidFill>
-                  <a:srgbClr val="1F3A5F"/>
-                </a:solidFill>
-              </a:rPr>
-              <a:t>What this project is about</a:t>
-            </a:r>
-          </a:p>
-        </p:txBody>
-      </p:sp>
-      <p:sp>
-        <p:nvSpPr>
-          <p:cNvPr id="3" name="TextBox 2"/>
-          <p:cNvSpPr txBox="1"/>
-          <p:nvPr/>
-        </p:nvSpPr>
-        <p:spPr>
-          <a:xfrm>
-            <a:off x="548640" y="1280160"/>
-            <a:ext cx="11064240" cy="5029200"/>
-          </a:xfrm>
-          <a:prstGeom prst="rect">
-            <a:avLst/>
-          </a:prstGeom>
-          <a:noFill/>
-        </p:spPr>
-        <p:txBody>
-          <a:bodyPr wrap="square">
-            <a:spAutoFit/>
-          </a:bodyPr>
-          <a:lstStyle/>
-          <a:p>
-            <a:pPr algn="l"/>
-            <a:r>
-              <a:rPr sz="1500" b="0">
-                <a:solidFill>
-                  <a:srgbClr val="101010"/>
-                </a:solidFill>
-              </a:rPr>
-              <a:t>The goal is to see how different lock primitives perform inside three concurrent indexes,</a:t>
-            </a:r>
-          </a:p>
-          <a:p>
-            <a:pPr algn="l"/>
-            <a:r>
-              <a:rPr sz="1500" b="0">
-                <a:solidFill>
-                  <a:srgbClr val="101010"/>
-                </a:solidFill>
-              </a:rPr>
-              <a:t>and whether the answer changes when you move from x86 (Intel Xeon) to ARM (AWS Graviton).</a:t>
-            </a:r>
-          </a:p>
-          <a:p>
-            <a:pPr algn="l"/>
-            <a:r>
-              <a:rPr sz="1500" b="0">
-                <a:solidFill>
-                  <a:srgbClr val="101010"/>
-                </a:solidFill>
-              </a:rPr>
-              <a:t/>
-            </a:r>
-          </a:p>
-          <a:p>
-            <a:pPr algn="l"/>
-            <a:r>
-              <a:rPr sz="1500" b="0">
-                <a:solidFill>
-                  <a:srgbClr val="101010"/>
-                </a:solidFill>
-              </a:rPr>
-              <a:t>The three indexes used:</a:t>
-            </a:r>
-          </a:p>
-          <a:p>
-            <a:pPr algn="l"/>
-            <a:r>
-              <a:rPr sz="1500" b="0">
-                <a:solidFill>
-                  <a:srgbClr val="101010"/>
-                </a:solidFill>
-              </a:rPr>
-              <a:t>   1. libcds StripedMap. Hash table with N stripes, one lock per stripe.</a:t>
-            </a:r>
-          </a:p>
-          <a:p>
-            <a:pPr algn="l"/>
-            <a:r>
-              <a:rPr sz="1500" b="0">
-                <a:solidFill>
-                  <a:srgbClr val="101010"/>
-                </a:solidFill>
-              </a:rPr>
-              <a:t>   2. libcds BronsonAVL. Lock based AVL tree with one monitor lock per node.</a:t>
-            </a:r>
-          </a:p>
-          <a:p>
-            <a:pPr algn="l"/>
-            <a:r>
-              <a:rPr sz="1500" b="0">
-                <a:solidFill>
-                  <a:srgbClr val="101010"/>
-                </a:solidFill>
-              </a:rPr>
-              <a:t>   3. Wormhole (Wu et al., FAST 2019). Hybrid trie plus hash plus linked list.</a:t>
-            </a:r>
-          </a:p>
-          <a:p>
-            <a:pPr algn="l"/>
-            <a:r>
-              <a:rPr sz="1500" b="0">
-                <a:solidFill>
-                  <a:srgbClr val="101010"/>
-                </a:solidFill>
-              </a:rPr>
-              <a:t/>
-            </a:r>
-          </a:p>
-          <a:p>
-            <a:pPr algn="l"/>
-            <a:r>
-              <a:rPr sz="1500" b="0">
-                <a:solidFill>
-                  <a:srgbClr val="101010"/>
-                </a:solidFill>
-              </a:rPr>
-              <a:t>Lock primitives compared:</a:t>
-            </a:r>
-          </a:p>
-          <a:p>
-            <a:pPr algn="l"/>
-            <a:r>
-              <a:rPr sz="1500" b="0">
-                <a:solidFill>
-                  <a:srgbClr val="101010"/>
-                </a:solidFill>
-              </a:rPr>
-              <a:t>   StripedMap and BronsonAVL: std::mutex, tas, ttas, cas, ticket.</a:t>
-            </a:r>
-          </a:p>
-          <a:p>
-            <a:pPr algn="l"/>
-            <a:r>
-              <a:rPr sz="1500" b="0">
-                <a:solidFill>
-                  <a:srgbClr val="101010"/>
-                </a:solidFill>
-              </a:rPr>
-              <a:t>   Wormhole: default (upstream untouched), rw, tas, ttas, cas, occ, occ-opt.</a:t>
-            </a:r>
-          </a:p>
-          <a:p>
-            <a:pPr algn="l"/>
-            <a:r>
-              <a:rPr sz="1500" b="0">
-                <a:solidFill>
-                  <a:srgbClr val="101010"/>
-                </a:solidFill>
-              </a:rPr>
-              <a:t/>
-            </a:r>
-          </a:p>
-          <a:p>
-            <a:pPr algn="l"/>
-            <a:r>
-              <a:rPr sz="1500" b="0">
-                <a:solidFill>
-                  <a:srgbClr val="101010"/>
-                </a:solidFill>
-              </a:rPr>
-              <a:t>The headline question: does the same lock win across architectures, or does it shift?</a:t>
-            </a:r>
-          </a:p>
-        </p:txBody>
-      </p:sp>
-    </p:spTree>
-  </p:cSld>
-  <p:clrMapOvr>
-    <a:masterClrMapping/>
-  </p:clrMapOvr>
-</p:sld>
-</file>
-
-<file path=ppt/slides/slide3.xml><?xml version="1.0" encoding="utf-8"?>
-<p:sld xmlns:a="http://schemas.openxmlformats.org/drawingml/2006/main" xmlns:p="http://schemas.openxmlformats.org/presentationml/2006/main" xmlns:r="http://schemas.openxmlformats.org/officeDocument/2006/relationships">
-  <p:cSld>
-    <p:spTree>
-      <p:nvGrpSpPr>
-        <p:cNvPr id="1" name=""/>
-        <p:cNvGrpSpPr/>
-        <p:nvPr/>
-      </p:nvGrpSpPr>
-      <p:grpSpPr/>
-      <p:sp>
-        <p:nvSpPr>
-          <p:cNvPr id="2" name="TextBox 1"/>
-          <p:cNvSpPr txBox="1"/>
-          <p:nvPr/>
-        </p:nvSpPr>
-        <p:spPr>
-          <a:xfrm>
-            <a:off x="365760" y="228600"/>
-            <a:ext cx="11430000" cy="640080"/>
-          </a:xfrm>
-          <a:prstGeom prst="rect">
-            <a:avLst/>
-          </a:prstGeom>
-          <a:noFill/>
-        </p:spPr>
-        <p:txBody>
-          <a:bodyPr wrap="square">
-            <a:spAutoFit/>
-          </a:bodyPr>
-          <a:lstStyle/>
-          <a:p>
-            <a:pPr algn="l"/>
-            <a:r>
-              <a:rPr sz="2600" b="1">
-                <a:solidFill>
-                  <a:srgbClr val="1F3A5F"/>
-                </a:solidFill>
-              </a:rPr>
               <a:t>Setup</a:t>
             </a:r>
           </a:p>
@@ -7176,7 +5131,7 @@
         </p:nvGraphicFramePr>
         <p:xfrm>
           <a:off x="548640" y="1280160"/>
-          <a:ext cx="11064240" cy="1280160"/>
+          <a:ext cx="11064240" cy="1341120"/>
         </p:xfrm>
         <a:graphic>
           <a:graphicData uri="http://schemas.openxmlformats.org/drawingml/2006/table">
@@ -7185,10 +5140,34 @@
                 <a:tableStyleId>{5C22544A-7EE6-4342-B048-85BDC9FD1C3A}</a:tableStyleId>
               </a:tblPr>
               <a:tblGrid>
-                <a:gridCol w="2766060"/>
-                <a:gridCol w="2766060"/>
-                <a:gridCol w="2766060"/>
-                <a:gridCol w="2766060"/>
+                <a:gridCol w="2766060">
+                  <a:extLst>
+                    <a:ext uri="{9D8B030D-6E8A-4147-A177-3AD203B41FA5}">
+                      <a16:colId xmlns:a16="http://schemas.microsoft.com/office/drawing/2014/main" val="20000"/>
+                    </a:ext>
+                  </a:extLst>
+                </a:gridCol>
+                <a:gridCol w="2766060">
+                  <a:extLst>
+                    <a:ext uri="{9D8B030D-6E8A-4147-A177-3AD203B41FA5}">
+                      <a16:colId xmlns:a16="http://schemas.microsoft.com/office/drawing/2014/main" val="20001"/>
+                    </a:ext>
+                  </a:extLst>
+                </a:gridCol>
+                <a:gridCol w="2766060">
+                  <a:extLst>
+                    <a:ext uri="{9D8B030D-6E8A-4147-A177-3AD203B41FA5}">
+                      <a16:colId xmlns:a16="http://schemas.microsoft.com/office/drawing/2014/main" val="20002"/>
+                    </a:ext>
+                  </a:extLst>
+                </a:gridCol>
+                <a:gridCol w="2766060">
+                  <a:extLst>
+                    <a:ext uri="{9D8B030D-6E8A-4147-A177-3AD203B41FA5}">
+                      <a16:colId xmlns:a16="http://schemas.microsoft.com/office/drawing/2014/main" val="20003"/>
+                    </a:ext>
+                  </a:extLst>
+                </a:gridCol>
               </a:tblGrid>
               <a:tr h="426720">
                 <a:tc>
@@ -7243,6 +5222,11 @@
                   </a:txBody>
                   <a:tcPr/>
                 </a:tc>
+                <a:extLst>
+                  <a:ext uri="{0D108BD9-81ED-4DB2-BD59-A6C34878D82A}">
+                    <a16:rowId xmlns:a16="http://schemas.microsoft.com/office/drawing/2014/main" val="10000"/>
+                  </a:ext>
+                </a:extLst>
               </a:tr>
               <a:tr h="426720">
                 <a:tc>
@@ -7297,6 +5281,11 @@
                   </a:txBody>
                   <a:tcPr/>
                 </a:tc>
+                <a:extLst>
+                  <a:ext uri="{0D108BD9-81ED-4DB2-BD59-A6C34878D82A}">
+                    <a16:rowId xmlns:a16="http://schemas.microsoft.com/office/drawing/2014/main" val="10001"/>
+                  </a:ext>
+                </a:extLst>
               </a:tr>
               <a:tr h="426720">
                 <a:tc>
@@ -7351,6 +5340,11 @@
                   </a:txBody>
                   <a:tcPr/>
                 </a:tc>
+                <a:extLst>
+                  <a:ext uri="{0D108BD9-81ED-4DB2-BD59-A6C34878D82A}">
+                    <a16:rowId xmlns:a16="http://schemas.microsoft.com/office/drawing/2014/main" val="10002"/>
+                  </a:ext>
+                </a:extLst>
               </a:tr>
             </a:tbl>
           </a:graphicData>
@@ -7375,11 +5369,41 @@
                 <a:tableStyleId>{5C22544A-7EE6-4342-B048-85BDC9FD1C3A}</a:tableStyleId>
               </a:tblPr>
               <a:tblGrid>
-                <a:gridCol w="2212848"/>
-                <a:gridCol w="2212848"/>
-                <a:gridCol w="2212848"/>
-                <a:gridCol w="2212848"/>
-                <a:gridCol w="2212848"/>
+                <a:gridCol w="2212848">
+                  <a:extLst>
+                    <a:ext uri="{9D8B030D-6E8A-4147-A177-3AD203B41FA5}">
+                      <a16:colId xmlns:a16="http://schemas.microsoft.com/office/drawing/2014/main" val="20000"/>
+                    </a:ext>
+                  </a:extLst>
+                </a:gridCol>
+                <a:gridCol w="2212848">
+                  <a:extLst>
+                    <a:ext uri="{9D8B030D-6E8A-4147-A177-3AD203B41FA5}">
+                      <a16:colId xmlns:a16="http://schemas.microsoft.com/office/drawing/2014/main" val="20001"/>
+                    </a:ext>
+                  </a:extLst>
+                </a:gridCol>
+                <a:gridCol w="2212848">
+                  <a:extLst>
+                    <a:ext uri="{9D8B030D-6E8A-4147-A177-3AD203B41FA5}">
+                      <a16:colId xmlns:a16="http://schemas.microsoft.com/office/drawing/2014/main" val="20002"/>
+                    </a:ext>
+                  </a:extLst>
+                </a:gridCol>
+                <a:gridCol w="2212848">
+                  <a:extLst>
+                    <a:ext uri="{9D8B030D-6E8A-4147-A177-3AD203B41FA5}">
+                      <a16:colId xmlns:a16="http://schemas.microsoft.com/office/drawing/2014/main" val="20003"/>
+                    </a:ext>
+                  </a:extLst>
+                </a:gridCol>
+                <a:gridCol w="2212848">
+                  <a:extLst>
+                    <a:ext uri="{9D8B030D-6E8A-4147-A177-3AD203B41FA5}">
+                      <a16:colId xmlns:a16="http://schemas.microsoft.com/office/drawing/2014/main" val="20004"/>
+                    </a:ext>
+                  </a:extLst>
+                </a:gridCol>
               </a:tblGrid>
               <a:tr h="347472">
                 <a:tc>
@@ -7447,6 +5471,11 @@
                   </a:txBody>
                   <a:tcPr/>
                 </a:tc>
+                <a:extLst>
+                  <a:ext uri="{0D108BD9-81ED-4DB2-BD59-A6C34878D82A}">
+                    <a16:rowId xmlns:a16="http://schemas.microsoft.com/office/drawing/2014/main" val="10000"/>
+                  </a:ext>
+                </a:extLst>
               </a:tr>
               <a:tr h="347472">
                 <a:tc>
@@ -7514,6 +5543,11 @@
                   </a:txBody>
                   <a:tcPr/>
                 </a:tc>
+                <a:extLst>
+                  <a:ext uri="{0D108BD9-81ED-4DB2-BD59-A6C34878D82A}">
+                    <a16:rowId xmlns:a16="http://schemas.microsoft.com/office/drawing/2014/main" val="10001"/>
+                  </a:ext>
+                </a:extLst>
               </a:tr>
               <a:tr h="347472">
                 <a:tc>
@@ -7581,6 +5615,11 @@
                   </a:txBody>
                   <a:tcPr/>
                 </a:tc>
+                <a:extLst>
+                  <a:ext uri="{0D108BD9-81ED-4DB2-BD59-A6C34878D82A}">
+                    <a16:rowId xmlns:a16="http://schemas.microsoft.com/office/drawing/2014/main" val="10002"/>
+                  </a:ext>
+                </a:extLst>
               </a:tr>
               <a:tr h="347472">
                 <a:tc>
@@ -7648,6 +5687,11 @@
                   </a:txBody>
                   <a:tcPr/>
                 </a:tc>
+                <a:extLst>
+                  <a:ext uri="{0D108BD9-81ED-4DB2-BD59-A6C34878D82A}">
+                    <a16:rowId xmlns:a16="http://schemas.microsoft.com/office/drawing/2014/main" val="10003"/>
+                  </a:ext>
+                </a:extLst>
               </a:tr>
               <a:tr h="347472">
                 <a:tc>
@@ -7715,6 +5759,11 @@
                   </a:txBody>
                   <a:tcPr/>
                 </a:tc>
+                <a:extLst>
+                  <a:ext uri="{0D108BD9-81ED-4DB2-BD59-A6C34878D82A}">
+                    <a16:rowId xmlns:a16="http://schemas.microsoft.com/office/drawing/2014/main" val="10004"/>
+                  </a:ext>
+                </a:extLst>
               </a:tr>
             </a:tbl>
           </a:graphicData>
@@ -7796,7 +5845,7 @@
 </file>
 
 <file path=ppt/slides/slide4.xml><?xml version="1.0" encoding="utf-8"?>
-<p:sld xmlns:a="http://schemas.openxmlformats.org/drawingml/2006/main" xmlns:p="http://schemas.openxmlformats.org/presentationml/2006/main" xmlns:r="http://schemas.openxmlformats.org/officeDocument/2006/relationships">
+<p:sld xmlns:a="http://schemas.openxmlformats.org/drawingml/2006/main" xmlns:r="http://schemas.openxmlformats.org/officeDocument/2006/relationships" xmlns:p="http://schemas.openxmlformats.org/presentationml/2006/main">
   <p:cSld>
     <p:spTree>
       <p:nvGrpSpPr>
@@ -7804,7 +5853,14 @@
         <p:cNvGrpSpPr/>
         <p:nvPr/>
       </p:nvGrpSpPr>
-      <p:grpSpPr/>
+      <p:grpSpPr>
+        <a:xfrm>
+          <a:off x="0" y="0"/>
+          <a:ext cx="0" cy="0"/>
+          <a:chOff x="0" y="0"/>
+          <a:chExt cx="0" cy="0"/>
+        </a:xfrm>
+      </p:grpSpPr>
       <p:sp>
         <p:nvSpPr>
           <p:cNvPr id="2" name="TextBox 1"/>
@@ -7882,7 +5938,7 @@
         <p:spPr>
           <a:xfrm>
             <a:off x="457200" y="1280160"/>
-            <a:ext cx="11247120" cy="5303520"/>
+            <a:ext cx="11247120" cy="3308598"/>
           </a:xfrm>
           <a:prstGeom prst="rect">
             <a:avLst/>
@@ -7897,29 +5953,109 @@
           <a:p>
             <a:pPr algn="l"/>
             <a:r>
-              <a:rPr sz="1100" b="0">
-                <a:solidFill>
-                  <a:srgbClr val="101010"/>
-                </a:solidFill>
-              </a:rPr>
-              <a:t>How --pin is implemented (Linux only, in include/primitives/util.hpp):</a:t>
-            </a:r>
-          </a:p>
-          <a:p>
-            <a:pPr algn="l"/>
-            <a:r>
-              <a:rPr sz="1100" b="0">
-                <a:solidFill>
-                  <a:srgbClr val="101010"/>
-                </a:solidFill>
-              </a:rPr>
-              <a:t>   set_thread_affinity(thread_id) calls sched_setaffinity with a cpu_set_t containing only that one CPU.</a:t>
-            </a:r>
-          </a:p>
-          <a:p>
-            <a:pPr algn="l"/>
-            <a:r>
-              <a:rPr sz="1100" b="0">
+              <a:rPr sz="1100" b="0" dirty="0">
+                <a:solidFill>
+                  <a:srgbClr val="101010"/>
+                </a:solidFill>
+              </a:rPr>
+              <a:t>How --pin is implemented (Linux only, in include/primitives/</a:t>
+            </a:r>
+            <a:r>
+              <a:rPr sz="1100" b="0" dirty="0" err="1">
+                <a:solidFill>
+                  <a:srgbClr val="101010"/>
+                </a:solidFill>
+              </a:rPr>
+              <a:t>util.hpp</a:t>
+            </a:r>
+            <a:r>
+              <a:rPr sz="1100" b="0" dirty="0">
+                <a:solidFill>
+                  <a:srgbClr val="101010"/>
+                </a:solidFill>
+              </a:rPr>
+              <a:t>):</a:t>
+            </a:r>
+          </a:p>
+          <a:p>
+            <a:pPr algn="l"/>
+            <a:r>
+              <a:rPr sz="1100" b="0" dirty="0">
+                <a:solidFill>
+                  <a:srgbClr val="101010"/>
+                </a:solidFill>
+              </a:rPr>
+              <a:t>   </a:t>
+            </a:r>
+            <a:r>
+              <a:rPr sz="1100" b="0" dirty="0" err="1">
+                <a:solidFill>
+                  <a:srgbClr val="101010"/>
+                </a:solidFill>
+              </a:rPr>
+              <a:t>set_thread_affinity</a:t>
+            </a:r>
+            <a:r>
+              <a:rPr sz="1100" b="0" dirty="0">
+                <a:solidFill>
+                  <a:srgbClr val="101010"/>
+                </a:solidFill>
+              </a:rPr>
+              <a:t>(</a:t>
+            </a:r>
+            <a:r>
+              <a:rPr sz="1100" b="0" dirty="0" err="1">
+                <a:solidFill>
+                  <a:srgbClr val="101010"/>
+                </a:solidFill>
+              </a:rPr>
+              <a:t>thread_id</a:t>
+            </a:r>
+            <a:r>
+              <a:rPr sz="1100" b="0" dirty="0">
+                <a:solidFill>
+                  <a:srgbClr val="101010"/>
+                </a:solidFill>
+              </a:rPr>
+              <a:t>) calls </a:t>
+            </a:r>
+            <a:r>
+              <a:rPr sz="1100" b="0" dirty="0" err="1">
+                <a:solidFill>
+                  <a:srgbClr val="101010"/>
+                </a:solidFill>
+              </a:rPr>
+              <a:t>sched_setaffinity</a:t>
+            </a:r>
+            <a:r>
+              <a:rPr sz="1100" b="0" dirty="0">
+                <a:solidFill>
+                  <a:srgbClr val="101010"/>
+                </a:solidFill>
+              </a:rPr>
+              <a:t> with a </a:t>
+            </a:r>
+            <a:r>
+              <a:rPr sz="1100" b="0" dirty="0" err="1">
+                <a:solidFill>
+                  <a:srgbClr val="101010"/>
+                </a:solidFill>
+              </a:rPr>
+              <a:t>cpu_set_t</a:t>
+            </a:r>
+            <a:r>
+              <a:rPr sz="1100" b="0" dirty="0">
+                <a:solidFill>
+                  <a:srgbClr val="101010"/>
+                </a:solidFill>
+              </a:rPr>
+              <a:t> containing only that one CPU.</a:t>
+            </a:r>
+          </a:p>
+          <a:p>
+            <a:pPr algn="l"/>
+            <a:r>
+              <a:rPr sz="1100" b="0" dirty="0">
                 <a:solidFill>
                   <a:srgbClr val="101010"/>
                 </a:solidFill>
@@ -7930,7 +6066,7 @@
           <a:p>
             <a:pPr algn="l"/>
             <a:r>
-              <a:rPr sz="1100" b="0">
+              <a:rPr sz="1100" b="0" dirty="0">
                 <a:solidFill>
                   <a:srgbClr val="101010"/>
                 </a:solidFill>
@@ -7940,19 +6076,16 @@
           </a:p>
           <a:p>
             <a:pPr algn="l"/>
-            <a:r>
-              <a:rPr sz="1100" b="0">
-                <a:solidFill>
-                  <a:srgbClr val="101010"/>
-                </a:solidFill>
-              </a:rPr>
-              <a:t/>
-            </a:r>
-          </a:p>
-          <a:p>
-            <a:pPr algn="l"/>
-            <a:r>
-              <a:rPr sz="1100" b="0">
+            <a:endParaRPr sz="1100" b="0" dirty="0">
+              <a:solidFill>
+                <a:srgbClr val="101010"/>
+              </a:solidFill>
+            </a:endParaRPr>
+          </a:p>
+          <a:p>
+            <a:pPr algn="l"/>
+            <a:r>
+              <a:rPr sz="1100" b="0" dirty="0">
                 <a:solidFill>
                   <a:srgbClr val="101010"/>
                 </a:solidFill>
@@ -7963,7 +6096,7 @@
           <a:p>
             <a:pPr algn="l"/>
             <a:r>
-              <a:rPr sz="1100" b="0">
+              <a:rPr sz="1100" b="0" dirty="0">
                 <a:solidFill>
                   <a:srgbClr val="101010"/>
                 </a:solidFill>
@@ -7974,7 +6107,7 @@
           <a:p>
             <a:pPr algn="l"/>
             <a:r>
-              <a:rPr sz="1100" b="0">
+              <a:rPr sz="1100" b="0" dirty="0">
                 <a:solidFill>
                   <a:srgbClr val="101010"/>
                 </a:solidFill>
@@ -7985,7 +6118,7 @@
           <a:p>
             <a:pPr algn="l"/>
             <a:r>
-              <a:rPr sz="1100" b="0">
+              <a:rPr sz="1100" b="0" dirty="0">
                 <a:solidFill>
                   <a:srgbClr val="101010"/>
                 </a:solidFill>
@@ -7996,18 +6129,34 @@
           <a:p>
             <a:pPr algn="l"/>
             <a:r>
-              <a:rPr sz="1100" b="0">
-                <a:solidFill>
-                  <a:srgbClr val="101010"/>
-                </a:solidFill>
-              </a:rPr>
-              <a:t>   So sched_setaffinity to CPU N effectively pins to physical core N for the duration of the run.</a:t>
-            </a:r>
-          </a:p>
-          <a:p>
-            <a:pPr algn="l"/>
-            <a:r>
-              <a:rPr sz="1100" b="0">
+              <a:rPr sz="1100" b="0" dirty="0">
+                <a:solidFill>
+                  <a:srgbClr val="101010"/>
+                </a:solidFill>
+              </a:rPr>
+              <a:t>   So </a:t>
+            </a:r>
+            <a:r>
+              <a:rPr sz="1100" b="0" dirty="0" err="1">
+                <a:solidFill>
+                  <a:srgbClr val="101010"/>
+                </a:solidFill>
+              </a:rPr>
+              <a:t>sched_setaffinity</a:t>
+            </a:r>
+            <a:r>
+              <a:rPr sz="1100" b="0" dirty="0">
+                <a:solidFill>
+                  <a:srgbClr val="101010"/>
+                </a:solidFill>
+              </a:rPr>
+              <a:t> to CPU N effectively pins to physical core N for the duration of the run.</a:t>
+            </a:r>
+          </a:p>
+          <a:p>
+            <a:pPr algn="l"/>
+            <a:r>
+              <a:rPr sz="1100" b="0" dirty="0">
                 <a:solidFill>
                   <a:srgbClr val="101010"/>
                 </a:solidFill>
@@ -8018,7 +6167,7 @@
           <a:p>
             <a:pPr algn="l"/>
             <a:r>
-              <a:rPr sz="1100" b="0">
+              <a:rPr sz="1100" b="0" dirty="0">
                 <a:solidFill>
                   <a:srgbClr val="101010"/>
                 </a:solidFill>
@@ -8028,19 +6177,16 @@
           </a:p>
           <a:p>
             <a:pPr algn="l"/>
-            <a:r>
-              <a:rPr sz="1100" b="0">
-                <a:solidFill>
-                  <a:srgbClr val="101010"/>
-                </a:solidFill>
-              </a:rPr>
-              <a:t/>
-            </a:r>
-          </a:p>
-          <a:p>
-            <a:pPr algn="l"/>
-            <a:r>
-              <a:rPr sz="1100" b="0">
+            <a:endParaRPr sz="1100" b="0" dirty="0">
+              <a:solidFill>
+                <a:srgbClr val="101010"/>
+              </a:solidFill>
+            </a:endParaRPr>
+          </a:p>
+          <a:p>
+            <a:pPr algn="l"/>
+            <a:r>
+              <a:rPr sz="1100" b="0" dirty="0">
                 <a:solidFill>
                   <a:srgbClr val="101010"/>
                 </a:solidFill>
@@ -8051,111 +6197,133 @@
           <a:p>
             <a:pPr algn="l"/>
             <a:r>
-              <a:rPr sz="1100" b="0">
-                <a:solidFill>
-                  <a:srgbClr val="101010"/>
-                </a:solidFill>
-              </a:rPr>
-              <a:t>   The harness has a --pin flag, but only the standalone cds_sweep.sh passes it. The two sweep scripts</a:t>
-            </a:r>
-          </a:p>
-          <a:p>
-            <a:pPr algn="l"/>
-            <a:r>
-              <a:rPr sz="1100" b="0">
-                <a:solidFill>
-                  <a:srgbClr val="101010"/>
-                </a:solidFill>
-              </a:rPr>
-              <a:t>   used to produce these slides (wh_compare.sh and run_avl_compare.sh) do NOT pass --pin.</a:t>
-            </a:r>
-          </a:p>
-          <a:p>
-            <a:pPr algn="l"/>
-            <a:r>
-              <a:rPr sz="1100" b="0">
-                <a:solidFill>
-                  <a:srgbClr val="101010"/>
-                </a:solidFill>
-              </a:rPr>
-              <a:t>   So the Wormhole, BronsonAVL, and StripedMap numbers in this deck are from UNPINNED runs.</a:t>
-            </a:r>
-          </a:p>
-          <a:p>
-            <a:pPr algn="l"/>
-            <a:r>
-              <a:rPr sz="1100" b="0">
-                <a:solidFill>
-                  <a:srgbClr val="101010"/>
-                </a:solidFill>
-              </a:rPr>
-              <a:t/>
-            </a:r>
-          </a:p>
-          <a:p>
-            <a:pPr algn="l"/>
-            <a:r>
-              <a:rPr sz="1100" b="0">
-                <a:solidFill>
-                  <a:srgbClr val="101010"/>
-                </a:solidFill>
-              </a:rPr>
-              <a:t>Why this is fine for the comparison we are presenting:</a:t>
-            </a:r>
-          </a:p>
-          <a:p>
-            <a:pPr algn="l"/>
-            <a:r>
-              <a:rPr sz="1100" b="0">
-                <a:solidFill>
-                  <a:srgbClr val="101010"/>
-                </a:solidFill>
-              </a:rPr>
-              <a:t>   We checked directly (StripedMap pinned vs unpinned on Graviton at 8T): avg fairness 0.984 vs 0.982.</a:t>
-            </a:r>
-          </a:p>
-          <a:p>
-            <a:pPr algn="l"/>
-            <a:r>
-              <a:rPr sz="1100" b="0">
-                <a:solidFill>
-                  <a:srgbClr val="101010"/>
-                </a:solidFill>
-              </a:rPr>
-              <a:t>   Same on Xeon: 0.909 vs 0.908. Pinning has effectively no impact at the scale of this study.</a:t>
-            </a:r>
-          </a:p>
-          <a:p>
-            <a:pPr algn="l"/>
-            <a:r>
-              <a:rPr sz="1100" b="0">
-                <a:solidFill>
-                  <a:srgbClr val="101010"/>
-                </a:solidFill>
-              </a:rPr>
-              <a:t>   On Graviton this is because the hypervisor placement is already stable. On Xeon it is because the</a:t>
-            </a:r>
-          </a:p>
-          <a:p>
-            <a:pPr algn="l"/>
-            <a:r>
-              <a:rPr sz="1100" b="0">
-                <a:solidFill>
-                  <a:srgbClr val="101010"/>
-                </a:solidFill>
-              </a:rPr>
-              <a:t>   variance comes from DVFS, not from thread migration.</a:t>
-            </a:r>
-          </a:p>
-          <a:p>
-            <a:pPr algn="l"/>
-            <a:r>
-              <a:rPr sz="1100" b="0">
-                <a:solidFill>
-                  <a:srgbClr val="101010"/>
-                </a:solidFill>
-              </a:rPr>
-              <a:t>   We will normalize this in the next iteration so all three sweeps pass --pin on Linux.</a:t>
+              <a:rPr sz="1100" b="0" dirty="0">
+                <a:solidFill>
+                  <a:srgbClr val="101010"/>
+                </a:solidFill>
+              </a:rPr>
+              <a:t>   The harness has a --pin flag, but only the standalone </a:t>
+            </a:r>
+            <a:r>
+              <a:rPr sz="1100" b="0" dirty="0" err="1">
+                <a:solidFill>
+                  <a:srgbClr val="101010"/>
+                </a:solidFill>
+              </a:rPr>
+              <a:t>cds_sweep.sh</a:t>
+            </a:r>
+            <a:r>
+              <a:rPr sz="1100" b="0" dirty="0">
+                <a:solidFill>
+                  <a:srgbClr val="101010"/>
+                </a:solidFill>
+              </a:rPr>
+              <a:t> passes it. The two sweep scripts</a:t>
+            </a:r>
+          </a:p>
+          <a:p>
+            <a:pPr algn="l"/>
+            <a:r>
+              <a:rPr sz="1100" b="0" dirty="0">
+                <a:solidFill>
+                  <a:srgbClr val="101010"/>
+                </a:solidFill>
+              </a:rPr>
+              <a:t>   used to produce these slides (</a:t>
+            </a:r>
+            <a:r>
+              <a:rPr sz="1100" b="0" dirty="0" err="1">
+                <a:solidFill>
+                  <a:srgbClr val="101010"/>
+                </a:solidFill>
+              </a:rPr>
+              <a:t>wh_compare.sh</a:t>
+            </a:r>
+            <a:r>
+              <a:rPr sz="1100" b="0" dirty="0">
+                <a:solidFill>
+                  <a:srgbClr val="101010"/>
+                </a:solidFill>
+              </a:rPr>
+              <a:t> and </a:t>
+            </a:r>
+            <a:r>
+              <a:rPr sz="1100" b="0" dirty="0" err="1">
+                <a:solidFill>
+                  <a:srgbClr val="101010"/>
+                </a:solidFill>
+              </a:rPr>
+              <a:t>run_avl_compare.sh</a:t>
+            </a:r>
+            <a:r>
+              <a:rPr sz="1100" b="0" dirty="0">
+                <a:solidFill>
+                  <a:srgbClr val="101010"/>
+                </a:solidFill>
+              </a:rPr>
+              <a:t>) do NOT pass --pin.</a:t>
+            </a:r>
+          </a:p>
+          <a:p>
+            <a:pPr algn="l"/>
+            <a:r>
+              <a:rPr sz="1100" b="0" dirty="0">
+                <a:solidFill>
+                  <a:srgbClr val="101010"/>
+                </a:solidFill>
+              </a:rPr>
+              <a:t>   So the Wormhole, </a:t>
+            </a:r>
+            <a:r>
+              <a:rPr sz="1100" b="0" dirty="0" err="1">
+                <a:solidFill>
+                  <a:srgbClr val="101010"/>
+                </a:solidFill>
+              </a:rPr>
+              <a:t>BronsonAVL</a:t>
+            </a:r>
+            <a:r>
+              <a:rPr sz="1100" b="0" dirty="0">
+                <a:solidFill>
+                  <a:srgbClr val="101010"/>
+                </a:solidFill>
+              </a:rPr>
+              <a:t>, and </a:t>
+            </a:r>
+            <a:r>
+              <a:rPr sz="1100" b="0" dirty="0" err="1">
+                <a:solidFill>
+                  <a:srgbClr val="101010"/>
+                </a:solidFill>
+              </a:rPr>
+              <a:t>StripedMap</a:t>
+            </a:r>
+            <a:r>
+              <a:rPr sz="1100" b="0" dirty="0">
+                <a:solidFill>
+                  <a:srgbClr val="101010"/>
+                </a:solidFill>
+              </a:rPr>
+              <a:t> numbers in this deck are from UNPINNED runs.</a:t>
+            </a:r>
+          </a:p>
+          <a:p>
+            <a:pPr algn="l"/>
+            <a:endParaRPr sz="1100" b="0" dirty="0">
+              <a:solidFill>
+                <a:srgbClr val="101010"/>
+              </a:solidFill>
+            </a:endParaRPr>
+          </a:p>
+          <a:p>
+            <a:pPr algn="l"/>
+            <a:r>
+              <a:rPr sz="1100" b="0" dirty="0">
+                <a:solidFill>
+                  <a:srgbClr val="101010"/>
+                </a:solidFill>
+              </a:rPr>
+              <a:t>On Xeon variance comes from DVFS, not from thread migration.</a:t>
             </a:r>
           </a:p>
         </p:txBody>
@@ -8169,7 +6337,7 @@
 </file>
 
 <file path=ppt/slides/slide5.xml><?xml version="1.0" encoding="utf-8"?>
-<p:sld xmlns:a="http://schemas.openxmlformats.org/drawingml/2006/main" xmlns:p="http://schemas.openxmlformats.org/presentationml/2006/main" xmlns:r="http://schemas.openxmlformats.org/officeDocument/2006/relationships">
+<p:sld xmlns:a="http://schemas.openxmlformats.org/drawingml/2006/main" xmlns:r="http://schemas.openxmlformats.org/officeDocument/2006/relationships" xmlns:p="http://schemas.openxmlformats.org/presentationml/2006/main">
   <p:cSld>
     <p:spTree>
       <p:nvGrpSpPr>
@@ -8177,7 +6345,14 @@
         <p:cNvGrpSpPr/>
         <p:nvPr/>
       </p:nvGrpSpPr>
-      <p:grpSpPr/>
+      <p:grpSpPr>
+        <a:xfrm>
+          <a:off x="0" y="0"/>
+          <a:ext cx="0" cy="0"/>
+          <a:chOff x="0" y="0"/>
+          <a:chExt cx="0" cy="0"/>
+        </a:xfrm>
+      </p:grpSpPr>
       <p:sp>
         <p:nvSpPr>
           <p:cNvPr id="2" name="TextBox 1"/>
@@ -8280,13 +6455,21 @@
           </a:p>
           <a:p>
             <a:pPr algn="l"/>
+            <a:endParaRPr sz="1400" b="0">
+              <a:solidFill>
+                <a:srgbClr val="101010"/>
+              </a:solidFill>
+            </a:endParaRPr>
+          </a:p>
+          <a:p>
+            <a:pPr algn="l"/>
             <a:r>
               <a:rPr sz="1400" b="0">
                 <a:solidFill>
                   <a:srgbClr val="101010"/>
                 </a:solidFill>
               </a:rPr>
-              <a:t/>
+              <a:t>   Hash table with std::list buckets and a fixed array of N stripe locks.</a:t>
             </a:r>
           </a:p>
           <a:p>
@@ -8297,7 +6480,7 @@
                   <a:srgbClr val="101010"/>
                 </a:solidFill>
               </a:rPr>
-              <a:t>   Hash table with std::list buckets and a fixed array of N stripe locks.</a:t>
+              <a:t>   The lock primitive is the template parameter to cds::container::striped_set::striping&lt;Lock&gt;,</a:t>
             </a:r>
           </a:p>
           <a:p>
@@ -8308,7 +6491,7 @@
                   <a:srgbClr val="101010"/>
                 </a:solidFill>
               </a:rPr>
-              <a:t>   The lock primitive is the template parameter to cds::container::striped_set::striping&lt;Lock&gt;,</a:t>
+              <a:t>   so we plug any lockbench primitive (tas_lock, ttas_lock, cas_lock, ticket_lock, std::mutex) at compile time.</a:t>
             </a:r>
           </a:p>
           <a:p>
@@ -8319,7 +6502,7 @@
                   <a:srgbClr val="101010"/>
                 </a:solidFill>
               </a:rPr>
-              <a:t>   so we plug any lockbench primitive (tas_lock, ttas_lock, cas_lock, ticket_lock, std::mutex) at compile time.</a:t>
+              <a:t>   We use 65536 stripes. Each operation hashes the key, picks the stripe, and acquires its lock.</a:t>
             </a:r>
           </a:p>
           <a:p>
@@ -8330,7 +6513,7 @@
                   <a:srgbClr val="101010"/>
                 </a:solidFill>
               </a:rPr>
-              <a:t>   We use 65536 stripes. Each operation hashes the key, picks the stripe, and acquires its lock.</a:t>
+              <a:t>   Resize policy is load_factor_resizing&lt;4&gt;: when item count divided by buckets exceeds 4,</a:t>
             </a:r>
           </a:p>
           <a:p>
@@ -8341,7 +6524,7 @@
                   <a:srgbClr val="101010"/>
                 </a:solidFill>
               </a:rPr>
-              <a:t>   Resize policy is load_factor_resizing&lt;4&gt;: when item count divided by buckets exceeds 4,</a:t>
+              <a:t>   the map takes ALL stripe locks (scoped_full_lock) and rehashes. We size the initial bucket array</a:t>
             </a:r>
           </a:p>
           <a:p>
@@ -8352,30 +6535,16 @@
                   <a:srgbClr val="101010"/>
                 </a:solidFill>
               </a:rPr>
-              <a:t>   the map takes ALL stripe locks (scoped_full_lock) and rehashes. We size the initial bucket array</a:t>
-            </a:r>
-          </a:p>
-          <a:p>
-            <a:pPr algn="l"/>
-            <a:r>
-              <a:rPr sz="1400" b="0">
-                <a:solidFill>
-                  <a:srgbClr val="101010"/>
-                </a:solidFill>
-              </a:rPr>
               <a:t>   large enough that we do not hit a resize during a benchmark run.</a:t>
             </a:r>
           </a:p>
           <a:p>
             <a:pPr algn="l"/>
-            <a:r>
-              <a:rPr sz="1400" b="0">
-                <a:solidFill>
-                  <a:srgbClr val="101010"/>
-                </a:solidFill>
-              </a:rPr>
-              <a:t/>
-            </a:r>
+            <a:endParaRPr sz="1400" b="0">
+              <a:solidFill>
+                <a:srgbClr val="101010"/>
+              </a:solidFill>
+            </a:endParaRPr>
           </a:p>
           <a:p>
             <a:pPr algn="l"/>
@@ -8421,7 +6590,7 @@
 </file>
 
 <file path=ppt/slides/slide6.xml><?xml version="1.0" encoding="utf-8"?>
-<p:sld xmlns:a="http://schemas.openxmlformats.org/drawingml/2006/main" xmlns:p="http://schemas.openxmlformats.org/presentationml/2006/main" xmlns:r="http://schemas.openxmlformats.org/officeDocument/2006/relationships">
+<p:sld xmlns:a="http://schemas.openxmlformats.org/drawingml/2006/main" xmlns:r="http://schemas.openxmlformats.org/officeDocument/2006/relationships" xmlns:p="http://schemas.openxmlformats.org/presentationml/2006/main">
   <p:cSld>
     <p:spTree>
       <p:nvGrpSpPr>
@@ -8429,7 +6598,14 @@
         <p:cNvGrpSpPr/>
         <p:nvPr/>
       </p:nvGrpSpPr>
-      <p:grpSpPr/>
+      <p:grpSpPr>
+        <a:xfrm>
+          <a:off x="0" y="0"/>
+          <a:ext cx="0" cy="0"/>
+          <a:chOff x="0" y="0"/>
+          <a:chExt cx="0" cy="0"/>
+        </a:xfrm>
+      </p:grpSpPr>
       <p:sp>
         <p:nvSpPr>
           <p:cNvPr id="2" name="TextBox 1"/>
@@ -8543,13 +6719,21 @@
           </a:p>
           <a:p>
             <a:pPr algn="l"/>
+            <a:endParaRPr sz="1300" b="0">
+              <a:solidFill>
+                <a:srgbClr val="101010"/>
+              </a:solidFill>
+            </a:endParaRPr>
+          </a:p>
+          <a:p>
+            <a:pPr algn="l"/>
             <a:r>
               <a:rPr sz="1300" b="0">
                 <a:solidFill>
                   <a:srgbClr val="101010"/>
                 </a:solidFill>
               </a:rPr>
-              <a:t/>
+              <a:t>   Tree is balanced. Each node carries a monitor lock that we plug in via cds::sync::injecting_monitor&lt;Lock&gt;.</a:t>
             </a:r>
           </a:p>
           <a:p>
@@ -8560,7 +6744,7 @@
                   <a:srgbClr val="101010"/>
                 </a:solidFill>
               </a:rPr>
-              <a:t>   Tree is balanced. Each node carries a monitor lock that we plug in via cds::sync::injecting_monitor&lt;Lock&gt;.</a:t>
+              <a:t>   Reads use a sequence style version counter on each node. Writers take the lock, mutate, then bump the version.</a:t>
             </a:r>
           </a:p>
           <a:p>
@@ -8571,7 +6755,7 @@
                   <a:srgbClr val="101010"/>
                 </a:solidFill>
               </a:rPr>
-              <a:t>   Reads use a sequence style version counter on each node. Writers take the lock, mutate, then bump the version.</a:t>
+              <a:t>   Writes do hand over hand traversal down the tree, locking at most a small constant number of nodes at a time.</a:t>
             </a:r>
           </a:p>
           <a:p>
@@ -8582,7 +6766,7 @@
                   <a:srgbClr val="101010"/>
                 </a:solidFill>
               </a:rPr>
-              <a:t>   Writes do hand over hand traversal down the tree, locking at most a small constant number of nodes at a time.</a:t>
+              <a:t>   Memory reclamation is handled by URCU (cds::urcu::gc&lt;general_buffered&gt;). Worker threads attach to the URCU</a:t>
             </a:r>
           </a:p>
           <a:p>
@@ -8593,30 +6777,16 @@
                   <a:srgbClr val="101010"/>
                 </a:solidFill>
               </a:rPr>
-              <a:t>   Memory reclamation is handled by URCU (cds::urcu::gc&lt;general_buffered&gt;). Worker threads attach to the URCU</a:t>
-            </a:r>
-          </a:p>
-          <a:p>
-            <a:pPr algn="l"/>
-            <a:r>
-              <a:rPr sz="1300" b="0">
-                <a:solidFill>
-                  <a:srgbClr val="101010"/>
-                </a:solidFill>
-              </a:rPr>
               <a:t>   manager on first call via a thread_local guard, then detach at thread exit.</a:t>
             </a:r>
           </a:p>
           <a:p>
             <a:pPr algn="l"/>
-            <a:r>
-              <a:rPr sz="1300" b="0">
-                <a:solidFill>
-                  <a:srgbClr val="101010"/>
-                </a:solidFill>
-              </a:rPr>
-              <a:t/>
-            </a:r>
+            <a:endParaRPr sz="1300" b="0">
+              <a:solidFill>
+                <a:srgbClr val="101010"/>
+              </a:solidFill>
+            </a:endParaRPr>
           </a:p>
           <a:p>
             <a:pPr algn="l"/>
@@ -8662,7 +6832,7 @@
 </file>
 
 <file path=ppt/slides/slide7.xml><?xml version="1.0" encoding="utf-8"?>
-<p:sld xmlns:a="http://schemas.openxmlformats.org/drawingml/2006/main" xmlns:p="http://schemas.openxmlformats.org/presentationml/2006/main" xmlns:r="http://schemas.openxmlformats.org/officeDocument/2006/relationships">
+<p:sld xmlns:a="http://schemas.openxmlformats.org/drawingml/2006/main" xmlns:r="http://schemas.openxmlformats.org/officeDocument/2006/relationships" xmlns:p="http://schemas.openxmlformats.org/presentationml/2006/main">
   <p:cSld>
     <p:spTree>
       <p:nvGrpSpPr>
@@ -8670,7 +6840,14 @@
         <p:cNvGrpSpPr/>
         <p:nvPr/>
       </p:nvGrpSpPr>
-      <p:grpSpPr/>
+      <p:grpSpPr>
+        <a:xfrm>
+          <a:off x="0" y="0"/>
+          <a:ext cx="0" cy="0"/>
+          <a:chOff x="0" y="0"/>
+          <a:chExt cx="0" cy="0"/>
+        </a:xfrm>
+      </p:grpSpPr>
       <p:sp>
         <p:nvSpPr>
           <p:cNvPr id="2" name="TextBox 1"/>
@@ -8748,7 +6925,7 @@
         <p:spPr>
           <a:xfrm>
             <a:off x="457200" y="1280160"/>
-            <a:ext cx="11247120" cy="5303520"/>
+            <a:ext cx="11247120" cy="2862322"/>
           </a:xfrm>
           <a:prstGeom prst="rect">
             <a:avLst/>
@@ -8763,29 +6940,77 @@
           <a:p>
             <a:pPr algn="l"/>
             <a:r>
-              <a:rPr sz="1200" b="0">
-                <a:solidFill>
-                  <a:srgbClr val="101010"/>
-                </a:solidFill>
-              </a:rPr>
-              <a:t>Wormhole (Wu et al., FAST 2019) is a hybrid trie plus hash plus linked list ordered concurrent index.</a:t>
-            </a:r>
-          </a:p>
-          <a:p>
-            <a:pPr algn="l"/>
-            <a:r>
-              <a:rPr sz="1200" b="0">
-                <a:solidFill>
-                  <a:srgbClr val="101010"/>
-                </a:solidFill>
-              </a:rPr>
-              <a:t>It hard codes its own rwlock and spinlock as 4 byte opaque structs in lib.h. For our experiment we need</a:t>
-            </a:r>
-          </a:p>
-          <a:p>
-            <a:pPr algn="l"/>
-            <a:r>
-              <a:rPr sz="1200" b="0">
+              <a:rPr sz="1200" b="0" dirty="0">
+                <a:solidFill>
+                  <a:srgbClr val="101010"/>
+                </a:solidFill>
+              </a:rPr>
+              <a:t>Wormhole (Wu et al., FAST 2019) is a hybrid </a:t>
+            </a:r>
+            <a:r>
+              <a:rPr sz="1200" b="0" dirty="0" err="1">
+                <a:solidFill>
+                  <a:srgbClr val="101010"/>
+                </a:solidFill>
+              </a:rPr>
+              <a:t>trie</a:t>
+            </a:r>
+            <a:r>
+              <a:rPr sz="1200" b="0" dirty="0">
+                <a:solidFill>
+                  <a:srgbClr val="101010"/>
+                </a:solidFill>
+              </a:rPr>
+              <a:t> plus hash plus linked list ordered concurrent index.</a:t>
+            </a:r>
+          </a:p>
+          <a:p>
+            <a:pPr algn="l"/>
+            <a:r>
+              <a:rPr sz="1200" b="0" dirty="0">
+                <a:solidFill>
+                  <a:srgbClr val="101010"/>
+                </a:solidFill>
+              </a:rPr>
+              <a:t>It hard codes its own </a:t>
+            </a:r>
+            <a:r>
+              <a:rPr sz="1200" b="0" dirty="0" err="1">
+                <a:solidFill>
+                  <a:srgbClr val="101010"/>
+                </a:solidFill>
+              </a:rPr>
+              <a:t>rwlock</a:t>
+            </a:r>
+            <a:r>
+              <a:rPr sz="1200" b="0" dirty="0">
+                <a:solidFill>
+                  <a:srgbClr val="101010"/>
+                </a:solidFill>
+              </a:rPr>
+              <a:t> and spinlock as 4 byte opaque structs in </a:t>
+            </a:r>
+            <a:r>
+              <a:rPr sz="1200" b="0" dirty="0" err="1">
+                <a:solidFill>
+                  <a:srgbClr val="101010"/>
+                </a:solidFill>
+              </a:rPr>
+              <a:t>lib.h</a:t>
+            </a:r>
+            <a:r>
+              <a:rPr sz="1200" b="0" dirty="0">
+                <a:solidFill>
+                  <a:srgbClr val="101010"/>
+                </a:solidFill>
+              </a:rPr>
+              <a:t>. For our experiment we need</a:t>
+            </a:r>
+          </a:p>
+          <a:p>
+            <a:pPr algn="l"/>
+            <a:r>
+              <a:rPr sz="1200" b="0" dirty="0">
                 <a:solidFill>
                   <a:srgbClr val="101010"/>
                 </a:solidFill>
@@ -8795,19 +7020,16 @@
           </a:p>
           <a:p>
             <a:pPr algn="l"/>
-            <a:r>
-              <a:rPr sz="1200" b="0">
-                <a:solidFill>
-                  <a:srgbClr val="101010"/>
-                </a:solidFill>
-              </a:rPr>
-              <a:t/>
-            </a:r>
-          </a:p>
-          <a:p>
-            <a:pPr algn="l"/>
-            <a:r>
-              <a:rPr sz="1200" b="0">
+            <a:endParaRPr sz="1200" b="0" dirty="0">
+              <a:solidFill>
+                <a:srgbClr val="101010"/>
+              </a:solidFill>
+            </a:endParaRPr>
+          </a:p>
+          <a:p>
+            <a:pPr algn="l"/>
+            <a:r>
+              <a:rPr sz="1200" b="0" dirty="0">
                 <a:solidFill>
                   <a:srgbClr val="101010"/>
                 </a:solidFill>
@@ -8818,18 +7040,34 @@
           <a:p>
             <a:pPr algn="l"/>
             <a:r>
-              <a:rPr sz="1200" b="0">
-                <a:solidFill>
-                  <a:srgbClr val="101010"/>
-                </a:solidFill>
-              </a:rPr>
-              <a:t>   1. Vendor wormhole in tree at third_party/wormhole/. The only edits to upstream sources are short</a:t>
-            </a:r>
-          </a:p>
-          <a:p>
-            <a:pPr algn="l"/>
-            <a:r>
-              <a:rPr sz="1200" b="0">
+              <a:rPr sz="1200" b="0" dirty="0">
+                <a:solidFill>
+                  <a:srgbClr val="101010"/>
+                </a:solidFill>
+              </a:rPr>
+              <a:t>   1. Vendor wormhole in tree at </a:t>
+            </a:r>
+            <a:r>
+              <a:rPr sz="1200" b="0" dirty="0" err="1">
+                <a:solidFill>
+                  <a:srgbClr val="101010"/>
+                </a:solidFill>
+              </a:rPr>
+              <a:t>third_party</a:t>
+            </a:r>
+            <a:r>
+              <a:rPr sz="1200" b="0" dirty="0">
+                <a:solidFill>
+                  <a:srgbClr val="101010"/>
+                </a:solidFill>
+              </a:rPr>
+              <a:t>/wormhole/. The only edits to upstream sources are short</a:t>
+            </a:r>
+          </a:p>
+          <a:p>
+            <a:pPr algn="l"/>
+            <a:r>
+              <a:rPr sz="1200" b="0" dirty="0">
                 <a:solidFill>
                   <a:srgbClr val="101010"/>
                 </a:solidFill>
@@ -8840,122 +7078,262 @@
           <a:p>
             <a:pPr algn="l"/>
             <a:r>
-              <a:rPr sz="1200" b="0">
-                <a:solidFill>
-                  <a:srgbClr val="101010"/>
-                </a:solidFill>
-              </a:rPr>
-              <a:t>   2. Add wh_lock_shim.h, which redefines struct rwlock and struct spinlock as 128 byte storage arrays</a:t>
-            </a:r>
-          </a:p>
-          <a:p>
-            <a:pPr algn="l"/>
-            <a:r>
-              <a:rPr sz="1200" b="0">
-                <a:solidFill>
-                  <a:srgbClr val="101010"/>
-                </a:solidFill>
-              </a:rPr>
-              <a:t>      with extern C function declarations matching upstream signatures (rwlock_lock_read, rwlock_trylock_write_nr, etc.).</a:t>
-            </a:r>
-          </a:p>
-          <a:p>
-            <a:pPr algn="l"/>
-            <a:r>
-              <a:rPr sz="1200" b="0">
-                <a:solidFill>
-                  <a:srgbClr val="101010"/>
-                </a:solidFill>
-              </a:rPr>
-              <a:t>   3. Add wh_lock_shim.cpp, a C++ TU that picks LockT via WH_LOCK_&lt;NAME&gt; macro, asserts size and alignment,</a:t>
-            </a:r>
-          </a:p>
-          <a:p>
-            <a:pPr algn="l"/>
-            <a:r>
-              <a:rPr sz="1200" b="0">
-                <a:solidFill>
-                  <a:srgbClr val="101010"/>
-                </a:solidFill>
-              </a:rPr>
-              <a:t>      and provides extern C bodies. Each function placement-news the LockT into the shim storage at init time</a:t>
-            </a:r>
-          </a:p>
-          <a:p>
-            <a:pPr algn="l"/>
-            <a:r>
-              <a:rPr sz="1200" b="0">
-                <a:solidFill>
-                  <a:srgbClr val="101010"/>
-                </a:solidFill>
-              </a:rPr>
-              <a:t>      and dispatches via small if constexpr templates so the non matching branches are elided.</a:t>
-            </a:r>
-          </a:p>
-          <a:p>
-            <a:pPr algn="l"/>
-            <a:r>
-              <a:rPr sz="1200" b="0">
-                <a:solidFill>
-                  <a:srgbClr val="101010"/>
-                </a:solidFill>
-              </a:rPr>
-              <a:t/>
-            </a:r>
-          </a:p>
-          <a:p>
-            <a:pPr algn="l"/>
-            <a:r>
-              <a:rPr sz="1200" b="0">
-                <a:solidFill>
-                  <a:srgbClr val="101010"/>
-                </a:solidFill>
-              </a:rPr>
-              <a:t>Variants built per CMake target:</a:t>
-            </a:r>
-          </a:p>
-          <a:p>
-            <a:pPr algn="l"/>
-            <a:r>
-              <a:rPr sz="1200" b="0">
-                <a:solidFill>
-                  <a:srgbClr val="101010"/>
-                </a:solidFill>
-              </a:rPr>
-              <a:t>   default (upstream rwlock, no shim), rw, tas, ttas, cas, occ, occ-opt.</a:t>
-            </a:r>
-          </a:p>
-          <a:p>
-            <a:pPr algn="l"/>
-            <a:r>
-              <a:rPr sz="1200" b="0">
-                <a:solidFill>
-                  <a:srgbClr val="101010"/>
-                </a:solidFill>
-              </a:rPr>
-              <a:t/>
-            </a:r>
-          </a:p>
-          <a:p>
-            <a:pPr algn="l"/>
-            <a:r>
-              <a:rPr sz="1200" b="0">
-                <a:solidFill>
-                  <a:srgbClr val="101010"/>
-                </a:solidFill>
-              </a:rPr>
-              <a:t>occ-opt is special: writer side uses the cas lock, but readers walk the leaf without taking the lock at all.</a:t>
-            </a:r>
-          </a:p>
-          <a:p>
-            <a:pPr algn="l"/>
-            <a:r>
-              <a:rPr sz="1200" b="0">
-                <a:solidFill>
-                  <a:srgbClr val="101010"/>
-                </a:solidFill>
-              </a:rPr>
-              <a:t>They snapshot a per leaf seqlock counter, read the entries, then validate. On mismatch they retry.</a:t>
+              <a:rPr sz="1200" b="0" dirty="0">
+                <a:solidFill>
+                  <a:srgbClr val="101010"/>
+                </a:solidFill>
+              </a:rPr>
+              <a:t>   2. Add </a:t>
+            </a:r>
+            <a:r>
+              <a:rPr sz="1200" b="0" dirty="0" err="1">
+                <a:solidFill>
+                  <a:srgbClr val="101010"/>
+                </a:solidFill>
+              </a:rPr>
+              <a:t>wh_lock_shim.h</a:t>
+            </a:r>
+            <a:r>
+              <a:rPr sz="1200" b="0" dirty="0">
+                <a:solidFill>
+                  <a:srgbClr val="101010"/>
+                </a:solidFill>
+              </a:rPr>
+              <a:t>, which redefines struct </a:t>
+            </a:r>
+            <a:r>
+              <a:rPr sz="1200" b="0" dirty="0" err="1">
+                <a:solidFill>
+                  <a:srgbClr val="101010"/>
+                </a:solidFill>
+              </a:rPr>
+              <a:t>rwlock</a:t>
+            </a:r>
+            <a:r>
+              <a:rPr sz="1200" b="0" dirty="0">
+                <a:solidFill>
+                  <a:srgbClr val="101010"/>
+                </a:solidFill>
+              </a:rPr>
+              <a:t> and struct spinlock as 128 byte storage arrays</a:t>
+            </a:r>
+          </a:p>
+          <a:p>
+            <a:pPr algn="l"/>
+            <a:r>
+              <a:rPr sz="1200" b="0" dirty="0">
+                <a:solidFill>
+                  <a:srgbClr val="101010"/>
+                </a:solidFill>
+              </a:rPr>
+              <a:t>      with extern C function declarations matching upstream signatures (</a:t>
+            </a:r>
+            <a:r>
+              <a:rPr sz="1200" b="0" dirty="0" err="1">
+                <a:solidFill>
+                  <a:srgbClr val="101010"/>
+                </a:solidFill>
+              </a:rPr>
+              <a:t>rwlock_lock_read</a:t>
+            </a:r>
+            <a:r>
+              <a:rPr sz="1200" b="0" dirty="0">
+                <a:solidFill>
+                  <a:srgbClr val="101010"/>
+                </a:solidFill>
+              </a:rPr>
+              <a:t>, </a:t>
+            </a:r>
+            <a:r>
+              <a:rPr sz="1200" b="0" dirty="0" err="1">
+                <a:solidFill>
+                  <a:srgbClr val="101010"/>
+                </a:solidFill>
+              </a:rPr>
+              <a:t>rwlock_trylock_write_nr</a:t>
+            </a:r>
+            <a:r>
+              <a:rPr sz="1200" b="0" dirty="0">
+                <a:solidFill>
+                  <a:srgbClr val="101010"/>
+                </a:solidFill>
+              </a:rPr>
+              <a:t>, etc.).</a:t>
+            </a:r>
+          </a:p>
+          <a:p>
+            <a:pPr algn="l"/>
+            <a:r>
+              <a:rPr sz="1200" b="0" dirty="0">
+                <a:solidFill>
+                  <a:srgbClr val="101010"/>
+                </a:solidFill>
+              </a:rPr>
+              <a:t>   3. Add </a:t>
+            </a:r>
+            <a:r>
+              <a:rPr sz="1200" b="0" dirty="0" err="1">
+                <a:solidFill>
+                  <a:srgbClr val="101010"/>
+                </a:solidFill>
+              </a:rPr>
+              <a:t>wh_lock_shim.cpp</a:t>
+            </a:r>
+            <a:r>
+              <a:rPr sz="1200" b="0" dirty="0">
+                <a:solidFill>
+                  <a:srgbClr val="101010"/>
+                </a:solidFill>
+              </a:rPr>
+              <a:t>, a C++ TU that picks </a:t>
+            </a:r>
+            <a:r>
+              <a:rPr sz="1200" b="0" dirty="0" err="1">
+                <a:solidFill>
+                  <a:srgbClr val="101010"/>
+                </a:solidFill>
+              </a:rPr>
+              <a:t>LockT</a:t>
+            </a:r>
+            <a:r>
+              <a:rPr sz="1200" b="0" dirty="0">
+                <a:solidFill>
+                  <a:srgbClr val="101010"/>
+                </a:solidFill>
+              </a:rPr>
+              <a:t> via WH_LOCK_&lt;NAME&gt; macro, asserts size and alignment,</a:t>
+            </a:r>
+          </a:p>
+          <a:p>
+            <a:pPr algn="l"/>
+            <a:r>
+              <a:rPr sz="1200" b="0" dirty="0">
+                <a:solidFill>
+                  <a:srgbClr val="101010"/>
+                </a:solidFill>
+              </a:rPr>
+              <a:t>      and provides extern C bodies. Each function placement-news the </a:t>
+            </a:r>
+            <a:r>
+              <a:rPr sz="1200" b="0" dirty="0" err="1">
+                <a:solidFill>
+                  <a:srgbClr val="101010"/>
+                </a:solidFill>
+              </a:rPr>
+              <a:t>LockT</a:t>
+            </a:r>
+            <a:r>
+              <a:rPr sz="1200" b="0" dirty="0">
+                <a:solidFill>
+                  <a:srgbClr val="101010"/>
+                </a:solidFill>
+              </a:rPr>
+              <a:t> into the shim storage at </a:t>
+            </a:r>
+            <a:r>
+              <a:rPr sz="1200" b="0" dirty="0" err="1">
+                <a:solidFill>
+                  <a:srgbClr val="101010"/>
+                </a:solidFill>
+              </a:rPr>
+              <a:t>init</a:t>
+            </a:r>
+            <a:r>
+              <a:rPr sz="1200" b="0" dirty="0">
+                <a:solidFill>
+                  <a:srgbClr val="101010"/>
+                </a:solidFill>
+              </a:rPr>
+              <a:t> time</a:t>
+            </a:r>
+          </a:p>
+          <a:p>
+            <a:pPr algn="l"/>
+            <a:r>
+              <a:rPr sz="1200" b="0" dirty="0">
+                <a:solidFill>
+                  <a:srgbClr val="101010"/>
+                </a:solidFill>
+              </a:rPr>
+              <a:t>      and dispatches via small if </a:t>
+            </a:r>
+            <a:r>
+              <a:rPr sz="1200" b="0" dirty="0" err="1">
+                <a:solidFill>
+                  <a:srgbClr val="101010"/>
+                </a:solidFill>
+              </a:rPr>
+              <a:t>constexpr</a:t>
+            </a:r>
+            <a:r>
+              <a:rPr sz="1200" b="0" dirty="0">
+                <a:solidFill>
+                  <a:srgbClr val="101010"/>
+                </a:solidFill>
+              </a:rPr>
+              <a:t> templates so the non matching branches are elided.</a:t>
+            </a:r>
+          </a:p>
+          <a:p>
+            <a:pPr algn="l"/>
+            <a:endParaRPr sz="1200" b="0" dirty="0">
+              <a:solidFill>
+                <a:srgbClr val="101010"/>
+              </a:solidFill>
+            </a:endParaRPr>
+          </a:p>
+          <a:p>
+            <a:pPr algn="l"/>
+            <a:r>
+              <a:rPr sz="1200" b="0" dirty="0">
+                <a:solidFill>
+                  <a:srgbClr val="101010"/>
+                </a:solidFill>
+              </a:rPr>
+              <a:t>occ-opt is special: writer side uses the </a:t>
+            </a:r>
+            <a:r>
+              <a:rPr sz="1200" b="0" dirty="0" err="1">
+                <a:solidFill>
+                  <a:srgbClr val="101010"/>
+                </a:solidFill>
+              </a:rPr>
+              <a:t>cas</a:t>
+            </a:r>
+            <a:r>
+              <a:rPr sz="1200" b="0" dirty="0">
+                <a:solidFill>
+                  <a:srgbClr val="101010"/>
+                </a:solidFill>
+              </a:rPr>
+              <a:t> lock, but readers walk the leaf without taking the lock at all.</a:t>
+            </a:r>
+          </a:p>
+          <a:p>
+            <a:pPr algn="l"/>
+            <a:r>
+              <a:rPr sz="1200" b="0" dirty="0">
+                <a:solidFill>
+                  <a:srgbClr val="101010"/>
+                </a:solidFill>
+              </a:rPr>
+              <a:t>They snapshot a per leaf </a:t>
+            </a:r>
+            <a:r>
+              <a:rPr sz="1200" b="0" dirty="0" err="1">
+                <a:solidFill>
+                  <a:srgbClr val="101010"/>
+                </a:solidFill>
+              </a:rPr>
+              <a:t>seqlock</a:t>
+            </a:r>
+            <a:r>
+              <a:rPr sz="1200" b="0" dirty="0">
+                <a:solidFill>
+                  <a:srgbClr val="101010"/>
+                </a:solidFill>
+              </a:rPr>
+              <a:t> counter, read the entries, then validate. On mismatch they retry.</a:t>
             </a:r>
           </a:p>
         </p:txBody>
@@ -8969,7 +7347,7 @@
 </file>
 
 <file path=ppt/slides/slide8.xml><?xml version="1.0" encoding="utf-8"?>
-<p:sld xmlns:a="http://schemas.openxmlformats.org/drawingml/2006/main" xmlns:p="http://schemas.openxmlformats.org/presentationml/2006/main" xmlns:r="http://schemas.openxmlformats.org/officeDocument/2006/relationships">
+<p:sld xmlns:a="http://schemas.openxmlformats.org/drawingml/2006/main" xmlns:r="http://schemas.openxmlformats.org/officeDocument/2006/relationships" xmlns:p="http://schemas.openxmlformats.org/presentationml/2006/main">
   <p:cSld>
     <p:spTree>
       <p:nvGrpSpPr>
@@ -8977,7 +7355,14 @@
         <p:cNvGrpSpPr/>
         <p:nvPr/>
       </p:nvGrpSpPr>
-      <p:grpSpPr/>
+      <p:grpSpPr>
+        <a:xfrm>
+          <a:off x="0" y="0"/>
+          <a:ext cx="0" cy="0"/>
+          <a:chOff x="0" y="0"/>
+          <a:chExt cx="0" cy="0"/>
+        </a:xfrm>
+      </p:grpSpPr>
       <p:sp>
         <p:nvSpPr>
           <p:cNvPr id="2" name="TextBox 1"/>
@@ -9055,7 +7440,7 @@
         <p:spPr>
           <a:xfrm>
             <a:off x="457200" y="1280160"/>
-            <a:ext cx="11247120" cy="5303520"/>
+            <a:ext cx="11247120" cy="2292935"/>
           </a:xfrm>
           <a:prstGeom prst="rect">
             <a:avLst/>
@@ -9070,40 +7455,157 @@
           <a:p>
             <a:pPr algn="l"/>
             <a:r>
-              <a:rPr sz="1100" b="0">
-                <a:solidFill>
-                  <a:srgbClr val="101010"/>
-                </a:solidFill>
-              </a:rPr>
-              <a:t>Symptom: wh_test_rw, wh_test_cas, wh_test_tas, wh_test_ttas, wh_test_occ, wh_test_occ-opt all crashed in</a:t>
-            </a:r>
-          </a:p>
-          <a:p>
-            <a:pPr algn="l"/>
-            <a:r>
-              <a:rPr sz="1100" b="0">
-                <a:solidFill>
-                  <a:srgbClr val="101010"/>
-                </a:solidFill>
-              </a:rPr>
-              <a:t>wormleaf_insert_hs on Xeon. wh_test_default ran clean. The crash was invisible on Apple Silicon.</a:t>
-            </a:r>
-          </a:p>
-          <a:p>
-            <a:pPr algn="l"/>
-            <a:r>
-              <a:rPr sz="1100" b="0">
-                <a:solidFill>
-                  <a:srgbClr val="101010"/>
-                </a:solidFill>
-              </a:rPr>
-              <a:t/>
-            </a:r>
-          </a:p>
-          <a:p>
-            <a:pPr algn="l"/>
-            <a:r>
-              <a:rPr sz="1100" b="0">
+              <a:rPr sz="1100" b="0" dirty="0">
+                <a:solidFill>
+                  <a:srgbClr val="101010"/>
+                </a:solidFill>
+              </a:rPr>
+              <a:t>Symptom: </a:t>
+            </a:r>
+            <a:r>
+              <a:rPr sz="1100" b="0" dirty="0" err="1">
+                <a:solidFill>
+                  <a:srgbClr val="101010"/>
+                </a:solidFill>
+              </a:rPr>
+              <a:t>wh_test_rw</a:t>
+            </a:r>
+            <a:r>
+              <a:rPr sz="1100" b="0" dirty="0">
+                <a:solidFill>
+                  <a:srgbClr val="101010"/>
+                </a:solidFill>
+              </a:rPr>
+              <a:t>, </a:t>
+            </a:r>
+            <a:r>
+              <a:rPr sz="1100" b="0" dirty="0" err="1">
+                <a:solidFill>
+                  <a:srgbClr val="101010"/>
+                </a:solidFill>
+              </a:rPr>
+              <a:t>wh_test_cas</a:t>
+            </a:r>
+            <a:r>
+              <a:rPr sz="1100" b="0" dirty="0">
+                <a:solidFill>
+                  <a:srgbClr val="101010"/>
+                </a:solidFill>
+              </a:rPr>
+              <a:t>, </a:t>
+            </a:r>
+            <a:r>
+              <a:rPr sz="1100" b="0" dirty="0" err="1">
+                <a:solidFill>
+                  <a:srgbClr val="101010"/>
+                </a:solidFill>
+              </a:rPr>
+              <a:t>wh_test_tas</a:t>
+            </a:r>
+            <a:r>
+              <a:rPr sz="1100" b="0" dirty="0">
+                <a:solidFill>
+                  <a:srgbClr val="101010"/>
+                </a:solidFill>
+              </a:rPr>
+              <a:t>, </a:t>
+            </a:r>
+            <a:r>
+              <a:rPr sz="1100" b="0" dirty="0" err="1">
+                <a:solidFill>
+                  <a:srgbClr val="101010"/>
+                </a:solidFill>
+              </a:rPr>
+              <a:t>wh_test_ttas</a:t>
+            </a:r>
+            <a:r>
+              <a:rPr sz="1100" b="0" dirty="0">
+                <a:solidFill>
+                  <a:srgbClr val="101010"/>
+                </a:solidFill>
+              </a:rPr>
+              <a:t>, </a:t>
+            </a:r>
+            <a:r>
+              <a:rPr sz="1100" b="0" dirty="0" err="1">
+                <a:solidFill>
+                  <a:srgbClr val="101010"/>
+                </a:solidFill>
+              </a:rPr>
+              <a:t>wh_test_occ</a:t>
+            </a:r>
+            <a:r>
+              <a:rPr sz="1100" b="0" dirty="0">
+                <a:solidFill>
+                  <a:srgbClr val="101010"/>
+                </a:solidFill>
+              </a:rPr>
+              <a:t>, </a:t>
+            </a:r>
+            <a:r>
+              <a:rPr sz="1100" b="0" dirty="0" err="1">
+                <a:solidFill>
+                  <a:srgbClr val="101010"/>
+                </a:solidFill>
+              </a:rPr>
+              <a:t>wh_test_occ</a:t>
+            </a:r>
+            <a:r>
+              <a:rPr sz="1100" b="0" dirty="0">
+                <a:solidFill>
+                  <a:srgbClr val="101010"/>
+                </a:solidFill>
+              </a:rPr>
+              <a:t>-opt all crashed in</a:t>
+            </a:r>
+          </a:p>
+          <a:p>
+            <a:pPr algn="l"/>
+            <a:r>
+              <a:rPr sz="1100" b="0" dirty="0" err="1">
+                <a:solidFill>
+                  <a:srgbClr val="101010"/>
+                </a:solidFill>
+              </a:rPr>
+              <a:t>wormleaf_insert_hs</a:t>
+            </a:r>
+            <a:r>
+              <a:rPr sz="1100" b="0" dirty="0">
+                <a:solidFill>
+                  <a:srgbClr val="101010"/>
+                </a:solidFill>
+              </a:rPr>
+              <a:t> on Xeon. </a:t>
+            </a:r>
+            <a:r>
+              <a:rPr sz="1100" b="0" dirty="0" err="1">
+                <a:solidFill>
+                  <a:srgbClr val="101010"/>
+                </a:solidFill>
+              </a:rPr>
+              <a:t>wh_test_default</a:t>
+            </a:r>
+            <a:r>
+              <a:rPr sz="1100" b="0" dirty="0">
+                <a:solidFill>
+                  <a:srgbClr val="101010"/>
+                </a:solidFill>
+              </a:rPr>
+              <a:t> ran clean. The crash was invisible on Apple Silicon.</a:t>
+            </a:r>
+          </a:p>
+          <a:p>
+            <a:pPr algn="l"/>
+            <a:endParaRPr sz="1100" b="0" dirty="0">
+              <a:solidFill>
+                <a:srgbClr val="101010"/>
+              </a:solidFill>
+            </a:endParaRPr>
+          </a:p>
+          <a:p>
+            <a:pPr algn="l"/>
+            <a:r>
+              <a:rPr sz="1100" b="0" dirty="0">
                 <a:solidFill>
                   <a:srgbClr val="101010"/>
                 </a:solidFill>
@@ -9114,18 +7616,50 @@
           <a:p>
             <a:pPr algn="l"/>
             <a:r>
-              <a:rPr sz="1100" b="0">
-                <a:solidFill>
-                  <a:srgbClr val="101010"/>
-                </a:solidFill>
-              </a:rPr>
-              <a:t>   wormleaf_shift_inc and wormleaf_shift_dec use _mm256_load_si256 on leaf-&gt;ss (AVX2 aligned load).</a:t>
-            </a:r>
-          </a:p>
-          <a:p>
-            <a:pPr algn="l"/>
-            <a:r>
-              <a:rPr sz="1100" b="0">
+              <a:rPr sz="1100" b="0" dirty="0">
+                <a:solidFill>
+                  <a:srgbClr val="101010"/>
+                </a:solidFill>
+              </a:rPr>
+              <a:t>   </a:t>
+            </a:r>
+            <a:r>
+              <a:rPr sz="1100" b="0" dirty="0" err="1">
+                <a:solidFill>
+                  <a:srgbClr val="101010"/>
+                </a:solidFill>
+              </a:rPr>
+              <a:t>wormleaf_shift_inc</a:t>
+            </a:r>
+            <a:r>
+              <a:rPr sz="1100" b="0" dirty="0">
+                <a:solidFill>
+                  <a:srgbClr val="101010"/>
+                </a:solidFill>
+              </a:rPr>
+              <a:t> and </a:t>
+            </a:r>
+            <a:r>
+              <a:rPr sz="1100" b="0" dirty="0" err="1">
+                <a:solidFill>
+                  <a:srgbClr val="101010"/>
+                </a:solidFill>
+              </a:rPr>
+              <a:t>wormleaf_shift_dec</a:t>
+            </a:r>
+            <a:r>
+              <a:rPr sz="1100" b="0" dirty="0">
+                <a:solidFill>
+                  <a:srgbClr val="101010"/>
+                </a:solidFill>
+              </a:rPr>
+              <a:t> use _mm256_load_si256 on leaf-&gt;ss (AVX2 aligned load).</a:t>
+            </a:r>
+          </a:p>
+          <a:p>
+            <a:pPr algn="l"/>
+            <a:r>
+              <a:rPr sz="1100" b="0" dirty="0">
                 <a:solidFill>
                   <a:srgbClr val="101010"/>
                 </a:solidFill>
@@ -9136,29 +7670,93 @@
           <a:p>
             <a:pPr algn="l"/>
             <a:r>
-              <a:rPr sz="1100" b="0">
-                <a:solidFill>
-                  <a:srgbClr val="101010"/>
-                </a:solidFill>
-              </a:rPr>
-              <a:t>   With upstream wormhole, leaflock + sortlock take 8 bytes total, so leaf-&gt;ss starts at offset 1088 (aligned).</a:t>
-            </a:r>
-          </a:p>
-          <a:p>
-            <a:pPr algn="l"/>
-            <a:r>
-              <a:rPr sz="1100" b="0">
-                <a:solidFill>
-                  <a:srgbClr val="101010"/>
-                </a:solidFill>
-              </a:rPr>
-              <a:t>   With our shim, leaflock + sortlock take 256 bytes, pushing leaf-&gt;ss to offset 1336 (1336 mod 16 = 8).</a:t>
-            </a:r>
-          </a:p>
-          <a:p>
-            <a:pPr algn="l"/>
-            <a:r>
-              <a:rPr sz="1100" b="0">
+              <a:rPr sz="1100" b="0" dirty="0">
+                <a:solidFill>
+                  <a:srgbClr val="101010"/>
+                </a:solidFill>
+              </a:rPr>
+              <a:t>   With upstream wormhole, </a:t>
+            </a:r>
+            <a:r>
+              <a:rPr sz="1100" b="0" dirty="0" err="1">
+                <a:solidFill>
+                  <a:srgbClr val="101010"/>
+                </a:solidFill>
+              </a:rPr>
+              <a:t>leaflock</a:t>
+            </a:r>
+            <a:r>
+              <a:rPr sz="1100" b="0" dirty="0">
+                <a:solidFill>
+                  <a:srgbClr val="101010"/>
+                </a:solidFill>
+              </a:rPr>
+              <a:t> + </a:t>
+            </a:r>
+            <a:r>
+              <a:rPr sz="1100" b="0" dirty="0" err="1">
+                <a:solidFill>
+                  <a:srgbClr val="101010"/>
+                </a:solidFill>
+              </a:rPr>
+              <a:t>sortlock</a:t>
+            </a:r>
+            <a:r>
+              <a:rPr sz="1100" b="0" dirty="0">
+                <a:solidFill>
+                  <a:srgbClr val="101010"/>
+                </a:solidFill>
+              </a:rPr>
+              <a:t> take 8 bytes total, so leaf-&gt;ss starts at offset 1088 (aligned).</a:t>
+            </a:r>
+          </a:p>
+          <a:p>
+            <a:pPr algn="l"/>
+            <a:r>
+              <a:rPr sz="1100" b="0" dirty="0">
+                <a:solidFill>
+                  <a:srgbClr val="101010"/>
+                </a:solidFill>
+              </a:rPr>
+              <a:t>   With our shim, </a:t>
+            </a:r>
+            <a:r>
+              <a:rPr sz="1100" b="0" dirty="0" err="1">
+                <a:solidFill>
+                  <a:srgbClr val="101010"/>
+                </a:solidFill>
+              </a:rPr>
+              <a:t>leaflock</a:t>
+            </a:r>
+            <a:r>
+              <a:rPr sz="1100" b="0" dirty="0">
+                <a:solidFill>
+                  <a:srgbClr val="101010"/>
+                </a:solidFill>
+              </a:rPr>
+              <a:t> + </a:t>
+            </a:r>
+            <a:r>
+              <a:rPr sz="1100" b="0" dirty="0" err="1">
+                <a:solidFill>
+                  <a:srgbClr val="101010"/>
+                </a:solidFill>
+              </a:rPr>
+              <a:t>sortlock</a:t>
+            </a:r>
+            <a:r>
+              <a:rPr sz="1100" b="0" dirty="0">
+                <a:solidFill>
+                  <a:srgbClr val="101010"/>
+                </a:solidFill>
+              </a:rPr>
+              <a:t> take 256 bytes, pushing leaf-&gt;ss to offset 1336 (1336 mod 16 = 8).</a:t>
+            </a:r>
+          </a:p>
+          <a:p>
+            <a:pPr algn="l"/>
+            <a:r>
+              <a:rPr sz="1100" b="0" dirty="0">
                 <a:solidFill>
                   <a:srgbClr val="101010"/>
                 </a:solidFill>
@@ -9168,112 +7766,123 @@
           </a:p>
           <a:p>
             <a:pPr algn="l"/>
-            <a:r>
-              <a:rPr sz="1100" b="0">
-                <a:solidFill>
-                  <a:srgbClr val="101010"/>
-                </a:solidFill>
-              </a:rPr>
-              <a:t/>
-            </a:r>
-          </a:p>
-          <a:p>
-            <a:pPr algn="l"/>
-            <a:r>
-              <a:rPr sz="1100" b="0">
-                <a:solidFill>
-                  <a:srgbClr val="101010"/>
-                </a:solidFill>
-              </a:rPr>
-              <a:t>Fix (one line):</a:t>
-            </a:r>
-          </a:p>
-          <a:p>
-            <a:pPr algn="l"/>
-            <a:r>
-              <a:rPr sz="1100" b="0">
-                <a:solidFill>
-                  <a:srgbClr val="101010"/>
-                </a:solidFill>
-              </a:rPr>
-              <a:t>   _Alignas(32) struct entry13 hs[WH_KPN]; in struct wormleaf, gated on WH_LOCK_SHIM.</a:t>
-            </a:r>
-          </a:p>
-          <a:p>
-            <a:pPr algn="l"/>
-            <a:r>
-              <a:rPr sz="1100" b="0">
-                <a:solidFill>
-                  <a:srgbClr val="101010"/>
-                </a:solidFill>
-              </a:rPr>
-              <a:t>   This adds 8 bytes of padding before hs[], pulls hs to offset 320 and ss to 1344, both 32 byte aligned.</a:t>
-            </a:r>
-          </a:p>
-          <a:p>
-            <a:pPr algn="l"/>
-            <a:r>
-              <a:rPr sz="1100" b="0">
-                <a:solidFill>
-                  <a:srgbClr val="101010"/>
-                </a:solidFill>
-              </a:rPr>
-              <a:t/>
-            </a:r>
-          </a:p>
-          <a:p>
-            <a:pPr algn="l"/>
-            <a:r>
-              <a:rPr sz="1100" b="0">
-                <a:solidFill>
-                  <a:srgbClr val="101010"/>
-                </a:solidFill>
-              </a:rPr>
-              <a:t>Failed first attempt worth recording:</a:t>
-            </a:r>
-          </a:p>
-          <a:p>
-            <a:pPr algn="l"/>
-            <a:r>
-              <a:rPr sz="1100" b="0">
-                <a:solidFill>
-                  <a:srgbClr val="101010"/>
-                </a:solidFill>
-              </a:rPr>
-              <a:t>   I tried shrinking the shim alignment from alignas(64) to alignas(8). That left ss[] still misaligned</a:t>
-            </a:r>
-          </a:p>
-          <a:p>
-            <a:pPr algn="l"/>
-            <a:r>
-              <a:rPr sz="1100" b="0">
-                <a:solidFill>
-                  <a:srgbClr val="101010"/>
-                </a:solidFill>
-              </a:rPr>
-              <a:t>   and introduced UB whenever LockT had alignas(64) atomics inside (occ_lock, ticket_lock).</a:t>
-            </a:r>
-          </a:p>
-          <a:p>
-            <a:pPr algn="l"/>
-            <a:r>
-              <a:rPr sz="1100" b="0">
-                <a:solidFill>
-                  <a:srgbClr val="101010"/>
-                </a:solidFill>
-              </a:rPr>
-              <a:t>   Mac wh-cas and wh-rw started hanging at 99 percent CPU in rwlock_trylock_write, even single threaded.</a:t>
-            </a:r>
-          </a:p>
-          <a:p>
-            <a:pPr algn="l"/>
-            <a:r>
-              <a:rPr sz="1100" b="0">
-                <a:solidFill>
-                  <a:srgbClr val="101010"/>
-                </a:solidFill>
-              </a:rPr>
-              <a:t>   Reverted in the same change as the proper _Alignas(32) fix.</a:t>
+            <a:endParaRPr sz="1100" b="0" dirty="0">
+              <a:solidFill>
+                <a:srgbClr val="101010"/>
+              </a:solidFill>
+            </a:endParaRPr>
+          </a:p>
+          <a:p>
+            <a:pPr algn="l"/>
+            <a:r>
+              <a:rPr sz="1100" b="0" dirty="0">
+                <a:solidFill>
+                  <a:srgbClr val="101010"/>
+                </a:solidFill>
+              </a:rPr>
+              <a:t>Fix:</a:t>
+            </a:r>
+          </a:p>
+          <a:p>
+            <a:pPr algn="l"/>
+            <a:r>
+              <a:rPr sz="1100" b="0" dirty="0">
+                <a:solidFill>
+                  <a:srgbClr val="101010"/>
+                </a:solidFill>
+              </a:rPr>
+              <a:t>   _</a:t>
+            </a:r>
+            <a:r>
+              <a:rPr sz="1100" b="0" dirty="0" err="1">
+                <a:solidFill>
+                  <a:srgbClr val="101010"/>
+                </a:solidFill>
+              </a:rPr>
+              <a:t>Alignas</a:t>
+            </a:r>
+            <a:r>
+              <a:rPr sz="1100" b="0" dirty="0">
+                <a:solidFill>
+                  <a:srgbClr val="101010"/>
+                </a:solidFill>
+              </a:rPr>
+              <a:t>(32) struct entry13 </a:t>
+            </a:r>
+            <a:r>
+              <a:rPr sz="1100" b="0" dirty="0" err="1">
+                <a:solidFill>
+                  <a:srgbClr val="101010"/>
+                </a:solidFill>
+              </a:rPr>
+              <a:t>hs</a:t>
+            </a:r>
+            <a:r>
+              <a:rPr sz="1100" b="0" dirty="0">
+                <a:solidFill>
+                  <a:srgbClr val="101010"/>
+                </a:solidFill>
+              </a:rPr>
+              <a:t>[WH_KPN]; in struct </a:t>
+            </a:r>
+            <a:r>
+              <a:rPr sz="1100" b="0" dirty="0" err="1">
+                <a:solidFill>
+                  <a:srgbClr val="101010"/>
+                </a:solidFill>
+              </a:rPr>
+              <a:t>wormleaf</a:t>
+            </a:r>
+            <a:r>
+              <a:rPr sz="1100" b="0" dirty="0">
+                <a:solidFill>
+                  <a:srgbClr val="101010"/>
+                </a:solidFill>
+              </a:rPr>
+              <a:t>, gated on WH_LOCK_SHIM.</a:t>
+            </a:r>
+          </a:p>
+          <a:p>
+            <a:pPr algn="l"/>
+            <a:r>
+              <a:rPr sz="1100" b="0" dirty="0">
+                <a:solidFill>
+                  <a:srgbClr val="101010"/>
+                </a:solidFill>
+              </a:rPr>
+              <a:t>   This adds 8 bytes of padding before </a:t>
+            </a:r>
+            <a:r>
+              <a:rPr sz="1100" b="0" dirty="0" err="1">
+                <a:solidFill>
+                  <a:srgbClr val="101010"/>
+                </a:solidFill>
+              </a:rPr>
+              <a:t>hs</a:t>
+            </a:r>
+            <a:r>
+              <a:rPr sz="1100" b="0" dirty="0">
+                <a:solidFill>
+                  <a:srgbClr val="101010"/>
+                </a:solidFill>
+              </a:rPr>
+              <a:t>[], pulls </a:t>
+            </a:r>
+            <a:r>
+              <a:rPr sz="1100" b="0" dirty="0" err="1">
+                <a:solidFill>
+                  <a:srgbClr val="101010"/>
+                </a:solidFill>
+              </a:rPr>
+              <a:t>hs</a:t>
+            </a:r>
+            <a:r>
+              <a:rPr sz="1100" b="0" dirty="0">
+                <a:solidFill>
+                  <a:srgbClr val="101010"/>
+                </a:solidFill>
+              </a:rPr>
+              <a:t> to offset 320 and ss to 1344, both 32 byte aligned.</a:t>
             </a:r>
           </a:p>
         </p:txBody>
@@ -9287,7 +7896,7 @@
 </file>
 
 <file path=ppt/slides/slide9.xml><?xml version="1.0" encoding="utf-8"?>
-<p:sld xmlns:a="http://schemas.openxmlformats.org/drawingml/2006/main" xmlns:p="http://schemas.openxmlformats.org/presentationml/2006/main" xmlns:r="http://schemas.openxmlformats.org/officeDocument/2006/relationships">
+<p:sld xmlns:a="http://schemas.openxmlformats.org/drawingml/2006/main" xmlns:r="http://schemas.openxmlformats.org/officeDocument/2006/relationships" xmlns:p="http://schemas.openxmlformats.org/presentationml/2006/main">
   <p:cSld>
     <p:spTree>
       <p:nvGrpSpPr>
@@ -9295,7 +7904,14 @@
         <p:cNvGrpSpPr/>
         <p:nvPr/>
       </p:nvGrpSpPr>
-      <p:grpSpPr/>
+      <p:grpSpPr>
+        <a:xfrm>
+          <a:off x="0" y="0"/>
+          <a:ext cx="0" cy="0"/>
+          <a:chOff x="0" y="0"/>
+          <a:chExt cx="0" cy="0"/>
+        </a:xfrm>
+      </p:grpSpPr>
       <p:sp>
         <p:nvSpPr>
           <p:cNvPr id="2" name="TextBox 1"/>
@@ -9420,13 +8036,21 @@
           </a:p>
           <a:p>
             <a:pPr algn="l"/>
+            <a:endParaRPr sz="1000" b="0">
+              <a:solidFill>
+                <a:srgbClr val="101010"/>
+              </a:solidFill>
+            </a:endParaRPr>
+          </a:p>
+          <a:p>
+            <a:pPr algn="l"/>
             <a:r>
               <a:rPr sz="1000" b="0">
                 <a:solidFill>
                   <a:srgbClr val="101010"/>
                 </a:solidFill>
               </a:rPr>
-              <a:t/>
+              <a:t>2. Missing seq bumps in writer fast paths.</a:t>
             </a:r>
           </a:p>
           <a:p>
@@ -9437,7 +8061,7 @@
                   <a:srgbClr val="101010"/>
                 </a:solidFill>
               </a:rPr>
-              <a:t>2. Missing seq bumps in writer fast paths.</a:t>
+              <a:t>   wormhole_jump_leaf_write and wormhole_split_insert bypass the regular wormleaf_lock_write / unlock_write.</a:t>
             </a:r>
           </a:p>
           <a:p>
@@ -9448,7 +8072,7 @@
                   <a:srgbClr val="101010"/>
                 </a:solidFill>
               </a:rPr>
-              <a:t>   wormhole_jump_leaf_write and wormhole_split_insert bypass the regular wormleaf_lock_write / unlock_write.</a:t>
+              <a:t>   Without explicit bumps the seq would go odd and never come back to even, leaving the leaf in an</a:t>
             </a:r>
           </a:p>
           <a:p>
@@ -9459,8 +8083,16 @@
                   <a:srgbClr val="101010"/>
                 </a:solidFill>
               </a:rPr>
-              <a:t>   Without explicit bumps the seq would go odd and never come back to even, leaving the leaf in an</a:t>
-            </a:r>
+              <a:t>   apparent "writer in progress" state forever. Fix: bump occ_seq on trylock_write_nr success in those paths.</a:t>
+            </a:r>
+          </a:p>
+          <a:p>
+            <a:pPr algn="l"/>
+            <a:endParaRPr sz="1000" b="0">
+              <a:solidFill>
+                <a:srgbClr val="101010"/>
+              </a:solidFill>
+            </a:endParaRPr>
           </a:p>
           <a:p>
             <a:pPr algn="l"/>
@@ -9470,7 +8102,7 @@
                   <a:srgbClr val="101010"/>
                 </a:solidFill>
               </a:rPr>
-              <a:t>   apparent "writer in progress" state forever. Fix: bump occ_seq on trylock_write_nr success in those paths.</a:t>
+              <a:t>3. Torn entry13 reads.</a:t>
             </a:r>
           </a:p>
           <a:p>
@@ -9481,7 +8113,7 @@
                   <a:srgbClr val="101010"/>
                 </a:solidFill>
               </a:rPr>
-              <a:t/>
+              <a:t>   entry13 is an 8 byte packed struct (e1: u16 key prefix, e3: u48 compressed pointer).</a:t>
             </a:r>
           </a:p>
           <a:p>
@@ -9492,7 +8124,7 @@
                   <a:srgbClr val="101010"/>
                 </a:solidFill>
               </a:rPr>
-              <a:t>3. Torn entry13 reads.</a:t>
+              <a:t>   Stock wormleaf_match_hs reads e1 and e3 as separate field accesses. Without the leaflock, a writer</a:t>
             </a:r>
           </a:p>
           <a:p>
@@ -9503,7 +8135,7 @@
                   <a:srgbClr val="101010"/>
                 </a:solidFill>
               </a:rPr>
-              <a:t>   entry13 is an 8 byte packed struct (e1: u16 key prefix, e3: u48 compressed pointer).</a:t>
+              <a:t>   could clear hs[i].v64 between the two reads. Reader sees e1 == pkey, then reads e3 == 0, derefs NULL,</a:t>
             </a:r>
           </a:p>
           <a:p>
@@ -9514,7 +8146,7 @@
                   <a:srgbClr val="101010"/>
                 </a:solidFill>
               </a:rPr>
-              <a:t>   Stock wormleaf_match_hs reads e1 and e3 as separate field accesses. Without the leaflock, a writer</a:t>
+              <a:t>   SIGSEGV. The seqlock validate would catch it, but only after the segfault.</a:t>
             </a:r>
           </a:p>
           <a:p>
@@ -9525,8 +8157,16 @@
                   <a:srgbClr val="101010"/>
                 </a:solidFill>
               </a:rPr>
-              <a:t>   could clear hs[i].v64 between the two reads. Reader sees e1 == pkey, then reads e3 == 0, derefs NULL,</a:t>
-            </a:r>
+              <a:t>   Fix: read entry13 as a single atomic v64 load, unpack e1 and e3 from the same snapshot.</a:t>
+            </a:r>
+          </a:p>
+          <a:p>
+            <a:pPr algn="l"/>
+            <a:endParaRPr sz="1000" b="0">
+              <a:solidFill>
+                <a:srgbClr val="101010"/>
+              </a:solidFill>
+            </a:endParaRPr>
           </a:p>
           <a:p>
             <a:pPr algn="l"/>
@@ -9536,7 +8176,7 @@
                   <a:srgbClr val="101010"/>
                 </a:solidFill>
               </a:rPr>
-              <a:t>   SIGSEGV. The seqlock validate would catch it, but only after the segfault.</a:t>
+              <a:t>4. kv use after free under optimistic reads.</a:t>
             </a:r>
           </a:p>
           <a:p>
@@ -9547,7 +8187,7 @@
                   <a:srgbClr val="101010"/>
                 </a:solidFill>
               </a:rPr>
-              <a:t>   Fix: read entry13 as a single atomic v64 load, unpack e1 and e3 from the same snapshot.</a:t>
+              <a:t>   kvmap_mm_dup frees old kvs immediately on update. An optimistic reader could hold a kv pointer that</a:t>
             </a:r>
           </a:p>
           <a:p>
@@ -9558,7 +8198,7 @@
                   <a:srgbClr val="101010"/>
                 </a:solidFill>
               </a:rPr>
-              <a:t/>
+              <a:t>   gets freed mid-read. Fix: custom kvmap_mm with a no-op free for wh-occ-opt. kvs leak for the run</a:t>
             </a:r>
           </a:p>
           <a:p>
@@ -9569,52 +8209,16 @@
                   <a:srgbClr val="101010"/>
                 </a:solidFill>
               </a:rPr>
-              <a:t>4. kv use after free under optimistic reads.</a:t>
-            </a:r>
-          </a:p>
-          <a:p>
-            <a:pPr algn="l"/>
-            <a:r>
-              <a:rPr sz="1000" b="0">
-                <a:solidFill>
-                  <a:srgbClr val="101010"/>
-                </a:solidFill>
-              </a:rPr>
-              <a:t>   kvmap_mm_dup frees old kvs immediately on update. An optimistic reader could hold a kv pointer that</a:t>
-            </a:r>
-          </a:p>
-          <a:p>
-            <a:pPr algn="l"/>
-            <a:r>
-              <a:rPr sz="1000" b="0">
-                <a:solidFill>
-                  <a:srgbClr val="101010"/>
-                </a:solidFill>
-              </a:rPr>
-              <a:t>   gets freed mid-read. Fix: custom kvmap_mm with a no-op free for wh-occ-opt. kvs leak for the run</a:t>
-            </a:r>
-          </a:p>
-          <a:p>
-            <a:pPr algn="l"/>
-            <a:r>
-              <a:rPr sz="1000" b="0">
-                <a:solidFill>
-                  <a:srgbClr val="101010"/>
-                </a:solidFill>
-              </a:rPr>
               <a:t>   (~150 MB for a 3 second benchmark, acceptable for measurement). A production implementation would defer free via QSBR.</a:t>
             </a:r>
           </a:p>
           <a:p>
             <a:pPr algn="l"/>
-            <a:r>
-              <a:rPr sz="1000" b="0">
-                <a:solidFill>
-                  <a:srgbClr val="101010"/>
-                </a:solidFill>
-              </a:rPr>
-              <a:t/>
-            </a:r>
+            <a:endParaRPr sz="1000" b="0">
+              <a:solidFill>
+                <a:srgbClr val="101010"/>
+              </a:solidFill>
+            </a:endParaRPr>
           </a:p>
           <a:p>
             <a:pPr algn="l"/>
